--- a/docs/Review 3- 28-10- 2026 (1).pptx
+++ b/docs/Review 3- 28-10- 2026 (1).pptx
@@ -22,6 +22,10 @@
     <p:sldId id="268" r:id="rId13"/>
     <p:sldId id="269" r:id="rId14"/>
     <p:sldId id="262" r:id="rId15"/>
+    <p:sldId id="270" r:id="rId22"/>
+    <p:sldId id="271" r:id="rId23"/>
+    <p:sldId id="272" r:id="rId24"/>
+    <p:sldId id="273" r:id="rId25"/>
   </p:sldIdLst>
   <p:sldSz cx="12192000" cy="6858000"/>
   <p:notesSz cx="6858000" cy="9144000"/>
@@ -3834,7 +3838,20 @@
               </a:defRPr>
             </a:pPr>
             <a:r>
-              <a:t>An Explainable Multi-Model Machine Learning Framework for Financial Fraud Detection with Secure API Integration</a:t>
+              <a:t>FraudGuard AI: An Explainable Financial Fraud Detection System Using Machine Learning and Deep Learning</a:t>
+            </a:r>
+          </a:p>
+          <a:p>
+            <a:pPr algn="ctr">
+              <a:defRPr sz="1300" i="1">
+                <a:solidFill>
+                  <a:srgbClr val="2E75B6"/>
+                </a:solidFill>
+                <a:latin typeface="Times New Roman"/>
+              </a:defRPr>
+            </a:pPr>
+            <a:r>
+              <a:t>With Secure RESTful API and Real-Time Kafka Streaming Ingestion</a:t>
             </a:r>
           </a:p>
         </p:txBody>
@@ -4041,7 +4058,7 @@
               </a:defRPr>
             </a:pPr>
             <a:r>
-              <a:t>Software Modules &amp; Streaming Pipeline</a:t>
+              <a:t>Software Modules &amp; Implementation</a:t>
             </a:r>
             <a:endParaRPr sz="3000" b="1" dirty="0">
               <a:latin typeface="Times New Roman" panose="02020603050405020304" pitchFamily="18" charset="0"/>
@@ -4176,7 +4193,7 @@
         <p:spPr>
           <a:xfrm>
             <a:off x="731520" y="1554480"/>
-            <a:ext cx="6217920" cy="4389120"/>
+            <a:ext cx="5943600" cy="4389120"/>
           </a:xfrm>
           <a:prstGeom prst="rect">
             <a:avLst/>
@@ -4191,8 +4208,8 @@
         </p:nvSpPr>
         <p:spPr>
           <a:xfrm>
-            <a:off x="7132320" y="1554480"/>
-            <a:ext cx="4297680" cy="4389120"/>
+            <a:off x="6858000" y="1554480"/>
+            <a:ext cx="4572000" cy="4389120"/>
           </a:xfrm>
           <a:prstGeom prst="roundRect">
             <a:avLst/>
@@ -4236,8 +4253,8 @@
         </p:nvSpPr>
         <p:spPr>
           <a:xfrm>
-            <a:off x="7269480" y="1645920"/>
-            <a:ext cx="4023360" cy="4114800"/>
+            <a:off x="6995160" y="1645920"/>
+            <a:ext cx="4297680" cy="4114800"/>
           </a:xfrm>
           <a:prstGeom prst="rect">
             <a:avLst/>
@@ -4259,7 +4276,7 @@
               </a:defRPr>
             </a:pPr>
             <a:r>
-              <a:t>Implemented System Modules</a:t>
+              <a:t>Implemented System Modules (Repository)</a:t>
             </a:r>
           </a:p>
           <a:p>
@@ -4285,7 +4302,7 @@
               </a:defRPr>
             </a:pPr>
             <a:r>
-              <a:t>• Module 2: Consensus Scoring Engine (src/model_comparison.py): Evaluates 4 diverse models against validation thresholds tau*; maps votes V(x) and composite score R(x) to operational risk tiers.</a:t>
+              <a:t>• Module 2: Model Comparison &amp; Evaluation (src/model_comparison.py): Evaluates four diverse models across holdout partitions; calculates precision, recall, F1, PR-AUC, and ROC-AUC.</a:t>
             </a:r>
           </a:p>
           <a:p>
@@ -4298,7 +4315,7 @@
               </a:defRPr>
             </a:pPr>
             <a:r>
-              <a:t>• Module 3: Explainability &amp; Forensics (src/transaction_explanation.py): Generates local TreeSHAP waterfall plots, global beeswarm rankings, and deterministic direction explanations.</a:t>
+              <a:t>• Module 3: Explainability Pipeline (src/explainability.py): TreeSHAP local attributions, feature importance waterfall generation, and directional explanation factors. (Note: src/transaction_explanation.py does not exist in checked repository).</a:t>
             </a:r>
           </a:p>
           <a:p>
@@ -4311,7 +4328,33 @@
               </a:defRPr>
             </a:pPr>
             <a:r>
-              <a:t>• Module 4: Fault-Tolerant Streaming &amp; Security (src/kafka_streaming.py, src/api.py, src/workspace_store.py): Real-time Kafka consumer, transactional outbox (pending_alerts), synchronous broker ACK, and SQLite auth.</a:t>
+              <a:t>• Module 4: RESTful API Gateway (src/api.py): FastAPI endpoints (/predict, /health, /metrics), API-key authentication, rate-limiting, and primary model prediction with comparison breakdowns.</a:t>
+            </a:r>
+          </a:p>
+          <a:p>
+            <a:pPr algn="l">
+              <a:defRPr sz="1100" b="0">
+                <a:solidFill>
+                  <a:srgbClr val="202020"/>
+                </a:solidFill>
+                <a:latin typeface="Times New Roman"/>
+              </a:defRPr>
+            </a:pPr>
+            <a:r>
+              <a:t>• Module 5: Fault-Tolerant Streaming (src/kafka_streaming.py): Kafka consumer/producer, transactional outbox (pending_alerts), synchronous broker ACK, and manual offset commits.</a:t>
+            </a:r>
+          </a:p>
+          <a:p>
+            <a:pPr algn="l">
+              <a:defRPr sz="1100" b="0">
+                <a:solidFill>
+                  <a:srgbClr val="202020"/>
+                </a:solidFill>
+                <a:latin typeface="Times New Roman"/>
+              </a:defRPr>
+            </a:pPr>
+            <a:r>
+              <a:t>• Module 6: Workspace Persistence Store (src/workspace_store.py): Thread-safe SQLite store managing user accounts, uploaded datasets, prediction history, and case review escalation.</a:t>
             </a:r>
           </a:p>
         </p:txBody>
@@ -4526,7 +4569,7 @@
         </p:nvGraphicFramePr>
         <p:xfrm>
           <a:off x="731520" y="1554480"/>
-          <a:ext cx="9875520" cy="2286000"/>
+          <a:ext cx="9875520" cy="2103120"/>
         </p:xfrm>
         <a:graphic>
           <a:graphicData uri="http://schemas.openxmlformats.org/drawingml/2006/table">
@@ -4546,7 +4589,7 @@
                 <a:gridCol w="731520"/>
                 <a:gridCol w="731520"/>
               </a:tblGrid>
-              <a:tr h="381000">
+              <a:tr h="420624">
                 <a:tc>
                   <a:txBody>
                     <a:bodyPr/>
@@ -4788,7 +4831,3786 @@
                   </a:tcPr>
                 </a:tc>
               </a:tr>
-              <a:tr h="381000">
+              <a:tr h="420624">
+                <a:tc>
+                  <a:txBody>
+                    <a:bodyPr/>
+                    <a:lstStyle/>
+                    <a:p>
+                      <a:pPr algn="l">
+                        <a:defRPr sz="950">
+                          <a:solidFill>
+                            <a:srgbClr val="202020"/>
+                          </a:solidFill>
+                          <a:latin typeface="Times New Roman"/>
+                        </a:defRPr>
+                      </a:pPr>
+                      <a:r>
+                        <a:t>Random Forest</a:t>
+                      </a:r>
+                    </a:p>
+                  </a:txBody>
+                  <a:tcPr>
+                    <a:solidFill>
+                      <a:srgbClr val="FFFFFF"/>
+                    </a:solidFill>
+                  </a:tcPr>
+                </a:tc>
+                <a:tc>
+                  <a:txBody>
+                    <a:bodyPr/>
+                    <a:lstStyle/>
+                    <a:p>
+                      <a:pPr algn="ctr">
+                        <a:defRPr sz="950">
+                          <a:solidFill>
+                            <a:srgbClr val="202020"/>
+                          </a:solidFill>
+                          <a:latin typeface="Times New Roman"/>
+                        </a:defRPr>
+                      </a:pPr>
+                      <a:r>
+                        <a:t>99.60%</a:t>
+                      </a:r>
+                    </a:p>
+                  </a:txBody>
+                  <a:tcPr>
+                    <a:solidFill>
+                      <a:srgbClr val="FFFFFF"/>
+                    </a:solidFill>
+                  </a:tcPr>
+                </a:tc>
+                <a:tc>
+                  <a:txBody>
+                    <a:bodyPr/>
+                    <a:lstStyle/>
+                    <a:p>
+                      <a:pPr algn="ctr">
+                        <a:defRPr sz="950">
+                          <a:solidFill>
+                            <a:srgbClr val="202020"/>
+                          </a:solidFill>
+                          <a:latin typeface="Times New Roman"/>
+                        </a:defRPr>
+                      </a:pPr>
+                      <a:r>
+                        <a:t>0.8235</a:t>
+                      </a:r>
+                    </a:p>
+                  </a:txBody>
+                  <a:tcPr>
+                    <a:solidFill>
+                      <a:srgbClr val="FFFFFF"/>
+                    </a:solidFill>
+                  </a:tcPr>
+                </a:tc>
+                <a:tc>
+                  <a:txBody>
+                    <a:bodyPr/>
+                    <a:lstStyle/>
+                    <a:p>
+                      <a:pPr algn="ctr">
+                        <a:defRPr sz="950">
+                          <a:solidFill>
+                            <a:srgbClr val="202020"/>
+                          </a:solidFill>
+                          <a:latin typeface="Times New Roman"/>
+                        </a:defRPr>
+                      </a:pPr>
+                      <a:r>
+                        <a:t>0.9333</a:t>
+                      </a:r>
+                    </a:p>
+                  </a:txBody>
+                  <a:tcPr>
+                    <a:solidFill>
+                      <a:srgbClr val="FFFFFF"/>
+                    </a:solidFill>
+                  </a:tcPr>
+                </a:tc>
+                <a:tc>
+                  <a:txBody>
+                    <a:bodyPr/>
+                    <a:lstStyle/>
+                    <a:p>
+                      <a:pPr algn="ctr">
+                        <a:defRPr sz="950">
+                          <a:solidFill>
+                            <a:srgbClr val="202020"/>
+                          </a:solidFill>
+                          <a:latin typeface="Times New Roman"/>
+                        </a:defRPr>
+                      </a:pPr>
+                      <a:r>
+                        <a:t>0.8750</a:t>
+                      </a:r>
+                    </a:p>
+                  </a:txBody>
+                  <a:tcPr>
+                    <a:solidFill>
+                      <a:srgbClr val="FFFFFF"/>
+                    </a:solidFill>
+                  </a:tcPr>
+                </a:tc>
+                <a:tc>
+                  <a:txBody>
+                    <a:bodyPr/>
+                    <a:lstStyle/>
+                    <a:p>
+                      <a:pPr algn="ctr">
+                        <a:defRPr sz="950">
+                          <a:solidFill>
+                            <a:srgbClr val="202020"/>
+                          </a:solidFill>
+                          <a:latin typeface="Times New Roman"/>
+                        </a:defRPr>
+                      </a:pPr>
+                      <a:r>
+                        <a:t>0.9989</a:t>
+                      </a:r>
+                    </a:p>
+                  </a:txBody>
+                  <a:tcPr>
+                    <a:solidFill>
+                      <a:srgbClr val="FFFFFF"/>
+                    </a:solidFill>
+                  </a:tcPr>
+                </a:tc>
+                <a:tc>
+                  <a:txBody>
+                    <a:bodyPr/>
+                    <a:lstStyle/>
+                    <a:p>
+                      <a:pPr algn="ctr">
+                        <a:defRPr sz="950">
+                          <a:solidFill>
+                            <a:srgbClr val="202020"/>
+                          </a:solidFill>
+                          <a:latin typeface="Times New Roman"/>
+                        </a:defRPr>
+                      </a:pPr>
+                      <a:r>
+                        <a:t>0.9581</a:t>
+                      </a:r>
+                    </a:p>
+                  </a:txBody>
+                  <a:tcPr>
+                    <a:solidFill>
+                      <a:srgbClr val="FFFFFF"/>
+                    </a:solidFill>
+                  </a:tcPr>
+                </a:tc>
+                <a:tc>
+                  <a:txBody>
+                    <a:bodyPr/>
+                    <a:lstStyle/>
+                    <a:p>
+                      <a:pPr algn="ctr">
+                        <a:defRPr sz="950">
+                          <a:solidFill>
+                            <a:srgbClr val="202020"/>
+                          </a:solidFill>
+                          <a:latin typeface="Times New Roman"/>
+                        </a:defRPr>
+                      </a:pPr>
+                      <a:r>
+                        <a:t>42</a:t>
+                      </a:r>
+                    </a:p>
+                  </a:txBody>
+                  <a:tcPr>
+                    <a:solidFill>
+                      <a:srgbClr val="FFFFFF"/>
+                    </a:solidFill>
+                  </a:tcPr>
+                </a:tc>
+                <a:tc>
+                  <a:txBody>
+                    <a:bodyPr/>
+                    <a:lstStyle/>
+                    <a:p>
+                      <a:pPr algn="ctr">
+                        <a:defRPr sz="950">
+                          <a:solidFill>
+                            <a:srgbClr val="202020"/>
+                          </a:solidFill>
+                          <a:latin typeface="Times New Roman"/>
+                        </a:defRPr>
+                      </a:pPr>
+                      <a:r>
+                        <a:t>9</a:t>
+                      </a:r>
+                    </a:p>
+                  </a:txBody>
+                  <a:tcPr>
+                    <a:solidFill>
+                      <a:srgbClr val="FFFFFF"/>
+                    </a:solidFill>
+                  </a:tcPr>
+                </a:tc>
+                <a:tc>
+                  <a:txBody>
+                    <a:bodyPr/>
+                    <a:lstStyle/>
+                    <a:p>
+                      <a:pPr algn="ctr">
+                        <a:defRPr sz="950">
+                          <a:solidFill>
+                            <a:srgbClr val="202020"/>
+                          </a:solidFill>
+                          <a:latin typeface="Times New Roman"/>
+                        </a:defRPr>
+                      </a:pPr>
+                      <a:r>
+                        <a:t>3</a:t>
+                      </a:r>
+                    </a:p>
+                  </a:txBody>
+                  <a:tcPr>
+                    <a:solidFill>
+                      <a:srgbClr val="FFFFFF"/>
+                    </a:solidFill>
+                  </a:tcPr>
+                </a:tc>
+              </a:tr>
+              <a:tr h="420624">
+                <a:tc>
+                  <a:txBody>
+                    <a:bodyPr/>
+                    <a:lstStyle/>
+                    <a:p>
+                      <a:pPr algn="l">
+                        <a:defRPr sz="950">
+                          <a:solidFill>
+                            <a:srgbClr val="202020"/>
+                          </a:solidFill>
+                          <a:latin typeface="Times New Roman"/>
+                        </a:defRPr>
+                      </a:pPr>
+                      <a:r>
+                        <a:t>XGBoost</a:t>
+                      </a:r>
+                    </a:p>
+                  </a:txBody>
+                  <a:tcPr>
+                    <a:solidFill>
+                      <a:srgbClr val="F4F7FA"/>
+                    </a:solidFill>
+                  </a:tcPr>
+                </a:tc>
+                <a:tc>
+                  <a:txBody>
+                    <a:bodyPr/>
+                    <a:lstStyle/>
+                    <a:p>
+                      <a:pPr algn="ctr">
+                        <a:defRPr sz="950">
+                          <a:solidFill>
+                            <a:srgbClr val="202020"/>
+                          </a:solidFill>
+                          <a:latin typeface="Times New Roman"/>
+                        </a:defRPr>
+                      </a:pPr>
+                      <a:r>
+                        <a:t>99.67%</a:t>
+                      </a:r>
+                    </a:p>
+                  </a:txBody>
+                  <a:tcPr>
+                    <a:solidFill>
+                      <a:srgbClr val="F4F7FA"/>
+                    </a:solidFill>
+                  </a:tcPr>
+                </a:tc>
+                <a:tc>
+                  <a:txBody>
+                    <a:bodyPr/>
+                    <a:lstStyle/>
+                    <a:p>
+                      <a:pPr algn="ctr">
+                        <a:defRPr sz="950">
+                          <a:solidFill>
+                            <a:srgbClr val="202020"/>
+                          </a:solidFill>
+                          <a:latin typeface="Times New Roman"/>
+                        </a:defRPr>
+                      </a:pPr>
+                      <a:r>
+                        <a:t>0.8889</a:t>
+                      </a:r>
+                    </a:p>
+                  </a:txBody>
+                  <a:tcPr>
+                    <a:solidFill>
+                      <a:srgbClr val="F4F7FA"/>
+                    </a:solidFill>
+                  </a:tcPr>
+                </a:tc>
+                <a:tc>
+                  <a:txBody>
+                    <a:bodyPr/>
+                    <a:lstStyle/>
+                    <a:p>
+                      <a:pPr algn="ctr">
+                        <a:defRPr sz="950">
+                          <a:solidFill>
+                            <a:srgbClr val="202020"/>
+                          </a:solidFill>
+                          <a:latin typeface="Times New Roman"/>
+                        </a:defRPr>
+                      </a:pPr>
+                      <a:r>
+                        <a:t>0.8889</a:t>
+                      </a:r>
+                    </a:p>
+                  </a:txBody>
+                  <a:tcPr>
+                    <a:solidFill>
+                      <a:srgbClr val="F4F7FA"/>
+                    </a:solidFill>
+                  </a:tcPr>
+                </a:tc>
+                <a:tc>
+                  <a:txBody>
+                    <a:bodyPr/>
+                    <a:lstStyle/>
+                    <a:p>
+                      <a:pPr algn="ctr">
+                        <a:defRPr sz="950">
+                          <a:solidFill>
+                            <a:srgbClr val="202020"/>
+                          </a:solidFill>
+                          <a:latin typeface="Times New Roman"/>
+                        </a:defRPr>
+                      </a:pPr>
+                      <a:r>
+                        <a:t>0.8889</a:t>
+                      </a:r>
+                    </a:p>
+                  </a:txBody>
+                  <a:tcPr>
+                    <a:solidFill>
+                      <a:srgbClr val="F4F7FA"/>
+                    </a:solidFill>
+                  </a:tcPr>
+                </a:tc>
+                <a:tc>
+                  <a:txBody>
+                    <a:bodyPr/>
+                    <a:lstStyle/>
+                    <a:p>
+                      <a:pPr algn="ctr">
+                        <a:defRPr sz="950">
+                          <a:solidFill>
+                            <a:srgbClr val="202020"/>
+                          </a:solidFill>
+                          <a:latin typeface="Times New Roman"/>
+                        </a:defRPr>
+                      </a:pPr>
+                      <a:r>
+                        <a:t>0.9968</a:t>
+                      </a:r>
+                    </a:p>
+                  </a:txBody>
+                  <a:tcPr>
+                    <a:solidFill>
+                      <a:srgbClr val="F4F7FA"/>
+                    </a:solidFill>
+                  </a:tcPr>
+                </a:tc>
+                <a:tc>
+                  <a:txBody>
+                    <a:bodyPr/>
+                    <a:lstStyle/>
+                    <a:p>
+                      <a:pPr algn="ctr">
+                        <a:defRPr sz="950">
+                          <a:solidFill>
+                            <a:srgbClr val="202020"/>
+                          </a:solidFill>
+                          <a:latin typeface="Times New Roman"/>
+                        </a:defRPr>
+                      </a:pPr>
+                      <a:r>
+                        <a:t>0.9418</a:t>
+                      </a:r>
+                    </a:p>
+                  </a:txBody>
+                  <a:tcPr>
+                    <a:solidFill>
+                      <a:srgbClr val="F4F7FA"/>
+                    </a:solidFill>
+                  </a:tcPr>
+                </a:tc>
+                <a:tc>
+                  <a:txBody>
+                    <a:bodyPr/>
+                    <a:lstStyle/>
+                    <a:p>
+                      <a:pPr algn="ctr">
+                        <a:defRPr sz="950">
+                          <a:solidFill>
+                            <a:srgbClr val="202020"/>
+                          </a:solidFill>
+                          <a:latin typeface="Times New Roman"/>
+                        </a:defRPr>
+                      </a:pPr>
+                      <a:r>
+                        <a:t>40</a:t>
+                      </a:r>
+                    </a:p>
+                  </a:txBody>
+                  <a:tcPr>
+                    <a:solidFill>
+                      <a:srgbClr val="F4F7FA"/>
+                    </a:solidFill>
+                  </a:tcPr>
+                </a:tc>
+                <a:tc>
+                  <a:txBody>
+                    <a:bodyPr/>
+                    <a:lstStyle/>
+                    <a:p>
+                      <a:pPr algn="ctr">
+                        <a:defRPr sz="950">
+                          <a:solidFill>
+                            <a:srgbClr val="202020"/>
+                          </a:solidFill>
+                          <a:latin typeface="Times New Roman"/>
+                        </a:defRPr>
+                      </a:pPr>
+                      <a:r>
+                        <a:t>5</a:t>
+                      </a:r>
+                    </a:p>
+                  </a:txBody>
+                  <a:tcPr>
+                    <a:solidFill>
+                      <a:srgbClr val="F4F7FA"/>
+                    </a:solidFill>
+                  </a:tcPr>
+                </a:tc>
+                <a:tc>
+                  <a:txBody>
+                    <a:bodyPr/>
+                    <a:lstStyle/>
+                    <a:p>
+                      <a:pPr algn="ctr">
+                        <a:defRPr sz="950">
+                          <a:solidFill>
+                            <a:srgbClr val="202020"/>
+                          </a:solidFill>
+                          <a:latin typeface="Times New Roman"/>
+                        </a:defRPr>
+                      </a:pPr>
+                      <a:r>
+                        <a:t>5</a:t>
+                      </a:r>
+                    </a:p>
+                  </a:txBody>
+                  <a:tcPr>
+                    <a:solidFill>
+                      <a:srgbClr val="F4F7FA"/>
+                    </a:solidFill>
+                  </a:tcPr>
+                </a:tc>
+              </a:tr>
+              <a:tr h="420624">
+                <a:tc>
+                  <a:txBody>
+                    <a:bodyPr/>
+                    <a:lstStyle/>
+                    <a:p>
+                      <a:pPr algn="l">
+                        <a:defRPr sz="950">
+                          <a:solidFill>
+                            <a:srgbClr val="202020"/>
+                          </a:solidFill>
+                          <a:latin typeface="Times New Roman"/>
+                        </a:defRPr>
+                      </a:pPr>
+                      <a:r>
+                        <a:t>Deep Neural Network</a:t>
+                      </a:r>
+                    </a:p>
+                  </a:txBody>
+                  <a:tcPr>
+                    <a:solidFill>
+                      <a:srgbClr val="FFFFFF"/>
+                    </a:solidFill>
+                  </a:tcPr>
+                </a:tc>
+                <a:tc>
+                  <a:txBody>
+                    <a:bodyPr/>
+                    <a:lstStyle/>
+                    <a:p>
+                      <a:pPr algn="ctr">
+                        <a:defRPr sz="950">
+                          <a:solidFill>
+                            <a:srgbClr val="202020"/>
+                          </a:solidFill>
+                          <a:latin typeface="Times New Roman"/>
+                        </a:defRPr>
+                      </a:pPr>
+                      <a:r>
+                        <a:t>99.83%</a:t>
+                      </a:r>
+                    </a:p>
+                  </a:txBody>
+                  <a:tcPr>
+                    <a:solidFill>
+                      <a:srgbClr val="FFFFFF"/>
+                    </a:solidFill>
+                  </a:tcPr>
+                </a:tc>
+                <a:tc>
+                  <a:txBody>
+                    <a:bodyPr/>
+                    <a:lstStyle/>
+                    <a:p>
+                      <a:pPr algn="ctr">
+                        <a:defRPr sz="950">
+                          <a:solidFill>
+                            <a:srgbClr val="202020"/>
+                          </a:solidFill>
+                          <a:latin typeface="Times New Roman"/>
+                        </a:defRPr>
+                      </a:pPr>
+                      <a:r>
+                        <a:t>1.0000</a:t>
+                      </a:r>
+                    </a:p>
+                  </a:txBody>
+                  <a:tcPr>
+                    <a:solidFill>
+                      <a:srgbClr val="FFFFFF"/>
+                    </a:solidFill>
+                  </a:tcPr>
+                </a:tc>
+                <a:tc>
+                  <a:txBody>
+                    <a:bodyPr/>
+                    <a:lstStyle/>
+                    <a:p>
+                      <a:pPr algn="ctr">
+                        <a:defRPr sz="950">
+                          <a:solidFill>
+                            <a:srgbClr val="202020"/>
+                          </a:solidFill>
+                          <a:latin typeface="Times New Roman"/>
+                        </a:defRPr>
+                      </a:pPr>
+                      <a:r>
+                        <a:t>0.8889</a:t>
+                      </a:r>
+                    </a:p>
+                  </a:txBody>
+                  <a:tcPr>
+                    <a:solidFill>
+                      <a:srgbClr val="FFFFFF"/>
+                    </a:solidFill>
+                  </a:tcPr>
+                </a:tc>
+                <a:tc>
+                  <a:txBody>
+                    <a:bodyPr/>
+                    <a:lstStyle/>
+                    <a:p>
+                      <a:pPr algn="ctr">
+                        <a:defRPr sz="950">
+                          <a:solidFill>
+                            <a:srgbClr val="202020"/>
+                          </a:solidFill>
+                          <a:latin typeface="Times New Roman"/>
+                        </a:defRPr>
+                      </a:pPr>
+                      <a:r>
+                        <a:t>0.9412</a:t>
+                      </a:r>
+                    </a:p>
+                  </a:txBody>
+                  <a:tcPr>
+                    <a:solidFill>
+                      <a:srgbClr val="FFFFFF"/>
+                    </a:solidFill>
+                  </a:tcPr>
+                </a:tc>
+                <a:tc>
+                  <a:txBody>
+                    <a:bodyPr/>
+                    <a:lstStyle/>
+                    <a:p>
+                      <a:pPr algn="ctr">
+                        <a:defRPr sz="950">
+                          <a:solidFill>
+                            <a:srgbClr val="202020"/>
+                          </a:solidFill>
+                          <a:latin typeface="Times New Roman"/>
+                        </a:defRPr>
+                      </a:pPr>
+                      <a:r>
+                        <a:t>0.9863</a:t>
+                      </a:r>
+                    </a:p>
+                  </a:txBody>
+                  <a:tcPr>
+                    <a:solidFill>
+                      <a:srgbClr val="FFFFFF"/>
+                    </a:solidFill>
+                  </a:tcPr>
+                </a:tc>
+                <a:tc>
+                  <a:txBody>
+                    <a:bodyPr/>
+                    <a:lstStyle/>
+                    <a:p>
+                      <a:pPr algn="ctr">
+                        <a:defRPr sz="950">
+                          <a:solidFill>
+                            <a:srgbClr val="202020"/>
+                          </a:solidFill>
+                          <a:latin typeface="Times New Roman"/>
+                        </a:defRPr>
+                      </a:pPr>
+                      <a:r>
+                        <a:t>0.9307</a:t>
+                      </a:r>
+                    </a:p>
+                  </a:txBody>
+                  <a:tcPr>
+                    <a:solidFill>
+                      <a:srgbClr val="FFFFFF"/>
+                    </a:solidFill>
+                  </a:tcPr>
+                </a:tc>
+                <a:tc>
+                  <a:txBody>
+                    <a:bodyPr/>
+                    <a:lstStyle/>
+                    <a:p>
+                      <a:pPr algn="ctr">
+                        <a:defRPr sz="950">
+                          <a:solidFill>
+                            <a:srgbClr val="202020"/>
+                          </a:solidFill>
+                          <a:latin typeface="Times New Roman"/>
+                        </a:defRPr>
+                      </a:pPr>
+                      <a:r>
+                        <a:t>40</a:t>
+                      </a:r>
+                    </a:p>
+                  </a:txBody>
+                  <a:tcPr>
+                    <a:solidFill>
+                      <a:srgbClr val="FFFFFF"/>
+                    </a:solidFill>
+                  </a:tcPr>
+                </a:tc>
+                <a:tc>
+                  <a:txBody>
+                    <a:bodyPr/>
+                    <a:lstStyle/>
+                    <a:p>
+                      <a:pPr algn="ctr">
+                        <a:defRPr sz="950">
+                          <a:solidFill>
+                            <a:srgbClr val="202020"/>
+                          </a:solidFill>
+                          <a:latin typeface="Times New Roman"/>
+                        </a:defRPr>
+                      </a:pPr>
+                      <a:r>
+                        <a:t>0</a:t>
+                      </a:r>
+                    </a:p>
+                  </a:txBody>
+                  <a:tcPr>
+                    <a:solidFill>
+                      <a:srgbClr val="FFFFFF"/>
+                    </a:solidFill>
+                  </a:tcPr>
+                </a:tc>
+                <a:tc>
+                  <a:txBody>
+                    <a:bodyPr/>
+                    <a:lstStyle/>
+                    <a:p>
+                      <a:pPr algn="ctr">
+                        <a:defRPr sz="950">
+                          <a:solidFill>
+                            <a:srgbClr val="202020"/>
+                          </a:solidFill>
+                          <a:latin typeface="Times New Roman"/>
+                        </a:defRPr>
+                      </a:pPr>
+                      <a:r>
+                        <a:t>5</a:t>
+                      </a:r>
+                    </a:p>
+                  </a:txBody>
+                  <a:tcPr>
+                    <a:solidFill>
+                      <a:srgbClr val="FFFFFF"/>
+                    </a:solidFill>
+                  </a:tcPr>
+                </a:tc>
+              </a:tr>
+              <a:tr h="420624">
+                <a:tc>
+                  <a:txBody>
+                    <a:bodyPr/>
+                    <a:lstStyle/>
+                    <a:p>
+                      <a:pPr algn="l">
+                        <a:defRPr sz="950">
+                          <a:solidFill>
+                            <a:srgbClr val="202020"/>
+                          </a:solidFill>
+                          <a:latin typeface="Times New Roman"/>
+                        </a:defRPr>
+                      </a:pPr>
+                      <a:r>
+                        <a:t>Deep Autoencoder</a:t>
+                      </a:r>
+                    </a:p>
+                  </a:txBody>
+                  <a:tcPr>
+                    <a:solidFill>
+                      <a:srgbClr val="F4F7FA"/>
+                    </a:solidFill>
+                  </a:tcPr>
+                </a:tc>
+                <a:tc>
+                  <a:txBody>
+                    <a:bodyPr/>
+                    <a:lstStyle/>
+                    <a:p>
+                      <a:pPr algn="ctr">
+                        <a:defRPr sz="950">
+                          <a:solidFill>
+                            <a:srgbClr val="202020"/>
+                          </a:solidFill>
+                          <a:latin typeface="Times New Roman"/>
+                        </a:defRPr>
+                      </a:pPr>
+                      <a:r>
+                        <a:t>99.83%</a:t>
+                      </a:r>
+                    </a:p>
+                  </a:txBody>
+                  <a:tcPr>
+                    <a:solidFill>
+                      <a:srgbClr val="F4F7FA"/>
+                    </a:solidFill>
+                  </a:tcPr>
+                </a:tc>
+                <a:tc>
+                  <a:txBody>
+                    <a:bodyPr/>
+                    <a:lstStyle/>
+                    <a:p>
+                      <a:pPr algn="ctr">
+                        <a:defRPr sz="950">
+                          <a:solidFill>
+                            <a:srgbClr val="202020"/>
+                          </a:solidFill>
+                          <a:latin typeface="Times New Roman"/>
+                        </a:defRPr>
+                      </a:pPr>
+                      <a:r>
+                        <a:t>0.9762</a:t>
+                      </a:r>
+                    </a:p>
+                  </a:txBody>
+                  <a:tcPr>
+                    <a:solidFill>
+                      <a:srgbClr val="F4F7FA"/>
+                    </a:solidFill>
+                  </a:tcPr>
+                </a:tc>
+                <a:tc>
+                  <a:txBody>
+                    <a:bodyPr/>
+                    <a:lstStyle/>
+                    <a:p>
+                      <a:pPr algn="ctr">
+                        <a:defRPr sz="950">
+                          <a:solidFill>
+                            <a:srgbClr val="202020"/>
+                          </a:solidFill>
+                          <a:latin typeface="Times New Roman"/>
+                        </a:defRPr>
+                      </a:pPr>
+                      <a:r>
+                        <a:t>0.9111</a:t>
+                      </a:r>
+                    </a:p>
+                  </a:txBody>
+                  <a:tcPr>
+                    <a:solidFill>
+                      <a:srgbClr val="F4F7FA"/>
+                    </a:solidFill>
+                  </a:tcPr>
+                </a:tc>
+                <a:tc>
+                  <a:txBody>
+                    <a:bodyPr/>
+                    <a:lstStyle/>
+                    <a:p>
+                      <a:pPr algn="ctr">
+                        <a:defRPr sz="950">
+                          <a:solidFill>
+                            <a:srgbClr val="202020"/>
+                          </a:solidFill>
+                          <a:latin typeface="Times New Roman"/>
+                        </a:defRPr>
+                      </a:pPr>
+                      <a:r>
+                        <a:t>0.9425</a:t>
+                      </a:r>
+                    </a:p>
+                  </a:txBody>
+                  <a:tcPr>
+                    <a:solidFill>
+                      <a:srgbClr val="F4F7FA"/>
+                    </a:solidFill>
+                  </a:tcPr>
+                </a:tc>
+                <a:tc>
+                  <a:txBody>
+                    <a:bodyPr/>
+                    <a:lstStyle/>
+                    <a:p>
+                      <a:pPr algn="ctr">
+                        <a:defRPr sz="950">
+                          <a:solidFill>
+                            <a:srgbClr val="202020"/>
+                          </a:solidFill>
+                          <a:latin typeface="Times New Roman"/>
+                        </a:defRPr>
+                      </a:pPr>
+                      <a:r>
+                        <a:t>0.9909</a:t>
+                      </a:r>
+                    </a:p>
+                  </a:txBody>
+                  <a:tcPr>
+                    <a:solidFill>
+                      <a:srgbClr val="F4F7FA"/>
+                    </a:solidFill>
+                  </a:tcPr>
+                </a:tc>
+                <a:tc>
+                  <a:txBody>
+                    <a:bodyPr/>
+                    <a:lstStyle/>
+                    <a:p>
+                      <a:pPr algn="ctr">
+                        <a:defRPr sz="950">
+                          <a:solidFill>
+                            <a:srgbClr val="202020"/>
+                          </a:solidFill>
+                          <a:latin typeface="Times New Roman"/>
+                        </a:defRPr>
+                      </a:pPr>
+                      <a:r>
+                        <a:t>0.9586</a:t>
+                      </a:r>
+                    </a:p>
+                  </a:txBody>
+                  <a:tcPr>
+                    <a:solidFill>
+                      <a:srgbClr val="F4F7FA"/>
+                    </a:solidFill>
+                  </a:tcPr>
+                </a:tc>
+                <a:tc>
+                  <a:txBody>
+                    <a:bodyPr/>
+                    <a:lstStyle/>
+                    <a:p>
+                      <a:pPr algn="ctr">
+                        <a:defRPr sz="950">
+                          <a:solidFill>
+                            <a:srgbClr val="202020"/>
+                          </a:solidFill>
+                          <a:latin typeface="Times New Roman"/>
+                        </a:defRPr>
+                      </a:pPr>
+                      <a:r>
+                        <a:t>41</a:t>
+                      </a:r>
+                    </a:p>
+                  </a:txBody>
+                  <a:tcPr>
+                    <a:solidFill>
+                      <a:srgbClr val="F4F7FA"/>
+                    </a:solidFill>
+                  </a:tcPr>
+                </a:tc>
+                <a:tc>
+                  <a:txBody>
+                    <a:bodyPr/>
+                    <a:lstStyle/>
+                    <a:p>
+                      <a:pPr algn="ctr">
+                        <a:defRPr sz="950">
+                          <a:solidFill>
+                            <a:srgbClr val="202020"/>
+                          </a:solidFill>
+                          <a:latin typeface="Times New Roman"/>
+                        </a:defRPr>
+                      </a:pPr>
+                      <a:r>
+                        <a:t>1</a:t>
+                      </a:r>
+                    </a:p>
+                  </a:txBody>
+                  <a:tcPr>
+                    <a:solidFill>
+                      <a:srgbClr val="F4F7FA"/>
+                    </a:solidFill>
+                  </a:tcPr>
+                </a:tc>
+                <a:tc>
+                  <a:txBody>
+                    <a:bodyPr/>
+                    <a:lstStyle/>
+                    <a:p>
+                      <a:pPr algn="ctr">
+                        <a:defRPr sz="950">
+                          <a:solidFill>
+                            <a:srgbClr val="202020"/>
+                          </a:solidFill>
+                          <a:latin typeface="Times New Roman"/>
+                        </a:defRPr>
+                      </a:pPr>
+                      <a:r>
+                        <a:t>4</a:t>
+                      </a:r>
+                    </a:p>
+                  </a:txBody>
+                  <a:tcPr>
+                    <a:solidFill>
+                      <a:srgbClr val="F4F7FA"/>
+                    </a:solidFill>
+                  </a:tcPr>
+                </a:tc>
+              </a:tr>
+            </a:tbl>
+          </a:graphicData>
+        </a:graphic>
+      </p:graphicFrame>
+      <p:sp>
+        <p:nvSpPr>
+          <p:cNvPr id="8" name="Rounded Rectangle 7"/>
+          <p:cNvSpPr/>
+          <p:nvPr/>
+        </p:nvSpPr>
+        <p:spPr>
+          <a:xfrm>
+            <a:off x="731520" y="3840480"/>
+            <a:ext cx="5486400" cy="2194560"/>
+          </a:xfrm>
+          <a:prstGeom prst="roundRect">
+            <a:avLst/>
+          </a:prstGeom>
+          <a:solidFill>
+            <a:srgbClr val="F4F7FA"/>
+          </a:solidFill>
+          <a:ln w="12700">
+            <a:solidFill>
+              <a:srgbClr val="CBD5E0"/>
+            </a:solidFill>
+          </a:ln>
+        </p:spPr>
+        <p:style>
+          <a:lnRef idx="1">
+            <a:schemeClr val="accent1"/>
+          </a:lnRef>
+          <a:fillRef idx="3">
+            <a:schemeClr val="accent1"/>
+          </a:fillRef>
+          <a:effectRef idx="2">
+            <a:schemeClr val="accent1"/>
+          </a:effectRef>
+          <a:fontRef idx="minor">
+            <a:schemeClr val="lt1"/>
+          </a:fontRef>
+        </p:style>
+        <p:txBody>
+          <a:bodyPr rtlCol="0" anchor="ctr"/>
+          <a:lstStyle/>
+          <a:p>
+            <a:pPr algn="ctr"/>
+          </a:p>
+        </p:txBody>
+      </p:sp>
+      <p:sp>
+        <p:nvSpPr>
+          <p:cNvPr id="9" name="TextBox 8"/>
+          <p:cNvSpPr txBox="1"/>
+          <p:nvPr/>
+        </p:nvSpPr>
+        <p:spPr>
+          <a:xfrm>
+            <a:off x="868680" y="3886200"/>
+            <a:ext cx="5212080" cy="2011680"/>
+          </a:xfrm>
+          <a:prstGeom prst="rect">
+            <a:avLst/>
+          </a:prstGeom>
+          <a:noFill/>
+        </p:spPr>
+        <p:txBody>
+          <a:bodyPr wrap="square">
+            <a:spAutoFit/>
+          </a:bodyPr>
+          <a:lstStyle/>
+          <a:p>
+            <a:pPr algn="l">
+              <a:defRPr sz="1350" b="1">
+                <a:solidFill>
+                  <a:srgbClr val="1F4E79"/>
+                </a:solidFill>
+                <a:latin typeface="Times New Roman"/>
+              </a:defRPr>
+            </a:pPr>
+            <a:r>
+              <a:t>Key Model Strengths &amp; Individual Trade-Offs</a:t>
+            </a:r>
+          </a:p>
+          <a:p>
+            <a:pPr algn="l">
+              <a:defRPr sz="1050" b="0">
+                <a:solidFill>
+                  <a:srgbClr val="202020"/>
+                </a:solidFill>
+                <a:latin typeface="Times New Roman"/>
+              </a:defRPr>
+            </a:pPr>
+            <a:r>
+              <a:t>• Random Forest: Highest recall (0.9333, 42 TP) among the four individual models, identifying the maximum number of fraud incidents.</a:t>
+            </a:r>
+          </a:p>
+          <a:p>
+            <a:pPr algn="l">
+              <a:defRPr sz="1050" b="0">
+                <a:solidFill>
+                  <a:srgbClr val="202020"/>
+                </a:solidFill>
+                <a:latin typeface="Times New Roman"/>
+              </a:defRPr>
+            </a:pPr>
+            <a:r>
+              <a:t>• Deep Neural Network: Zero false positives (0 FP, 1.0000 precision) on this particular holdout, eliminating false alarms on legitimate transactions.</a:t>
+            </a:r>
+          </a:p>
+          <a:p>
+            <a:pPr algn="l">
+              <a:defRPr sz="1050" b="0">
+                <a:solidFill>
+                  <a:srgbClr val="202020"/>
+                </a:solidFill>
+                <a:latin typeface="Times New Roman"/>
+              </a:defRPr>
+            </a:pPr>
+            <a:r>
+              <a:t>• Deep Autoencoder: Highest individual-model F1 score (0.9425) on this holdout, balancing high recall (0.9111) with only 1 false positive.</a:t>
+            </a:r>
+          </a:p>
+          <a:p>
+            <a:pPr algn="l">
+              <a:defRPr sz="1050" b="0">
+                <a:solidFill>
+                  <a:srgbClr val="202020"/>
+                </a:solidFill>
+                <a:latin typeface="Times New Roman"/>
+              </a:defRPr>
+            </a:pPr>
+            <a:r>
+              <a:t>• XGBoost: Validation-selected benchmark baseline; selected based on validation set performance, confirming stability on holdout testing.</a:t>
+            </a:r>
+          </a:p>
+        </p:txBody>
+      </p:sp>
+      <p:sp>
+        <p:nvSpPr>
+          <p:cNvPr id="10" name="Rounded Rectangle 9"/>
+          <p:cNvSpPr/>
+          <p:nvPr/>
+        </p:nvSpPr>
+        <p:spPr>
+          <a:xfrm>
+            <a:off x="6492240" y="3840480"/>
+            <a:ext cx="4937760" cy="2194560"/>
+          </a:xfrm>
+          <a:prstGeom prst="roundRect">
+            <a:avLst/>
+          </a:prstGeom>
+          <a:solidFill>
+            <a:srgbClr val="F4F7FA"/>
+          </a:solidFill>
+          <a:ln w="12700">
+            <a:solidFill>
+              <a:srgbClr val="CBD5E0"/>
+            </a:solidFill>
+          </a:ln>
+        </p:spPr>
+        <p:style>
+          <a:lnRef idx="1">
+            <a:schemeClr val="accent1"/>
+          </a:lnRef>
+          <a:fillRef idx="3">
+            <a:schemeClr val="accent1"/>
+          </a:fillRef>
+          <a:effectRef idx="2">
+            <a:schemeClr val="accent1"/>
+          </a:effectRef>
+          <a:fontRef idx="minor">
+            <a:schemeClr val="lt1"/>
+          </a:fontRef>
+        </p:style>
+        <p:txBody>
+          <a:bodyPr rtlCol="0" anchor="ctr"/>
+          <a:lstStyle/>
+          <a:p>
+            <a:pPr algn="ctr"/>
+          </a:p>
+        </p:txBody>
+      </p:sp>
+      <p:sp>
+        <p:nvSpPr>
+          <p:cNvPr id="11" name="TextBox 10"/>
+          <p:cNvSpPr txBox="1"/>
+          <p:nvPr/>
+        </p:nvSpPr>
+        <p:spPr>
+          <a:xfrm>
+            <a:off x="6629400" y="3886200"/>
+            <a:ext cx="4663440" cy="2011680"/>
+          </a:xfrm>
+          <a:prstGeom prst="rect">
+            <a:avLst/>
+          </a:prstGeom>
+          <a:noFill/>
+        </p:spPr>
+        <p:txBody>
+          <a:bodyPr wrap="square">
+            <a:spAutoFit/>
+          </a:bodyPr>
+          <a:lstStyle/>
+          <a:p>
+            <a:pPr algn="l">
+              <a:defRPr sz="1350" b="1">
+                <a:solidFill>
+                  <a:srgbClr val="1F4E79"/>
+                </a:solidFill>
+                <a:latin typeface="Times New Roman"/>
+              </a:defRPr>
+            </a:pPr>
+            <a:r>
+              <a:t>Methodological Scope &amp; Results Citation</a:t>
+            </a:r>
+          </a:p>
+          <a:p>
+            <a:pPr algn="l">
+              <a:defRPr sz="1050" b="0">
+                <a:solidFill>
+                  <a:srgbClr val="202020"/>
+                </a:solidFill>
+                <a:latin typeface="Times New Roman"/>
+              </a:defRPr>
+            </a:pPr>
+            <a:r>
+              <a:t>• Evaluation Holdout: 3,000 untouched holdout transactions (60/20/20 split; 225 total frauds = 1.50% prevalence).</a:t>
+            </a:r>
+          </a:p>
+          <a:p>
+            <a:pPr algn="l">
+              <a:defRPr sz="1050" b="0">
+                <a:solidFill>
+                  <a:srgbClr val="202020"/>
+                </a:solidFill>
+                <a:latin typeface="Times New Roman"/>
+              </a:defRPr>
+            </a:pPr>
+            <a:r>
+              <a:t>• Threshold Selection: Each model is evaluated independently against its own validation-tuned operating threshold (tau*).</a:t>
+            </a:r>
+          </a:p>
+          <a:p>
+            <a:pPr algn="l">
+              <a:defRPr sz="1050" b="1">
+                <a:solidFill>
+                  <a:srgbClr val="059669"/>
+                </a:solidFill>
+                <a:latin typeface="Times New Roman"/>
+              </a:defRPr>
+            </a:pPr>
+            <a:r>
+              <a:t>• Saved Result Files: Verified directly from results/model_results.csv and results/holdout_evaluation_report.json.</a:t>
+            </a:r>
+          </a:p>
+          <a:p>
+            <a:pPr algn="l">
+              <a:defRPr sz="1050" b="0">
+                <a:solidFill>
+                  <a:srgbClr val="555555"/>
+                </a:solidFill>
+                <a:latin typeface="Times New Roman"/>
+              </a:defRPr>
+            </a:pPr>
+            <a:r>
+              <a:t>• Note: Offline weighted fusion, distribution shift, and cost simulations are detailed on dedicated backup slides.</a:t>
+            </a:r>
+          </a:p>
+        </p:txBody>
+      </p:sp>
+    </p:spTree>
+    <p:extLst>
+      <p:ext uri="{BB962C8B-B14F-4D97-AF65-F5344CB8AC3E}">
+        <p14:creationId xmlns:p14="http://schemas.microsoft.com/office/powerpoint/2010/main" val="3666188800"/>
+      </p:ext>
+    </p:extLst>
+  </p:cSld>
+  <p:clrMapOvr>
+    <a:masterClrMapping/>
+  </p:clrMapOvr>
+</p:sld>
+</file>
+
+<file path=ppt/slides/slide12.xml><?xml version="1.0" encoding="utf-8"?>
+<p:sld xmlns:a="http://schemas.openxmlformats.org/drawingml/2006/main" xmlns:r="http://schemas.openxmlformats.org/officeDocument/2006/relationships" xmlns:p="http://schemas.openxmlformats.org/presentationml/2006/main">
+  <p:cSld>
+    <p:spTree>
+      <p:nvGrpSpPr>
+        <p:cNvPr id="1" name="">
+          <a:extLst>
+            <a:ext uri="{FF2B5EF4-FFF2-40B4-BE49-F238E27FC236}">
+              <a16:creationId xmlns:a16="http://schemas.microsoft.com/office/drawing/2014/main" xmlns="" id="{BCC49A39-F362-DB35-B5DF-7E322AB9CAE0}"/>
+            </a:ext>
+          </a:extLst>
+        </p:cNvPr>
+        <p:cNvGrpSpPr/>
+        <p:nvPr/>
+      </p:nvGrpSpPr>
+      <p:grpSpPr>
+        <a:xfrm>
+          <a:off x="0" y="0"/>
+          <a:ext cx="0" cy="0"/>
+          <a:chOff x="0" y="0"/>
+          <a:chExt cx="0" cy="0"/>
+        </a:xfrm>
+      </p:grpSpPr>
+      <p:sp>
+        <p:nvSpPr>
+          <p:cNvPr id="4" name="object 2">
+            <a:extLst>
+              <a:ext uri="{FF2B5EF4-FFF2-40B4-BE49-F238E27FC236}">
+                <a16:creationId xmlns:a16="http://schemas.microsoft.com/office/drawing/2014/main" xmlns="" id="{3754A46F-4AC3-5AF1-0B78-C0B5112BD14C}"/>
+              </a:ext>
+            </a:extLst>
+          </p:cNvPr>
+          <p:cNvSpPr txBox="1">
+            <a:spLocks noGrp="1"/>
+          </p:cNvSpPr>
+          <p:nvPr>
+            <p:ph type="title"/>
+          </p:nvPr>
+        </p:nvSpPr>
+        <p:spPr>
+          <a:xfrm>
+            <a:off x="460248" y="681037"/>
+            <a:ext cx="10515600" cy="576696"/>
+          </a:xfrm>
+          <a:prstGeom prst="rect">
+            <a:avLst/>
+          </a:prstGeom>
+        </p:spPr>
+        <p:txBody>
+          <a:bodyPr vert="horz" wrap="square" lIns="0" tIns="113919" rIns="0" bIns="0" rtlCol="0">
+            <a:spAutoFit/>
+          </a:bodyPr>
+          <a:lstStyle/>
+          <a:p>
+            <a:pPr marL="486409">
+              <a:lnSpc>
+                <a:spcPct val="100000"/>
+              </a:lnSpc>
+              <a:spcBef>
+                <a:spcPts val="130"/>
+              </a:spcBef>
+              <a:defRPr sz="2400" b="1">
+                <a:solidFill>
+                  <a:srgbClr val="1F4E79"/>
+                </a:solidFill>
+                <a:latin typeface="Times New Roman"/>
+              </a:defRPr>
+            </a:pPr>
+            <a:r>
+              <a:t>Conclusion &amp; Future Work</a:t>
+            </a:r>
+            <a:endParaRPr sz="3000" b="1" dirty="0">
+              <a:latin typeface="Times New Roman" panose="02020603050405020304" pitchFamily="18" charset="0"/>
+              <a:cs typeface="Times New Roman" panose="02020603050405020304" pitchFamily="18" charset="0"/>
+            </a:endParaRPr>
+          </a:p>
+        </p:txBody>
+      </p:sp>
+      <p:sp>
+        <p:nvSpPr>
+          <p:cNvPr id="2" name="Date Placeholder 1">
+            <a:extLst>
+              <a:ext uri="{FF2B5EF4-FFF2-40B4-BE49-F238E27FC236}">
+                <a16:creationId xmlns:a16="http://schemas.microsoft.com/office/drawing/2014/main" xmlns="" id="{851BAA61-633E-E24B-7DEE-4B2A2B1FA9A4}"/>
+              </a:ext>
+            </a:extLst>
+          </p:cNvPr>
+          <p:cNvSpPr>
+            <a:spLocks noGrp="1"/>
+          </p:cNvSpPr>
+          <p:nvPr>
+            <p:ph type="dt" sz="half" idx="10"/>
+          </p:nvPr>
+        </p:nvSpPr>
+        <p:spPr/>
+        <p:txBody>
+          <a:bodyPr/>
+          <a:lstStyle/>
+          <a:p>
+            <a:pPr>
+              <a:defRPr sz="1000">
+                <a:solidFill>
+                  <a:srgbClr val="555555"/>
+                </a:solidFill>
+                <a:latin typeface="Times New Roman"/>
+              </a:defRPr>
+            </a:pPr>
+            <a:r>
+              <a:t>28/10/26</a:t>
+            </a:r>
+            <a:endParaRPr lang="en-IN">
+              <a:latin typeface="Times New Roman" panose="02020603050405020304" pitchFamily="18" charset="0"/>
+              <a:cs typeface="Times New Roman" panose="02020603050405020304" pitchFamily="18" charset="0"/>
+            </a:endParaRPr>
+          </a:p>
+        </p:txBody>
+      </p:sp>
+      <p:sp>
+        <p:nvSpPr>
+          <p:cNvPr id="5" name="Footer Placeholder 4">
+            <a:extLst>
+              <a:ext uri="{FF2B5EF4-FFF2-40B4-BE49-F238E27FC236}">
+                <a16:creationId xmlns:a16="http://schemas.microsoft.com/office/drawing/2014/main" xmlns="" id="{AB93C553-2D0C-5A0A-39DC-21C43BD88BF0}"/>
+              </a:ext>
+            </a:extLst>
+          </p:cNvPr>
+          <p:cNvSpPr>
+            <a:spLocks noGrp="1"/>
+          </p:cNvSpPr>
+          <p:nvPr>
+            <p:ph type="ftr" sz="quarter" idx="11"/>
+          </p:nvPr>
+        </p:nvSpPr>
+        <p:spPr/>
+        <p:txBody>
+          <a:bodyPr/>
+          <a:lstStyle/>
+          <a:p>
+            <a:pPr>
+              <a:defRPr sz="1000">
+                <a:solidFill>
+                  <a:srgbClr val="555555"/>
+                </a:solidFill>
+                <a:latin typeface="Times New Roman"/>
+              </a:defRPr>
+            </a:pPr>
+            <a:r>
+              <a:t>VIT SCOPE  |  BCSE497J Project-I</a:t>
+            </a:r>
+          </a:p>
+        </p:txBody>
+      </p:sp>
+      <p:sp>
+        <p:nvSpPr>
+          <p:cNvPr id="6" name="Slide Number Placeholder 5">
+            <a:extLst>
+              <a:ext uri="{FF2B5EF4-FFF2-40B4-BE49-F238E27FC236}">
+                <a16:creationId xmlns:a16="http://schemas.microsoft.com/office/drawing/2014/main" xmlns="" id="{6BF7A7E9-45BE-62F4-D3A6-F19DC6ABEDE6}"/>
+              </a:ext>
+            </a:extLst>
+          </p:cNvPr>
+          <p:cNvSpPr>
+            <a:spLocks noGrp="1"/>
+          </p:cNvSpPr>
+          <p:nvPr>
+            <p:ph type="sldNum" sz="quarter" idx="12"/>
+          </p:nvPr>
+        </p:nvSpPr>
+        <p:spPr/>
+        <p:txBody>
+          <a:bodyPr/>
+          <a:lstStyle/>
+          <a:p>
+            <a:fld id="{65201FD4-9D8D-4491-815B-63C7BF4F0034}" type="slidenum">
+              <a:rPr lang="en-IN" smtClean="0">
+                <a:latin typeface="Times New Roman" panose="02020603050405020304" pitchFamily="18" charset="0"/>
+                <a:cs typeface="Times New Roman" panose="02020603050405020304" pitchFamily="18" charset="0"/>
+              </a:rPr>
+              <a:t>12</a:t>
+            </a:fld>
+            <a:endParaRPr lang="en-IN" dirty="0">
+              <a:latin typeface="Times New Roman" panose="02020603050405020304" pitchFamily="18" charset="0"/>
+              <a:cs typeface="Times New Roman" panose="02020603050405020304" pitchFamily="18" charset="0"/>
+            </a:endParaRPr>
+          </a:p>
+        </p:txBody>
+      </p:sp>
+      <p:sp>
+        <p:nvSpPr>
+          <p:cNvPr id="7" name="Rounded Rectangle 6"/>
+          <p:cNvSpPr/>
+          <p:nvPr/>
+        </p:nvSpPr>
+        <p:spPr>
+          <a:xfrm>
+            <a:off x="731520" y="1645920"/>
+            <a:ext cx="5120640" cy="4389120"/>
+          </a:xfrm>
+          <a:prstGeom prst="roundRect">
+            <a:avLst/>
+          </a:prstGeom>
+          <a:solidFill>
+            <a:srgbClr val="F4F7FA"/>
+          </a:solidFill>
+          <a:ln w="12700">
+            <a:solidFill>
+              <a:srgbClr val="CBD5E0"/>
+            </a:solidFill>
+          </a:ln>
+        </p:spPr>
+        <p:style>
+          <a:lnRef idx="1">
+            <a:schemeClr val="accent1"/>
+          </a:lnRef>
+          <a:fillRef idx="3">
+            <a:schemeClr val="accent1"/>
+          </a:fillRef>
+          <a:effectRef idx="2">
+            <a:schemeClr val="accent1"/>
+          </a:effectRef>
+          <a:fontRef idx="minor">
+            <a:schemeClr val="lt1"/>
+          </a:fontRef>
+        </p:style>
+        <p:txBody>
+          <a:bodyPr rtlCol="0" anchor="ctr"/>
+          <a:lstStyle/>
+          <a:p>
+            <a:pPr algn="ctr"/>
+          </a:p>
+        </p:txBody>
+      </p:sp>
+      <p:sp>
+        <p:nvSpPr>
+          <p:cNvPr id="8" name="TextBox 7"/>
+          <p:cNvSpPr txBox="1"/>
+          <p:nvPr/>
+        </p:nvSpPr>
+        <p:spPr>
+          <a:xfrm>
+            <a:off x="868680" y="1737360"/>
+            <a:ext cx="4846320" cy="4114800"/>
+          </a:xfrm>
+          <a:prstGeom prst="rect">
+            <a:avLst/>
+          </a:prstGeom>
+          <a:noFill/>
+        </p:spPr>
+        <p:txBody>
+          <a:bodyPr wrap="square">
+            <a:spAutoFit/>
+          </a:bodyPr>
+          <a:lstStyle/>
+          <a:p>
+            <a:pPr algn="l">
+              <a:defRPr sz="1500" b="1">
+                <a:solidFill>
+                  <a:srgbClr val="1F4E79"/>
+                </a:solidFill>
+                <a:latin typeface="Times New Roman"/>
+              </a:defRPr>
+            </a:pPr>
+            <a:r>
+              <a:t>Conclusions &amp; Operational Insights</a:t>
+            </a:r>
+          </a:p>
+          <a:p>
+            <a:pPr algn="l">
+              <a:defRPr sz="1150" b="0">
+                <a:solidFill>
+                  <a:srgbClr val="202020"/>
+                </a:solidFill>
+                <a:latin typeface="Times New Roman"/>
+              </a:defRPr>
+            </a:pPr>
+            <a:r>
+              <a:t>• Multi-Model Trade-Offs: Supervised tree ensembles offer superior recall and native SHAP interpretability; deep neural architectures achieve zero or near-zero false alarms and unsupervised anomaly detection; no single model dominates across all operating criteria.</a:t>
+            </a:r>
+          </a:p>
+          <a:p>
+            <a:pPr algn="l">
+              <a:defRPr sz="1150" b="0">
+                <a:solidFill>
+                  <a:srgbClr val="202020"/>
+                </a:solidFill>
+                <a:latin typeface="Times New Roman"/>
+              </a:defRPr>
+            </a:pPr>
+            <a:r>
+              <a:t>• Synthetic Benchmark Limitations: Evaluated on 15,000 locally generated synthetic transactions. While matching mobile payment schemas, synthetic distributions do not reflect live adversarial fraud evolution; continuous telemetry is required.</a:t>
+            </a:r>
+          </a:p>
+          <a:p>
+            <a:pPr algn="l">
+              <a:defRPr sz="1150" b="0">
+                <a:solidFill>
+                  <a:srgbClr val="202020"/>
+                </a:solidFill>
+                <a:latin typeface="Times New Roman"/>
+              </a:defRPr>
+            </a:pPr>
+            <a:r>
+              <a:t>• Explainability Scope: TreeSHAP local attributions and ledger forensics provide critical decision transparency for human analysts, though technical explainability alone does not constitute statutory legal compliance.</a:t>
+            </a:r>
+          </a:p>
+          <a:p>
+            <a:pPr algn="l">
+              <a:defRPr sz="1150" b="0">
+                <a:solidFill>
+                  <a:srgbClr val="202020"/>
+                </a:solidFill>
+                <a:latin typeface="Times New Roman"/>
+              </a:defRPr>
+            </a:pPr>
+            <a:r>
+              <a:t>• Implemented Streaming Reliability: Transactional SQLite outbox (pending_alerts), manual offset commits, and synchronous broker acknowledgements provide verified message resilience across tested crash and disconnect scenarios.</a:t>
+            </a:r>
+          </a:p>
+        </p:txBody>
+      </p:sp>
+      <p:sp>
+        <p:nvSpPr>
+          <p:cNvPr id="9" name="Rounded Rectangle 8"/>
+          <p:cNvSpPr/>
+          <p:nvPr/>
+        </p:nvSpPr>
+        <p:spPr>
+          <a:xfrm>
+            <a:off x="6217920" y="1645920"/>
+            <a:ext cx="5120640" cy="4389120"/>
+          </a:xfrm>
+          <a:prstGeom prst="roundRect">
+            <a:avLst/>
+          </a:prstGeom>
+          <a:solidFill>
+            <a:srgbClr val="F4F7FA"/>
+          </a:solidFill>
+          <a:ln w="12700">
+            <a:solidFill>
+              <a:srgbClr val="CBD5E0"/>
+            </a:solidFill>
+          </a:ln>
+        </p:spPr>
+        <p:style>
+          <a:lnRef idx="1">
+            <a:schemeClr val="accent1"/>
+          </a:lnRef>
+          <a:fillRef idx="3">
+            <a:schemeClr val="accent1"/>
+          </a:fillRef>
+          <a:effectRef idx="2">
+            <a:schemeClr val="accent1"/>
+          </a:effectRef>
+          <a:fontRef idx="minor">
+            <a:schemeClr val="lt1"/>
+          </a:fontRef>
+        </p:style>
+        <p:txBody>
+          <a:bodyPr rtlCol="0" anchor="ctr"/>
+          <a:lstStyle/>
+          <a:p>
+            <a:pPr algn="ctr"/>
+          </a:p>
+        </p:txBody>
+      </p:sp>
+      <p:sp>
+        <p:nvSpPr>
+          <p:cNvPr id="10" name="TextBox 9"/>
+          <p:cNvSpPr txBox="1"/>
+          <p:nvPr/>
+        </p:nvSpPr>
+        <p:spPr>
+          <a:xfrm>
+            <a:off x="6355080" y="1737360"/>
+            <a:ext cx="4846320" cy="4114800"/>
+          </a:xfrm>
+          <a:prstGeom prst="rect">
+            <a:avLst/>
+          </a:prstGeom>
+          <a:noFill/>
+        </p:spPr>
+        <p:txBody>
+          <a:bodyPr wrap="square">
+            <a:spAutoFit/>
+          </a:bodyPr>
+          <a:lstStyle/>
+          <a:p>
+            <a:pPr algn="l">
+              <a:defRPr sz="1500" b="1">
+                <a:solidFill>
+                  <a:srgbClr val="1F4E79"/>
+                </a:solidFill>
+                <a:latin typeface="Times New Roman"/>
+              </a:defRPr>
+            </a:pPr>
+            <a:r>
+              <a:t>Future Research Roadmap</a:t>
+            </a:r>
+          </a:p>
+          <a:p>
+            <a:pPr algn="l">
+              <a:defRPr sz="1150" b="0">
+                <a:solidFill>
+                  <a:srgbClr val="202020"/>
+                </a:solidFill>
+                <a:latin typeface="Times New Roman"/>
+              </a:defRPr>
+            </a:pPr>
+            <a:r>
+              <a:t>• Graph Neural Networks (GNNs): Incorporate Relational Graph Convolutional Networks (R-GCNs) to detect money mule rings, collusion subgraphs, and synthetic identity fraud networks.</a:t>
+            </a:r>
+          </a:p>
+          <a:p>
+            <a:pPr algn="l">
+              <a:defRPr sz="1150" b="0">
+                <a:solidFill>
+                  <a:srgbClr val="202020"/>
+                </a:solidFill>
+                <a:latin typeface="Times New Roman"/>
+              </a:defRPr>
+            </a:pPr>
+            <a:r>
+              <a:t>• Online Concept Drift Adaptation: Integrate streaming drift detectors (ADWIN, DDM) to trigger automated pipeline recalibration under evolving payment distributions.</a:t>
+            </a:r>
+          </a:p>
+          <a:p>
+            <a:pPr algn="l">
+              <a:defRPr sz="1150" b="0">
+                <a:solidFill>
+                  <a:srgbClr val="202020"/>
+                </a:solidFill>
+                <a:latin typeface="Times New Roman"/>
+              </a:defRPr>
+            </a:pPr>
+            <a:r>
+              <a:t>• Pre-Authorization Telemetry: Expand beyond retrospective ledger balance features by incorporating real-time behavioral velocity and device fingerprinting.</a:t>
+            </a:r>
+          </a:p>
+          <a:p>
+            <a:pPr algn="l">
+              <a:defRPr sz="1150" b="0">
+                <a:solidFill>
+                  <a:srgbClr val="202020"/>
+                </a:solidFill>
+                <a:latin typeface="Times New Roman"/>
+              </a:defRPr>
+            </a:pPr>
+            <a:r>
+              <a:t>• Model Quantization: Deploy ONNX Runtime and TensorRT quantization for ultra-low latency edge inference.</a:t>
+            </a:r>
+          </a:p>
+        </p:txBody>
+      </p:sp>
+    </p:spTree>
+    <p:extLst>
+      <p:ext uri="{BB962C8B-B14F-4D97-AF65-F5344CB8AC3E}">
+        <p14:creationId xmlns:p14="http://schemas.microsoft.com/office/powerpoint/2010/main" val="1317498737"/>
+      </p:ext>
+    </p:extLst>
+  </p:cSld>
+  <p:clrMapOvr>
+    <a:masterClrMapping/>
+  </p:clrMapOvr>
+</p:sld>
+</file>
+
+<file path=ppt/slides/slide13.xml><?xml version="1.0" encoding="utf-8"?>
+<p:sld xmlns:a="http://schemas.openxmlformats.org/drawingml/2006/main" xmlns:r="http://schemas.openxmlformats.org/officeDocument/2006/relationships" xmlns:p="http://schemas.openxmlformats.org/presentationml/2006/main">
+  <p:cSld>
+    <p:spTree>
+      <p:nvGrpSpPr>
+        <p:cNvPr id="1" name=""/>
+        <p:cNvGrpSpPr/>
+        <p:nvPr/>
+      </p:nvGrpSpPr>
+      <p:grpSpPr>
+        <a:xfrm>
+          <a:off x="0" y="0"/>
+          <a:ext cx="0" cy="0"/>
+          <a:chOff x="0" y="0"/>
+          <a:chExt cx="0" cy="0"/>
+        </a:xfrm>
+      </p:grpSpPr>
+      <p:sp>
+        <p:nvSpPr>
+          <p:cNvPr id="2" name="Title 1">
+            <a:extLst>
+              <a:ext uri="{FF2B5EF4-FFF2-40B4-BE49-F238E27FC236}">
+                <a16:creationId xmlns:a16="http://schemas.microsoft.com/office/drawing/2014/main" xmlns="" id="{751EE89F-6F96-DF9C-768A-8B2A7BEAD23D}"/>
+              </a:ext>
+            </a:extLst>
+          </p:cNvPr>
+          <p:cNvSpPr>
+            <a:spLocks noGrp="1"/>
+          </p:cNvSpPr>
+          <p:nvPr>
+            <p:ph type="title"/>
+          </p:nvPr>
+        </p:nvSpPr>
+        <p:spPr/>
+        <p:txBody>
+          <a:bodyPr/>
+          <a:lstStyle/>
+          <a:p>
+            <a:pPr>
+              <a:defRPr sz="2400" b="1">
+                <a:solidFill>
+                  <a:srgbClr val="1F4E79"/>
+                </a:solidFill>
+                <a:latin typeface="Times New Roman"/>
+              </a:defRPr>
+            </a:pPr>
+            <a:r>
+              <a:t>Outcomes Achieved</a:t>
+            </a:r>
+          </a:p>
+        </p:txBody>
+      </p:sp>
+      <p:sp>
+        <p:nvSpPr>
+          <p:cNvPr id="4" name="Date Placeholder 3">
+            <a:extLst>
+              <a:ext uri="{FF2B5EF4-FFF2-40B4-BE49-F238E27FC236}">
+                <a16:creationId xmlns:a16="http://schemas.microsoft.com/office/drawing/2014/main" xmlns="" id="{7F86E621-0A63-DDD2-60A0-511D9D7C817E}"/>
+              </a:ext>
+            </a:extLst>
+          </p:cNvPr>
+          <p:cNvSpPr>
+            <a:spLocks noGrp="1"/>
+          </p:cNvSpPr>
+          <p:nvPr>
+            <p:ph type="dt" sz="half" idx="10"/>
+          </p:nvPr>
+        </p:nvSpPr>
+        <p:spPr/>
+        <p:txBody>
+          <a:bodyPr/>
+          <a:lstStyle/>
+          <a:p>
+            <a:pPr>
+              <a:defRPr sz="1000">
+                <a:solidFill>
+                  <a:srgbClr val="555555"/>
+                </a:solidFill>
+                <a:latin typeface="Times New Roman"/>
+              </a:defRPr>
+            </a:pPr>
+            <a:r>
+              <a:t>28/10/26</a:t>
+            </a:r>
+            <a:endParaRPr lang="en-IN"/>
+          </a:p>
+        </p:txBody>
+      </p:sp>
+      <p:sp>
+        <p:nvSpPr>
+          <p:cNvPr id="5" name="Footer Placeholder 4">
+            <a:extLst>
+              <a:ext uri="{FF2B5EF4-FFF2-40B4-BE49-F238E27FC236}">
+                <a16:creationId xmlns:a16="http://schemas.microsoft.com/office/drawing/2014/main" xmlns="" id="{74966F66-9685-CC43-3B74-035A03CAF328}"/>
+              </a:ext>
+            </a:extLst>
+          </p:cNvPr>
+          <p:cNvSpPr>
+            <a:spLocks noGrp="1"/>
+          </p:cNvSpPr>
+          <p:nvPr>
+            <p:ph type="ftr" sz="quarter" idx="11"/>
+          </p:nvPr>
+        </p:nvSpPr>
+        <p:spPr/>
+        <p:txBody>
+          <a:bodyPr/>
+          <a:lstStyle/>
+          <a:p>
+            <a:pPr>
+              <a:defRPr sz="1000">
+                <a:solidFill>
+                  <a:srgbClr val="555555"/>
+                </a:solidFill>
+                <a:latin typeface="Times New Roman"/>
+              </a:defRPr>
+            </a:pPr>
+            <a:r>
+              <a:t>VIT SCOPE  |  BCSE497J Project-I</a:t>
+            </a:r>
+          </a:p>
+        </p:txBody>
+      </p:sp>
+      <p:sp>
+        <p:nvSpPr>
+          <p:cNvPr id="6" name="Slide Number Placeholder 5">
+            <a:extLst>
+              <a:ext uri="{FF2B5EF4-FFF2-40B4-BE49-F238E27FC236}">
+                <a16:creationId xmlns:a16="http://schemas.microsoft.com/office/drawing/2014/main" xmlns="" id="{32234F7B-54B7-5C34-9356-A94BE39E2151}"/>
+              </a:ext>
+            </a:extLst>
+          </p:cNvPr>
+          <p:cNvSpPr>
+            <a:spLocks noGrp="1"/>
+          </p:cNvSpPr>
+          <p:nvPr>
+            <p:ph type="sldNum" sz="quarter" idx="12"/>
+          </p:nvPr>
+        </p:nvSpPr>
+        <p:spPr/>
+        <p:txBody>
+          <a:bodyPr/>
+          <a:lstStyle/>
+          <a:p>
+            <a:fld id="{65201FD4-9D8D-4491-815B-63C7BF4F0034}" type="slidenum">
+              <a:rPr lang="en-IN" smtClean="0"/>
+              <a:t>13</a:t>
+            </a:fld>
+            <a:endParaRPr lang="en-IN"/>
+          </a:p>
+        </p:txBody>
+      </p:sp>
+      <p:sp>
+        <p:nvSpPr>
+          <p:cNvPr id="7" name="Rounded Rectangle 6"/>
+          <p:cNvSpPr/>
+          <p:nvPr/>
+        </p:nvSpPr>
+        <p:spPr>
+          <a:xfrm>
+            <a:off x="731520" y="1645920"/>
+            <a:ext cx="10698480" cy="4389120"/>
+          </a:xfrm>
+          <a:prstGeom prst="roundRect">
+            <a:avLst/>
+          </a:prstGeom>
+          <a:solidFill>
+            <a:srgbClr val="F4F7FA"/>
+          </a:solidFill>
+          <a:ln w="12700">
+            <a:solidFill>
+              <a:srgbClr val="CBD5E0"/>
+            </a:solidFill>
+          </a:ln>
+        </p:spPr>
+        <p:style>
+          <a:lnRef idx="1">
+            <a:schemeClr val="accent1"/>
+          </a:lnRef>
+          <a:fillRef idx="3">
+            <a:schemeClr val="accent1"/>
+          </a:fillRef>
+          <a:effectRef idx="2">
+            <a:schemeClr val="accent1"/>
+          </a:effectRef>
+          <a:fontRef idx="minor">
+            <a:schemeClr val="lt1"/>
+          </a:fontRef>
+        </p:style>
+        <p:txBody>
+          <a:bodyPr rtlCol="0" anchor="ctr"/>
+          <a:lstStyle/>
+          <a:p>
+            <a:pPr algn="ctr"/>
+          </a:p>
+        </p:txBody>
+      </p:sp>
+      <p:sp>
+        <p:nvSpPr>
+          <p:cNvPr id="8" name="TextBox 7"/>
+          <p:cNvSpPr txBox="1"/>
+          <p:nvPr/>
+        </p:nvSpPr>
+        <p:spPr>
+          <a:xfrm>
+            <a:off x="914400" y="1737360"/>
+            <a:ext cx="10332720" cy="4114800"/>
+          </a:xfrm>
+          <a:prstGeom prst="rect">
+            <a:avLst/>
+          </a:prstGeom>
+          <a:noFill/>
+        </p:spPr>
+        <p:txBody>
+          <a:bodyPr wrap="square">
+            <a:spAutoFit/>
+          </a:bodyPr>
+          <a:lstStyle/>
+          <a:p>
+            <a:pPr algn="l">
+              <a:defRPr sz="1600" b="1">
+                <a:solidFill>
+                  <a:srgbClr val="1F4E79"/>
+                </a:solidFill>
+                <a:latin typeface="Times New Roman"/>
+              </a:defRPr>
+            </a:pPr>
+            <a:r>
+              <a:t>Tangible Project Outcomes &amp; Verified Deliverables</a:t>
+            </a:r>
+          </a:p>
+          <a:p>
+            <a:pPr algn="l">
+              <a:defRPr sz="600" b="0">
+                <a:solidFill>
+                  <a:srgbClr val="202020"/>
+                </a:solidFill>
+                <a:latin typeface="Times New Roman"/>
+              </a:defRPr>
+            </a:pPr>
+          </a:p>
+          <a:p>
+            <a:pPr algn="l">
+              <a:defRPr sz="1400" b="1">
+                <a:solidFill>
+                  <a:srgbClr val="059669"/>
+                </a:solidFill>
+                <a:latin typeface="Times New Roman"/>
+              </a:defRPr>
+            </a:pPr>
+            <a:r>
+              <a:t>1. Working Academic Prototype &amp; Microservice:</a:t>
+            </a:r>
+          </a:p>
+          <a:p>
+            <a:pPr algn="l">
+              <a:defRPr sz="1200" b="0">
+                <a:solidFill>
+                  <a:srgbClr val="202020"/>
+                </a:solidFill>
+                <a:latin typeface="Times New Roman"/>
+              </a:defRPr>
+            </a:pPr>
+            <a:r>
+              <a:t>• Multi-container Docker Compose architecture defining API, dashboard, Kafka, and ZooKeeper services with strict deployment secret enforcement (${FRAUDGUARD_API_KEY}).</a:t>
+            </a:r>
+          </a:p>
+          <a:p>
+            <a:pPr algn="l">
+              <a:defRPr sz="1200" b="0">
+                <a:solidFill>
+                  <a:srgbClr val="202020"/>
+                </a:solidFill>
+                <a:latin typeface="Times New Roman"/>
+              </a:defRPr>
+            </a:pPr>
+            <a:r>
+              <a:t>• Modular Python software combining FastAPI REST endpoints, Streamlit analyst workspace, and Kafka real-time streaming ingestion.</a:t>
+            </a:r>
+          </a:p>
+          <a:p>
+            <a:pPr algn="l">
+              <a:defRPr sz="800" b="0">
+                <a:solidFill>
+                  <a:srgbClr val="202020"/>
+                </a:solidFill>
+                <a:latin typeface="Times New Roman"/>
+              </a:defRPr>
+            </a:pPr>
+          </a:p>
+          <a:p>
+            <a:pPr algn="l">
+              <a:defRPr sz="1400" b="1">
+                <a:solidFill>
+                  <a:srgbClr val="059669"/>
+                </a:solidFill>
+                <a:latin typeface="Times New Roman"/>
+              </a:defRPr>
+            </a:pPr>
+            <a:r>
+              <a:t>2. Comprehensive Automated Regression Verification:</a:t>
+            </a:r>
+          </a:p>
+          <a:p>
+            <a:pPr algn="l">
+              <a:defRPr sz="1200" b="0">
+                <a:solidFill>
+                  <a:srgbClr val="202020"/>
+                </a:solidFill>
+                <a:latin typeface="Times New Roman"/>
+              </a:defRPr>
+            </a:pPr>
+            <a:r>
+              <a:t>• 104 automated tests achieving a 100% PASS rate across 9 test suites covering preprocessing, model scoring, explainability, API security, streaming recovery, and SQLite persistence.</a:t>
+            </a:r>
+          </a:p>
+          <a:p>
+            <a:pPr algn="l">
+              <a:defRPr sz="1200" b="0">
+                <a:solidFill>
+                  <a:srgbClr val="202020"/>
+                </a:solidFill>
+                <a:latin typeface="Times New Roman"/>
+              </a:defRPr>
+            </a:pPr>
+            <a:r>
+              <a:t>• Explicitly attributed to the saved test report in results/test_report.txt and results/test_summary.json.</a:t>
+            </a:r>
+          </a:p>
+          <a:p>
+            <a:pPr algn="l">
+              <a:defRPr sz="800" b="0">
+                <a:solidFill>
+                  <a:srgbClr val="202020"/>
+                </a:solidFill>
+                <a:latin typeface="Times New Roman"/>
+              </a:defRPr>
+            </a:pPr>
+          </a:p>
+          <a:p>
+            <a:pPr algn="l">
+              <a:defRPr sz="1400" b="1">
+                <a:solidFill>
+                  <a:srgbClr val="059669"/>
+                </a:solidFill>
+                <a:latin typeface="Times New Roman"/>
+              </a:defRPr>
+            </a:pPr>
+            <a:r>
+              <a:t>3. Open-Source Codebase &amp; Reproducible Artifacts:</a:t>
+            </a:r>
+          </a:p>
+          <a:p>
+            <a:pPr algn="l">
+              <a:defRPr sz="1200" b="0">
+                <a:solidFill>
+                  <a:srgbClr val="202020"/>
+                </a:solidFill>
+                <a:latin typeface="Times New Roman"/>
+              </a:defRPr>
+            </a:pPr>
+            <a:r>
+              <a:t>• Public GitHub Repository: https://github.com/animeshlabh57-rgb/AI-Based-Financial-Fraud-Detection-System</a:t>
+            </a:r>
+          </a:p>
+          <a:p>
+            <a:pPr algn="l">
+              <a:defRPr sz="1200" b="0">
+                <a:solidFill>
+                  <a:srgbClr val="202020"/>
+                </a:solidFill>
+                <a:latin typeface="Times New Roman"/>
+              </a:defRPr>
+            </a:pPr>
+            <a:r>
+              <a:t>• Contains complete modular source code, trained model weights, evaluation benchmark scripts, and Docker orchestrations.</a:t>
+            </a:r>
+          </a:p>
+          <a:p>
+            <a:pPr algn="l">
+              <a:defRPr sz="800" b="0">
+                <a:solidFill>
+                  <a:srgbClr val="202020"/>
+                </a:solidFill>
+                <a:latin typeface="Times New Roman"/>
+              </a:defRPr>
+            </a:pPr>
+          </a:p>
+          <a:p>
+            <a:pPr algn="l">
+              <a:defRPr sz="1400" b="1">
+                <a:solidFill>
+                  <a:srgbClr val="059669"/>
+                </a:solidFill>
+                <a:latin typeface="Times New Roman"/>
+              </a:defRPr>
+            </a:pPr>
+            <a:r>
+              <a:t>4. Academic Documentation &amp; Publication Trajectory:</a:t>
+            </a:r>
+          </a:p>
+          <a:p>
+            <a:pPr algn="l">
+              <a:defRPr sz="1200" b="0">
+                <a:solidFill>
+                  <a:srgbClr val="202020"/>
+                </a:solidFill>
+                <a:latin typeface="Times New Roman"/>
+              </a:defRPr>
+            </a:pPr>
+            <a:r>
+              <a:t>• Comprehensive 41-page B.Tech Project-I Academic Project Report (BCSE497J) formatted in accordance with VIT IEEE guidelines.</a:t>
+            </a:r>
+          </a:p>
+          <a:p>
+            <a:pPr algn="l">
+              <a:defRPr sz="1200" b="0">
+                <a:solidFill>
+                  <a:srgbClr val="202020"/>
+                </a:solidFill>
+                <a:latin typeface="Times New Roman"/>
+              </a:defRPr>
+            </a:pPr>
+            <a:r>
+              <a:t>• Future Publication Trajectory: Target preparation for submission to a peer-reviewed Scopus-indexed conference / journal (kept separate from achieved outcomes).</a:t>
+            </a:r>
+          </a:p>
+        </p:txBody>
+      </p:sp>
+    </p:spTree>
+    <p:extLst>
+      <p:ext uri="{BB962C8B-B14F-4D97-AF65-F5344CB8AC3E}">
+        <p14:creationId xmlns:p14="http://schemas.microsoft.com/office/powerpoint/2010/main" val="4071570719"/>
+      </p:ext>
+    </p:extLst>
+  </p:cSld>
+  <p:clrMapOvr>
+    <a:masterClrMapping/>
+  </p:clrMapOvr>
+</p:sld>
+</file>
+
+<file path=ppt/slides/slide14.xml><?xml version="1.0" encoding="utf-8"?>
+<p:sld xmlns:a="http://schemas.openxmlformats.org/drawingml/2006/main" xmlns:r="http://schemas.openxmlformats.org/officeDocument/2006/relationships" xmlns:p="http://schemas.openxmlformats.org/presentationml/2006/main">
+  <p:cSld>
+    <p:spTree>
+      <p:nvGrpSpPr>
+        <p:cNvPr id="1" name="">
+          <a:extLst>
+            <a:ext uri="{FF2B5EF4-FFF2-40B4-BE49-F238E27FC236}">
+              <a16:creationId xmlns:a16="http://schemas.microsoft.com/office/drawing/2014/main" xmlns="" id="{2F70E1A0-FA4A-8258-6E10-9F00EDC0BC8B}"/>
+            </a:ext>
+          </a:extLst>
+        </p:cNvPr>
+        <p:cNvGrpSpPr/>
+        <p:nvPr/>
+      </p:nvGrpSpPr>
+      <p:grpSpPr>
+        <a:xfrm>
+          <a:off x="0" y="0"/>
+          <a:ext cx="0" cy="0"/>
+          <a:chOff x="0" y="0"/>
+          <a:chExt cx="0" cy="0"/>
+        </a:xfrm>
+      </p:grpSpPr>
+      <p:sp>
+        <p:nvSpPr>
+          <p:cNvPr id="4" name="object 2">
+            <a:extLst>
+              <a:ext uri="{FF2B5EF4-FFF2-40B4-BE49-F238E27FC236}">
+                <a16:creationId xmlns:a16="http://schemas.microsoft.com/office/drawing/2014/main" xmlns="" id="{7CFC0C65-61CC-E657-43F7-99C8E5362448}"/>
+              </a:ext>
+            </a:extLst>
+          </p:cNvPr>
+          <p:cNvSpPr txBox="1">
+            <a:spLocks noGrp="1"/>
+          </p:cNvSpPr>
+          <p:nvPr>
+            <p:ph type="title"/>
+          </p:nvPr>
+        </p:nvSpPr>
+        <p:spPr>
+          <a:xfrm>
+            <a:off x="460248" y="681037"/>
+            <a:ext cx="10515600" cy="576696"/>
+          </a:xfrm>
+          <a:prstGeom prst="rect">
+            <a:avLst/>
+          </a:prstGeom>
+        </p:spPr>
+        <p:txBody>
+          <a:bodyPr vert="horz" wrap="square" lIns="0" tIns="113919" rIns="0" bIns="0" rtlCol="0">
+            <a:spAutoFit/>
+          </a:bodyPr>
+          <a:lstStyle/>
+          <a:p>
+            <a:pPr marL="486409">
+              <a:lnSpc>
+                <a:spcPct val="100000"/>
+              </a:lnSpc>
+              <a:spcBef>
+                <a:spcPts val="130"/>
+              </a:spcBef>
+              <a:defRPr sz="2400" b="1">
+                <a:solidFill>
+                  <a:srgbClr val="1F4E79"/>
+                </a:solidFill>
+                <a:latin typeface="Times New Roman"/>
+              </a:defRPr>
+            </a:pPr>
+            <a:r>
+              <a:t>References</a:t>
+            </a:r>
+            <a:endParaRPr sz="3000" b="1" dirty="0">
+              <a:latin typeface="Times New Roman" panose="02020603050405020304" pitchFamily="18" charset="0"/>
+              <a:cs typeface="Times New Roman" panose="02020603050405020304" pitchFamily="18" charset="0"/>
+            </a:endParaRPr>
+          </a:p>
+        </p:txBody>
+      </p:sp>
+      <p:sp>
+        <p:nvSpPr>
+          <p:cNvPr id="5" name="Date Placeholder 4">
+            <a:extLst>
+              <a:ext uri="{FF2B5EF4-FFF2-40B4-BE49-F238E27FC236}">
+                <a16:creationId xmlns:a16="http://schemas.microsoft.com/office/drawing/2014/main" xmlns="" id="{B732D3DB-7149-E1E5-D5F9-4FC93A788894}"/>
+              </a:ext>
+            </a:extLst>
+          </p:cNvPr>
+          <p:cNvSpPr>
+            <a:spLocks noGrp="1"/>
+          </p:cNvSpPr>
+          <p:nvPr>
+            <p:ph type="dt" sz="half" idx="10"/>
+          </p:nvPr>
+        </p:nvSpPr>
+        <p:spPr/>
+        <p:txBody>
+          <a:bodyPr/>
+          <a:lstStyle/>
+          <a:p>
+            <a:pPr>
+              <a:defRPr sz="1000">
+                <a:solidFill>
+                  <a:srgbClr val="555555"/>
+                </a:solidFill>
+                <a:latin typeface="Times New Roman"/>
+              </a:defRPr>
+            </a:pPr>
+            <a:r>
+              <a:t>28/10/26</a:t>
+            </a:r>
+            <a:endParaRPr lang="en-IN"/>
+          </a:p>
+        </p:txBody>
+      </p:sp>
+      <p:sp>
+        <p:nvSpPr>
+          <p:cNvPr id="6" name="Footer Placeholder 5">
+            <a:extLst>
+              <a:ext uri="{FF2B5EF4-FFF2-40B4-BE49-F238E27FC236}">
+                <a16:creationId xmlns:a16="http://schemas.microsoft.com/office/drawing/2014/main" xmlns="" id="{CEBCABB1-7C63-52E3-2815-3651AE7E9F7B}"/>
+              </a:ext>
+            </a:extLst>
+          </p:cNvPr>
+          <p:cNvSpPr>
+            <a:spLocks noGrp="1"/>
+          </p:cNvSpPr>
+          <p:nvPr>
+            <p:ph type="ftr" sz="quarter" idx="11"/>
+          </p:nvPr>
+        </p:nvSpPr>
+        <p:spPr/>
+        <p:txBody>
+          <a:bodyPr/>
+          <a:lstStyle/>
+          <a:p>
+            <a:pPr>
+              <a:defRPr sz="1000">
+                <a:solidFill>
+                  <a:srgbClr val="555555"/>
+                </a:solidFill>
+                <a:latin typeface="Times New Roman"/>
+              </a:defRPr>
+            </a:pPr>
+            <a:r>
+              <a:t>VIT SCOPE  |  BCSE497J Project-I</a:t>
+            </a:r>
+          </a:p>
+        </p:txBody>
+      </p:sp>
+      <p:sp>
+        <p:nvSpPr>
+          <p:cNvPr id="7" name="Slide Number Placeholder 6">
+            <a:extLst>
+              <a:ext uri="{FF2B5EF4-FFF2-40B4-BE49-F238E27FC236}">
+                <a16:creationId xmlns:a16="http://schemas.microsoft.com/office/drawing/2014/main" xmlns="" id="{E431EAEC-BCE3-2979-69C6-273309B9FFA7}"/>
+              </a:ext>
+            </a:extLst>
+          </p:cNvPr>
+          <p:cNvSpPr>
+            <a:spLocks noGrp="1"/>
+          </p:cNvSpPr>
+          <p:nvPr>
+            <p:ph type="sldNum" sz="quarter" idx="12"/>
+          </p:nvPr>
+        </p:nvSpPr>
+        <p:spPr/>
+        <p:txBody>
+          <a:bodyPr/>
+          <a:lstStyle/>
+          <a:p>
+            <a:fld id="{65201FD4-9D8D-4491-815B-63C7BF4F0034}" type="slidenum">
+              <a:rPr lang="en-IN" smtClean="0"/>
+              <a:t>14</a:t>
+            </a:fld>
+            <a:endParaRPr lang="en-IN"/>
+          </a:p>
+        </p:txBody>
+      </p:sp>
+      <p:sp>
+        <p:nvSpPr>
+          <p:cNvPr id="8" name="Rounded Rectangle 7"/>
+          <p:cNvSpPr/>
+          <p:nvPr/>
+        </p:nvSpPr>
+        <p:spPr>
+          <a:xfrm>
+            <a:off x="731520" y="1645920"/>
+            <a:ext cx="10698480" cy="4389120"/>
+          </a:xfrm>
+          <a:prstGeom prst="roundRect">
+            <a:avLst/>
+          </a:prstGeom>
+          <a:solidFill>
+            <a:srgbClr val="F4F7FA"/>
+          </a:solidFill>
+          <a:ln w="12700">
+            <a:solidFill>
+              <a:srgbClr val="CBD5E0"/>
+            </a:solidFill>
+          </a:ln>
+        </p:spPr>
+        <p:style>
+          <a:lnRef idx="1">
+            <a:schemeClr val="accent1"/>
+          </a:lnRef>
+          <a:fillRef idx="3">
+            <a:schemeClr val="accent1"/>
+          </a:fillRef>
+          <a:effectRef idx="2">
+            <a:schemeClr val="accent1"/>
+          </a:effectRef>
+          <a:fontRef idx="minor">
+            <a:schemeClr val="lt1"/>
+          </a:fontRef>
+        </p:style>
+        <p:txBody>
+          <a:bodyPr rtlCol="0" anchor="ctr"/>
+          <a:lstStyle/>
+          <a:p>
+            <a:pPr algn="ctr"/>
+          </a:p>
+        </p:txBody>
+      </p:sp>
+      <p:sp>
+        <p:nvSpPr>
+          <p:cNvPr id="9" name="TextBox 8"/>
+          <p:cNvSpPr txBox="1"/>
+          <p:nvPr/>
+        </p:nvSpPr>
+        <p:spPr>
+          <a:xfrm>
+            <a:off x="914400" y="1737360"/>
+            <a:ext cx="10332720" cy="4114800"/>
+          </a:xfrm>
+          <a:prstGeom prst="rect">
+            <a:avLst/>
+          </a:prstGeom>
+          <a:noFill/>
+        </p:spPr>
+        <p:txBody>
+          <a:bodyPr wrap="square">
+            <a:spAutoFit/>
+          </a:bodyPr>
+          <a:lstStyle/>
+          <a:p>
+            <a:pPr algn="l">
+              <a:defRPr sz="950" b="0">
+                <a:solidFill>
+                  <a:srgbClr val="202020"/>
+                </a:solidFill>
+                <a:latin typeface="Times New Roman"/>
+              </a:defRPr>
+            </a:pPr>
+            <a:r>
+              <a:t>[1] A. Dal Pozzolo, G. Boracchi, O. Caelen, et al., 'Credit card fraud detection: A realistic modeling and a novel learning strategy,' IEEE Trans. Neural Netw. Learn. Syst., vol. 29, no. 8, pp. 3784–3797, Aug. 2018.</a:t>
+            </a:r>
+          </a:p>
+          <a:p>
+            <a:pPr algn="l">
+              <a:defRPr sz="150" b="0">
+                <a:solidFill>
+                  <a:srgbClr val="202020"/>
+                </a:solidFill>
+                <a:latin typeface="Times New Roman"/>
+              </a:defRPr>
+            </a:pPr>
+          </a:p>
+          <a:p>
+            <a:pPr algn="l">
+              <a:defRPr sz="950" b="0">
+                <a:solidFill>
+                  <a:srgbClr val="202020"/>
+                </a:solidFill>
+                <a:latin typeface="Times New Roman"/>
+              </a:defRPr>
+            </a:pPr>
+            <a:r>
+              <a:t>[2] A. Dal Pozzolo, O. Caelen, R. A. Johnson, and G. Bontempi, 'Calibrating probability with undersampling for unbalanced classification,' in Proc. IEEE SSCI, 2015, pp. 159–166.</a:t>
+            </a:r>
+          </a:p>
+          <a:p>
+            <a:pPr algn="l">
+              <a:defRPr sz="150" b="0">
+                <a:solidFill>
+                  <a:srgbClr val="202020"/>
+                </a:solidFill>
+                <a:latin typeface="Times New Roman"/>
+              </a:defRPr>
+            </a:pPr>
+          </a:p>
+          <a:p>
+            <a:pPr algn="l">
+              <a:defRPr sz="950" b="0">
+                <a:solidFill>
+                  <a:srgbClr val="202020"/>
+                </a:solidFill>
+                <a:latin typeface="Times New Roman"/>
+              </a:defRPr>
+            </a:pPr>
+            <a:r>
+              <a:t>[3] N. V. Chawla, K. W. Bowyer, L. O. Hall, and W. P. Kegelmeyer, 'SMOTE: Synthetic minority over-sampling technique,' J. Artif. Intell. Res., vol. 16, pp. 321–357, 2002.</a:t>
+            </a:r>
+          </a:p>
+          <a:p>
+            <a:pPr algn="l">
+              <a:defRPr sz="150" b="0">
+                <a:solidFill>
+                  <a:srgbClr val="202020"/>
+                </a:solidFill>
+                <a:latin typeface="Times New Roman"/>
+              </a:defRPr>
+            </a:pPr>
+          </a:p>
+          <a:p>
+            <a:pPr algn="l">
+              <a:defRPr sz="950" b="0">
+                <a:solidFill>
+                  <a:srgbClr val="202020"/>
+                </a:solidFill>
+                <a:latin typeface="Times New Roman"/>
+              </a:defRPr>
+            </a:pPr>
+            <a:r>
+              <a:t>[4] A. Pumsirirat and L. Yan, 'Credit card fraud detection using deep learning based on auto-encoder and restricted Boltzmann machine,' Int. J. Adv. Comput. Sci. Appl., vol. 9, no. 1, pp. 18–25, 2018.</a:t>
+            </a:r>
+          </a:p>
+          <a:p>
+            <a:pPr algn="l">
+              <a:defRPr sz="150" b="0">
+                <a:solidFill>
+                  <a:srgbClr val="202020"/>
+                </a:solidFill>
+                <a:latin typeface="Times New Roman"/>
+              </a:defRPr>
+            </a:pPr>
+          </a:p>
+          <a:p>
+            <a:pPr algn="l">
+              <a:defRPr sz="950" b="0">
+                <a:solidFill>
+                  <a:srgbClr val="202020"/>
+                </a:solidFill>
+                <a:latin typeface="Times New Roman"/>
+              </a:defRPr>
+            </a:pPr>
+            <a:r>
+              <a:t>[5] L. Breiman, 'Random forests,' Mach. Learn., vol. 45, no. 1, pp. 5–32, 2001.</a:t>
+            </a:r>
+          </a:p>
+          <a:p>
+            <a:pPr algn="l">
+              <a:defRPr sz="150" b="0">
+                <a:solidFill>
+                  <a:srgbClr val="202020"/>
+                </a:solidFill>
+                <a:latin typeface="Times New Roman"/>
+              </a:defRPr>
+            </a:pPr>
+          </a:p>
+          <a:p>
+            <a:pPr algn="l">
+              <a:defRPr sz="950" b="0">
+                <a:solidFill>
+                  <a:srgbClr val="202020"/>
+                </a:solidFill>
+                <a:latin typeface="Times New Roman"/>
+              </a:defRPr>
+            </a:pPr>
+            <a:r>
+              <a:t>[6] T. Chen and C. Guestrin, 'XGBoost: A scalable tree boosting system,' in Proc. 22nd ACM SIGKDD, 2016, pp. 785–794.</a:t>
+            </a:r>
+          </a:p>
+          <a:p>
+            <a:pPr algn="l">
+              <a:defRPr sz="150" b="0">
+                <a:solidFill>
+                  <a:srgbClr val="202020"/>
+                </a:solidFill>
+                <a:latin typeface="Times New Roman"/>
+              </a:defRPr>
+            </a:pPr>
+          </a:p>
+          <a:p>
+            <a:pPr algn="l">
+              <a:defRPr sz="950" b="0">
+                <a:solidFill>
+                  <a:srgbClr val="202020"/>
+                </a:solidFill>
+                <a:latin typeface="Times New Roman"/>
+              </a:defRPr>
+            </a:pPr>
+            <a:r>
+              <a:t>[7] J. An and S. Cho, 'Variational autoencoder based anomaly detection using reconstruction probability,' Special Lecture on IE, vol. 2, no. 1, pp. 1–18, 2015.</a:t>
+            </a:r>
+          </a:p>
+          <a:p>
+            <a:pPr algn="l">
+              <a:defRPr sz="150" b="0">
+                <a:solidFill>
+                  <a:srgbClr val="202020"/>
+                </a:solidFill>
+                <a:latin typeface="Times New Roman"/>
+              </a:defRPr>
+            </a:pPr>
+          </a:p>
+          <a:p>
+            <a:pPr algn="l">
+              <a:defRPr sz="950" b="0">
+                <a:solidFill>
+                  <a:srgbClr val="202020"/>
+                </a:solidFill>
+                <a:latin typeface="Times New Roman"/>
+              </a:defRPr>
+            </a:pPr>
+            <a:r>
+              <a:t>[8] S. M. Lundberg et al., 'From local explanations to global understanding with explainable AI for trees,' Nature Mach. Intell., vol. 2, no. 1, pp. 56–67, 2020.</a:t>
+            </a:r>
+          </a:p>
+          <a:p>
+            <a:pPr algn="l">
+              <a:defRPr sz="150" b="0">
+                <a:solidFill>
+                  <a:srgbClr val="202020"/>
+                </a:solidFill>
+                <a:latin typeface="Times New Roman"/>
+              </a:defRPr>
+            </a:pPr>
+          </a:p>
+          <a:p>
+            <a:pPr algn="l">
+              <a:defRPr sz="950" b="0">
+                <a:solidFill>
+                  <a:srgbClr val="202020"/>
+                </a:solidFill>
+                <a:latin typeface="Times New Roman"/>
+              </a:defRPr>
+            </a:pPr>
+            <a:r>
+              <a:t>[14] M. Shanaa and S. Abdallah, 'A hybrid anomaly detection framework combining supervised and unsupervised learning for credit card fraud detection,' F1000Research, vol. 14, art. 664, 2025.</a:t>
+            </a:r>
+          </a:p>
+          <a:p>
+            <a:pPr algn="l">
+              <a:defRPr sz="150" b="0">
+                <a:solidFill>
+                  <a:srgbClr val="202020"/>
+                </a:solidFill>
+                <a:latin typeface="Times New Roman"/>
+              </a:defRPr>
+            </a:pPr>
+          </a:p>
+          <a:p>
+            <a:pPr algn="l">
+              <a:defRPr sz="950" b="0">
+                <a:solidFill>
+                  <a:srgbClr val="202020"/>
+                </a:solidFill>
+                <a:latin typeface="Times New Roman"/>
+              </a:defRPr>
+            </a:pPr>
+            <a:r>
+              <a:t>[15] S. Iqbal, K. M. Awan, S. Kamal, and Z. Ur Rehman, 'Interpretable ensemble learning models for credit card fraud detection,' Appl. Sci., vol. 15, no. 22, art. 12073, 2025.</a:t>
+            </a:r>
+          </a:p>
+          <a:p>
+            <a:pPr algn="l">
+              <a:defRPr sz="150" b="0">
+                <a:solidFill>
+                  <a:srgbClr val="202020"/>
+                </a:solidFill>
+                <a:latin typeface="Times New Roman"/>
+              </a:defRPr>
+            </a:pPr>
+          </a:p>
+          <a:p>
+            <a:pPr algn="l">
+              <a:defRPr sz="1000" b="1">
+                <a:solidFill>
+                  <a:srgbClr val="1F4E79"/>
+                </a:solidFill>
+                <a:latin typeface="Times New Roman"/>
+              </a:defRPr>
+            </a:pPr>
+            <a:r>
+              <a:t>Repository &amp; Saved Experimental Evidence:</a:t>
+            </a:r>
+          </a:p>
+          <a:p>
+            <a:pPr algn="l">
+              <a:defRPr sz="950" b="0">
+                <a:solidFill>
+                  <a:srgbClr val="202020"/>
+                </a:solidFill>
+                <a:latin typeface="Times New Roman"/>
+              </a:defRPr>
+            </a:pPr>
+            <a:r>
+              <a:t>• GitHub Codebase: https://github.com/animeshlabh57-rgb/AI-Based-Financial-Fraud-Detection-System</a:t>
+            </a:r>
+          </a:p>
+          <a:p>
+            <a:pPr algn="l">
+              <a:defRPr sz="950" b="1">
+                <a:solidFill>
+                  <a:srgbClr val="059669"/>
+                </a:solidFill>
+                <a:latin typeface="Times New Roman"/>
+              </a:defRPr>
+            </a:pPr>
+            <a:r>
+              <a:t>• Primary Results: results/model_results.csv  |  Secondary Shift: results/independent_benchmark_report.json  |  Tests: results/test_report.txt</a:t>
+            </a:r>
+          </a:p>
+        </p:txBody>
+      </p:sp>
+    </p:spTree>
+    <p:extLst>
+      <p:ext uri="{BB962C8B-B14F-4D97-AF65-F5344CB8AC3E}">
+        <p14:creationId xmlns:p14="http://schemas.microsoft.com/office/powerpoint/2010/main" val="3510526248"/>
+      </p:ext>
+    </p:extLst>
+  </p:cSld>
+  <p:clrMapOvr>
+    <a:masterClrMapping/>
+  </p:clrMapOvr>
+</p:sld>
+</file>
+
+<file path=ppt/slides/slide15.xml><?xml version="1.0" encoding="utf-8"?>
+<p:sld xmlns:a="http://schemas.openxmlformats.org/drawingml/2006/main" xmlns:p="http://schemas.openxmlformats.org/presentationml/2006/main" xmlns:r="http://schemas.openxmlformats.org/officeDocument/2006/relationships">
+  <p:cSld>
+    <p:spTree>
+      <p:nvGrpSpPr>
+        <p:cNvPr id="1" name=""/>
+        <p:cNvGrpSpPr/>
+        <p:nvPr/>
+      </p:nvGrpSpPr>
+      <p:grpSpPr/>
+      <p:sp>
+        <p:nvSpPr>
+          <p:cNvPr id="2" name="Title 1"/>
+          <p:cNvSpPr>
+            <a:spLocks noGrp="1"/>
+          </p:cNvSpPr>
+          <p:nvPr>
+            <p:ph type="title"/>
+          </p:nvPr>
+        </p:nvSpPr>
+        <p:spPr/>
+        <p:txBody>
+          <a:bodyPr/>
+          <a:lstStyle/>
+          <a:p>
+            <a:pPr>
+              <a:defRPr sz="2400" b="1">
+                <a:solidFill>
+                  <a:srgbClr val="1F4E79"/>
+                </a:solidFill>
+                <a:latin typeface="Times New Roman"/>
+              </a:defRPr>
+            </a:pPr>
+            <a:r>
+              <a:t>Dataset Provenance &amp; Experimental Methodology</a:t>
+            </a:r>
+          </a:p>
+        </p:txBody>
+      </p:sp>
+      <p:sp>
+        <p:nvSpPr>
+          <p:cNvPr id="3" name="Rounded Rectangle 2"/>
+          <p:cNvSpPr/>
+          <p:nvPr/>
+        </p:nvSpPr>
+        <p:spPr>
+          <a:xfrm>
+            <a:off x="731520" y="1645920"/>
+            <a:ext cx="5120640" cy="4389120"/>
+          </a:xfrm>
+          <a:prstGeom prst="roundRect">
+            <a:avLst/>
+          </a:prstGeom>
+          <a:solidFill>
+            <a:srgbClr val="F4F7FA"/>
+          </a:solidFill>
+          <a:ln w="12700">
+            <a:solidFill>
+              <a:srgbClr val="CBD5E0"/>
+            </a:solidFill>
+          </a:ln>
+        </p:spPr>
+        <p:style>
+          <a:lnRef idx="1">
+            <a:schemeClr val="accent1"/>
+          </a:lnRef>
+          <a:fillRef idx="3">
+            <a:schemeClr val="accent1"/>
+          </a:fillRef>
+          <a:effectRef idx="2">
+            <a:schemeClr val="accent1"/>
+          </a:effectRef>
+          <a:fontRef idx="minor">
+            <a:schemeClr val="lt1"/>
+          </a:fontRef>
+        </p:style>
+        <p:txBody>
+          <a:bodyPr rtlCol="0" anchor="ctr"/>
+          <a:lstStyle/>
+          <a:p>
+            <a:pPr algn="ctr"/>
+          </a:p>
+        </p:txBody>
+      </p:sp>
+      <p:sp>
+        <p:nvSpPr>
+          <p:cNvPr id="4" name="TextBox 3"/>
+          <p:cNvSpPr txBox="1"/>
+          <p:nvPr/>
+        </p:nvSpPr>
+        <p:spPr>
+          <a:xfrm>
+            <a:off x="868680" y="1783080"/>
+            <a:ext cx="4846320" cy="4114800"/>
+          </a:xfrm>
+          <a:prstGeom prst="rect">
+            <a:avLst/>
+          </a:prstGeom>
+          <a:noFill/>
+        </p:spPr>
+        <p:txBody>
+          <a:bodyPr wrap="square">
+            <a:spAutoFit/>
+          </a:bodyPr>
+          <a:lstStyle/>
+          <a:p>
+            <a:pPr algn="l">
+              <a:defRPr sz="1500" b="1">
+                <a:solidFill>
+                  <a:srgbClr val="1F4E79"/>
+                </a:solidFill>
+                <a:latin typeface="Times New Roman"/>
+              </a:defRPr>
+            </a:pPr>
+            <a:r>
+              <a:t>Benchmark Dataset &amp; Preprocessing Pipeline</a:t>
+            </a:r>
+          </a:p>
+          <a:p>
+            <a:pPr algn="l">
+              <a:defRPr sz="1150" b="0">
+                <a:solidFill>
+                  <a:srgbClr val="202020"/>
+                </a:solidFill>
+                <a:latin typeface="Times New Roman"/>
+              </a:defRPr>
+            </a:pPr>
+            <a:r>
+              <a:t>• Dataset Source: 15,000 locally generated synthetic transactions mimicking mobile money transfer semantics (not an official PaySim release or real banking data).</a:t>
+            </a:r>
+          </a:p>
+          <a:p>
+            <a:pPr algn="l">
+              <a:defRPr sz="1150" b="1">
+                <a:solidFill>
+                  <a:srgbClr val="059669"/>
+                </a:solidFill>
+                <a:latin typeface="Times New Roman"/>
+              </a:defRPr>
+            </a:pPr>
+            <a:r>
+              <a:t>• Fraud Prevalence: Exactly 225 fraud cases out of 15,000 transactions (1.50% prevalence; 225/15,000).</a:t>
+            </a:r>
+          </a:p>
+          <a:p>
+            <a:pPr algn="l">
+              <a:defRPr sz="1150" b="0">
+                <a:solidFill>
+                  <a:srgbClr val="202020"/>
+                </a:solidFill>
+                <a:latin typeface="Times New Roman"/>
+              </a:defRPr>
+            </a:pPr>
+            <a:r>
+              <a:t>• Input Schema: 9 attributes including transaction step, transfer type (TRANSFER, CASH_OUT, PAYMENT, DEBIT, CASH_IN), amount, and balances.</a:t>
+            </a:r>
+          </a:p>
+          <a:p>
+            <a:pPr algn="l">
+              <a:defRPr sz="1200" b="1">
+                <a:solidFill>
+                  <a:srgbClr val="202020"/>
+                </a:solidFill>
+                <a:latin typeface="Times New Roman"/>
+              </a:defRPr>
+            </a:pPr>
+            <a:r>
+              <a:t>• Domain Balance Forensics:</a:t>
+            </a:r>
+          </a:p>
+          <a:p>
+            <a:pPr algn="l">
+              <a:defRPr sz="1100" b="0">
+                <a:solidFill>
+                  <a:srgbClr val="202020"/>
+                </a:solidFill>
+                <a:latin typeface="Times New Roman"/>
+              </a:defRPr>
+            </a:pPr>
+            <a:r>
+              <a:t>  - Origin balance discrepancy: deltaOrig = newbalanceOrig + amount - oldbalanceOrg</a:t>
+            </a:r>
+          </a:p>
+          <a:p>
+            <a:pPr algn="l">
+              <a:defRPr sz="1100" b="0">
+                <a:solidFill>
+                  <a:srgbClr val="202020"/>
+                </a:solidFill>
+                <a:latin typeface="Times New Roman"/>
+              </a:defRPr>
+            </a:pPr>
+            <a:r>
+              <a:t>  - Destination balance discrepancy: deltaDest = oldbalanceDest + amount - newbalanceDest</a:t>
+            </a:r>
+          </a:p>
+          <a:p>
+            <a:pPr algn="l">
+              <a:defRPr sz="1100" b="0">
+                <a:solidFill>
+                  <a:srgbClr val="202020"/>
+                </a:solidFill>
+                <a:latin typeface="Times New Roman"/>
+              </a:defRPr>
+            </a:pPr>
+            <a:r>
+              <a:t>  - Depletion indicator (origDepleted: sender account fully emptied) and destination surge factor.</a:t>
+            </a:r>
+          </a:p>
+        </p:txBody>
+      </p:sp>
+      <p:sp>
+        <p:nvSpPr>
+          <p:cNvPr id="5" name="Rounded Rectangle 4"/>
+          <p:cNvSpPr/>
+          <p:nvPr/>
+        </p:nvSpPr>
+        <p:spPr>
+          <a:xfrm>
+            <a:off x="6217920" y="1645920"/>
+            <a:ext cx="5120640" cy="4389120"/>
+          </a:xfrm>
+          <a:prstGeom prst="roundRect">
+            <a:avLst/>
+          </a:prstGeom>
+          <a:solidFill>
+            <a:srgbClr val="F4F7FA"/>
+          </a:solidFill>
+          <a:ln w="12700">
+            <a:solidFill>
+              <a:srgbClr val="CBD5E0"/>
+            </a:solidFill>
+          </a:ln>
+        </p:spPr>
+        <p:style>
+          <a:lnRef idx="1">
+            <a:schemeClr val="accent1"/>
+          </a:lnRef>
+          <a:fillRef idx="3">
+            <a:schemeClr val="accent1"/>
+          </a:fillRef>
+          <a:effectRef idx="2">
+            <a:schemeClr val="accent1"/>
+          </a:effectRef>
+          <a:fontRef idx="minor">
+            <a:schemeClr val="lt1"/>
+          </a:fontRef>
+        </p:style>
+        <p:txBody>
+          <a:bodyPr rtlCol="0" anchor="ctr"/>
+          <a:lstStyle/>
+          <a:p>
+            <a:pPr algn="ctr"/>
+          </a:p>
+        </p:txBody>
+      </p:sp>
+      <p:sp>
+        <p:nvSpPr>
+          <p:cNvPr id="6" name="TextBox 5"/>
+          <p:cNvSpPr txBox="1"/>
+          <p:nvPr/>
+        </p:nvSpPr>
+        <p:spPr>
+          <a:xfrm>
+            <a:off x="6355080" y="1783080"/>
+            <a:ext cx="4846320" cy="4114800"/>
+          </a:xfrm>
+          <a:prstGeom prst="rect">
+            <a:avLst/>
+          </a:prstGeom>
+          <a:noFill/>
+        </p:spPr>
+        <p:txBody>
+          <a:bodyPr wrap="square">
+            <a:spAutoFit/>
+          </a:bodyPr>
+          <a:lstStyle/>
+          <a:p>
+            <a:pPr algn="l">
+              <a:defRPr sz="1500" b="1">
+                <a:solidFill>
+                  <a:srgbClr val="1F4E79"/>
+                </a:solidFill>
+                <a:latin typeface="Times New Roman"/>
+              </a:defRPr>
+            </a:pPr>
+            <a:r>
+              <a:t>Experimental Partitions &amp; Leakage Prevention</a:t>
+            </a:r>
+          </a:p>
+          <a:p>
+            <a:pPr algn="l">
+              <a:defRPr sz="1200" b="1">
+                <a:solidFill>
+                  <a:srgbClr val="202020"/>
+                </a:solidFill>
+                <a:latin typeface="Times New Roman"/>
+              </a:defRPr>
+            </a:pPr>
+            <a:r>
+              <a:t>• Strict Stratified Partitions (60 / 20 / 20 Split):</a:t>
+            </a:r>
+          </a:p>
+          <a:p>
+            <a:pPr algn="l">
+              <a:defRPr sz="1100" b="0">
+                <a:solidFill>
+                  <a:srgbClr val="202020"/>
+                </a:solidFill>
+                <a:latin typeface="Times New Roman"/>
+              </a:defRPr>
+            </a:pPr>
+            <a:r>
+              <a:t>  - Training Set (60%): 9,000 transactions (135 fraud, 8,865 legitimate).</a:t>
+            </a:r>
+          </a:p>
+          <a:p>
+            <a:pPr algn="l">
+              <a:defRPr sz="1100" b="0">
+                <a:solidFill>
+                  <a:srgbClr val="202020"/>
+                </a:solidFill>
+                <a:latin typeface="Times New Roman"/>
+              </a:defRPr>
+            </a:pPr>
+            <a:r>
+              <a:t>  - Validation Set (20%): 3,000 transactions (45 fraud, 2,955 legitimate).</a:t>
+            </a:r>
+          </a:p>
+          <a:p>
+            <a:pPr algn="l">
+              <a:defRPr sz="1100" b="0">
+                <a:solidFill>
+                  <a:srgbClr val="202020"/>
+                </a:solidFill>
+                <a:latin typeface="Times New Roman"/>
+              </a:defRPr>
+            </a:pPr>
+            <a:r>
+              <a:t>  - Holdout Test Set (20%): 3,000 transactions (45 fraud, 2,955 legitimate).</a:t>
+            </a:r>
+          </a:p>
+          <a:p>
+            <a:pPr algn="l">
+              <a:defRPr sz="600" b="0">
+                <a:solidFill>
+                  <a:srgbClr val="202020"/>
+                </a:solidFill>
+                <a:latin typeface="Times New Roman"/>
+              </a:defRPr>
+            </a:pPr>
+          </a:p>
+          <a:p>
+            <a:pPr algn="l">
+              <a:defRPr sz="1200" b="1">
+                <a:solidFill>
+                  <a:srgbClr val="202020"/>
+                </a:solidFill>
+                <a:latin typeface="Times New Roman"/>
+              </a:defRPr>
+            </a:pPr>
+            <a:r>
+              <a:t>• Leakage-Free Isolation:</a:t>
+            </a:r>
+          </a:p>
+          <a:p>
+            <a:pPr algn="l">
+              <a:defRPr sz="1100" b="0">
+                <a:solidFill>
+                  <a:srgbClr val="202020"/>
+                </a:solidFill>
+                <a:latin typeface="Times New Roman"/>
+              </a:defRPr>
+            </a:pPr>
+            <a:r>
+              <a:t>  - Quantile RobustScaler parameters and median imputers are fit strictly on the 60% training set.</a:t>
+            </a:r>
+          </a:p>
+          <a:p>
+            <a:pPr algn="l">
+              <a:defRPr sz="1100" b="0">
+                <a:solidFill>
+                  <a:srgbClr val="202020"/>
+                </a:solidFill>
+                <a:latin typeface="Times New Roman"/>
+              </a:defRPr>
+            </a:pPr>
+            <a:r>
+              <a:t>  - SMOTE-NC synthetic oversampling is restricted strictly to the training partition.</a:t>
+            </a:r>
+          </a:p>
+          <a:p>
+            <a:pPr algn="l">
+              <a:defRPr sz="1100" b="0">
+                <a:solidFill>
+                  <a:srgbClr val="202020"/>
+                </a:solidFill>
+                <a:latin typeface="Times New Roman"/>
+              </a:defRPr>
+            </a:pPr>
+            <a:r>
+              <a:t>  - Validation and test sets remain completely untouched during all data engineering.</a:t>
+            </a:r>
+          </a:p>
+          <a:p>
+            <a:pPr algn="l">
+              <a:defRPr sz="600" b="0">
+                <a:solidFill>
+                  <a:srgbClr val="202020"/>
+                </a:solidFill>
+                <a:latin typeface="Times New Roman"/>
+              </a:defRPr>
+            </a:pPr>
+          </a:p>
+          <a:p>
+            <a:pPr algn="l">
+              <a:defRPr sz="1100" b="1">
+                <a:solidFill>
+                  <a:srgbClr val="059669"/>
+                </a:solidFill>
+                <a:latin typeface="Times New Roman"/>
+              </a:defRPr>
+            </a:pPr>
+            <a:r>
+              <a:t>• Validation-Based Threshold Selection: Model operating thresholds tau* are selected on the validation partition to optimize F1-score; final metrics are evaluated once on untouched holdout test data.</a:t>
+            </a:r>
+          </a:p>
+        </p:txBody>
+      </p:sp>
+    </p:spTree>
+  </p:cSld>
+  <p:clrMapOvr>
+    <a:masterClrMapping/>
+  </p:clrMapOvr>
+</p:sld>
+</file>
+
+<file path=ppt/slides/slide16.xml><?xml version="1.0" encoding="utf-8"?>
+<p:sld xmlns:a="http://schemas.openxmlformats.org/drawingml/2006/main" xmlns:p="http://schemas.openxmlformats.org/presentationml/2006/main" xmlns:r="http://schemas.openxmlformats.org/officeDocument/2006/relationships">
+  <p:cSld>
+    <p:spTree>
+      <p:nvGrpSpPr>
+        <p:cNvPr id="1" name=""/>
+        <p:cNvGrpSpPr/>
+        <p:nvPr/>
+      </p:nvGrpSpPr>
+      <p:grpSpPr/>
+      <p:sp>
+        <p:nvSpPr>
+          <p:cNvPr id="2" name="Title 1"/>
+          <p:cNvSpPr>
+            <a:spLocks noGrp="1"/>
+          </p:cNvSpPr>
+          <p:nvPr>
+            <p:ph type="title"/>
+          </p:nvPr>
+        </p:nvSpPr>
+        <p:spPr/>
+        <p:txBody>
+          <a:bodyPr/>
+          <a:lstStyle/>
+          <a:p>
+            <a:pPr>
+              <a:defRPr sz="2400" b="1">
+                <a:solidFill>
+                  <a:srgbClr val="1F4E79"/>
+                </a:solidFill>
+                <a:latin typeface="Times New Roman"/>
+              </a:defRPr>
+            </a:pPr>
+            <a:r>
+              <a:t>Additional Offline Weighted-Fusion &amp; Cost Analysis Experiment</a:t>
+            </a:r>
+          </a:p>
+        </p:txBody>
+      </p:sp>
+      <p:sp>
+        <p:nvSpPr>
+          <p:cNvPr id="3" name="Rounded Rectangle 2"/>
+          <p:cNvSpPr/>
+          <p:nvPr/>
+        </p:nvSpPr>
+        <p:spPr>
+          <a:xfrm>
+            <a:off x="731520" y="1645920"/>
+            <a:ext cx="5120640" cy="4389120"/>
+          </a:xfrm>
+          <a:prstGeom prst="roundRect">
+            <a:avLst/>
+          </a:prstGeom>
+          <a:solidFill>
+            <a:srgbClr val="F4F7FA"/>
+          </a:solidFill>
+          <a:ln w="12700">
+            <a:solidFill>
+              <a:srgbClr val="CBD5E0"/>
+            </a:solidFill>
+          </a:ln>
+        </p:spPr>
+        <p:style>
+          <a:lnRef idx="1">
+            <a:schemeClr val="accent1"/>
+          </a:lnRef>
+          <a:fillRef idx="3">
+            <a:schemeClr val="accent1"/>
+          </a:fillRef>
+          <a:effectRef idx="2">
+            <a:schemeClr val="accent1"/>
+          </a:effectRef>
+          <a:fontRef idx="minor">
+            <a:schemeClr val="lt1"/>
+          </a:fontRef>
+        </p:style>
+        <p:txBody>
+          <a:bodyPr rtlCol="0" anchor="ctr"/>
+          <a:lstStyle/>
+          <a:p>
+            <a:pPr algn="ctr"/>
+          </a:p>
+        </p:txBody>
+      </p:sp>
+      <p:sp>
+        <p:nvSpPr>
+          <p:cNvPr id="4" name="TextBox 3"/>
+          <p:cNvSpPr txBox="1"/>
+          <p:nvPr/>
+        </p:nvSpPr>
+        <p:spPr>
+          <a:xfrm>
+            <a:off x="868680" y="1783080"/>
+            <a:ext cx="4846320" cy="4114800"/>
+          </a:xfrm>
+          <a:prstGeom prst="rect">
+            <a:avLst/>
+          </a:prstGeom>
+          <a:noFill/>
+        </p:spPr>
+        <p:txBody>
+          <a:bodyPr wrap="square">
+            <a:spAutoFit/>
+          </a:bodyPr>
+          <a:lstStyle/>
+          <a:p>
+            <a:pPr algn="l">
+              <a:defRPr sz="1500" b="1">
+                <a:solidFill>
+                  <a:srgbClr val="1F4E79"/>
+                </a:solidFill>
+                <a:latin typeface="Times New Roman"/>
+              </a:defRPr>
+            </a:pPr>
+            <a:r>
+              <a:t>Offline Weighted-Fusion Formulation &amp; Results</a:t>
+            </a:r>
+          </a:p>
+          <a:p>
+            <a:pPr algn="l">
+              <a:defRPr sz="1150" b="0">
+                <a:solidFill>
+                  <a:srgbClr val="202020"/>
+                </a:solidFill>
+                <a:latin typeface="Times New Roman"/>
+              </a:defRPr>
+            </a:pPr>
+            <a:r>
+              <a:t>• Distinct Experimental Scope: This is an additional offline research experiment evaluated on the 3,000-transaction holdout, distinct from the dashboard's individual-model review rule.</a:t>
+            </a:r>
+          </a:p>
+          <a:p>
+            <a:pPr algn="l">
+              <a:defRPr sz="1150" b="0">
+                <a:solidFill>
+                  <a:srgbClr val="202020"/>
+                </a:solidFill>
+                <a:latin typeface="Times New Roman"/>
+              </a:defRPr>
+            </a:pPr>
+            <a:r>
+              <a:t>• Fusion Formulation: Combines normalized model scores using fixed empirical weights:</a:t>
+            </a:r>
+          </a:p>
+          <a:p>
+            <a:pPr algn="l">
+              <a:defRPr sz="1150" b="1">
+                <a:solidFill>
+                  <a:srgbClr val="2E75B6"/>
+                </a:solidFill>
+                <a:latin typeface="Times New Roman"/>
+              </a:defRPr>
+            </a:pPr>
+            <a:r>
+              <a:t>  S_fusion(x) = 0.25*S_RF + 0.35*S_XGB + 0.20*S_DNN + 0.20*S_AE</a:t>
+            </a:r>
+          </a:p>
+          <a:p>
+            <a:pPr algn="l">
+              <a:defRPr sz="1100" b="0">
+                <a:solidFill>
+                  <a:srgbClr val="202020"/>
+                </a:solidFill>
+                <a:latin typeface="Times New Roman"/>
+              </a:defRPr>
+            </a:pPr>
+            <a:r>
+              <a:t>  Evaluated against validation-selected composite threshold tau* = 0.7916.</a:t>
+            </a:r>
+          </a:p>
+          <a:p>
+            <a:pPr algn="l">
+              <a:defRPr sz="600" b="0">
+                <a:solidFill>
+                  <a:srgbClr val="202020"/>
+                </a:solidFill>
+                <a:latin typeface="Times New Roman"/>
+              </a:defRPr>
+            </a:pPr>
+          </a:p>
+          <a:p>
+            <a:pPr algn="l">
+              <a:defRPr sz="1200" b="1">
+                <a:solidFill>
+                  <a:srgbClr val="059669"/>
+                </a:solidFill>
+                <a:latin typeface="Times New Roman"/>
+              </a:defRPr>
+            </a:pPr>
+            <a:r>
+              <a:t>• Performance Trade-Off:</a:t>
+            </a:r>
+          </a:p>
+          <a:p>
+            <a:pPr algn="l">
+              <a:defRPr sz="1100" b="1">
+                <a:solidFill>
+                  <a:srgbClr val="202020"/>
+                </a:solidFill>
+                <a:latin typeface="Times New Roman"/>
+              </a:defRPr>
+            </a:pPr>
+            <a:r>
+              <a:t>  'In the offline weighted-fusion experiment, false positives decreased from 9 to 4 compared with Random Forest (a 55.6% reduction), while true positives decreased from 42 to 40.'</a:t>
+            </a:r>
+          </a:p>
+          <a:p>
+            <a:pPr algn="l">
+              <a:defRPr sz="600" b="0">
+                <a:solidFill>
+                  <a:srgbClr val="202020"/>
+                </a:solidFill>
+                <a:latin typeface="Times New Roman"/>
+              </a:defRPr>
+            </a:pPr>
+          </a:p>
+          <a:p>
+            <a:pPr algn="l">
+              <a:defRPr sz="1100" b="0">
+                <a:solidFill>
+                  <a:srgbClr val="202020"/>
+                </a:solidFill>
+                <a:latin typeface="Times New Roman"/>
+              </a:defRPr>
+            </a:pPr>
+            <a:r>
+              <a:t>• Holdout Test Metrics: Precision: 0.9091 | Recall: 0.8889 | F1-Score: 0.8989 | ROC-AUC: 0.9985 | PR-AUC: 0.9555.</a:t>
+            </a:r>
+          </a:p>
+        </p:txBody>
+      </p:sp>
+      <p:sp>
+        <p:nvSpPr>
+          <p:cNvPr id="5" name="Rounded Rectangle 4"/>
+          <p:cNvSpPr/>
+          <p:nvPr/>
+        </p:nvSpPr>
+        <p:spPr>
+          <a:xfrm>
+            <a:off x="6217920" y="1645920"/>
+            <a:ext cx="5120640" cy="4389120"/>
+          </a:xfrm>
+          <a:prstGeom prst="roundRect">
+            <a:avLst/>
+          </a:prstGeom>
+          <a:solidFill>
+            <a:srgbClr val="F4F7FA"/>
+          </a:solidFill>
+          <a:ln w="12700">
+            <a:solidFill>
+              <a:srgbClr val="CBD5E0"/>
+            </a:solidFill>
+          </a:ln>
+        </p:spPr>
+        <p:style>
+          <a:lnRef idx="1">
+            <a:schemeClr val="accent1"/>
+          </a:lnRef>
+          <a:fillRef idx="3">
+            <a:schemeClr val="accent1"/>
+          </a:fillRef>
+          <a:effectRef idx="2">
+            <a:schemeClr val="accent1"/>
+          </a:effectRef>
+          <a:fontRef idx="minor">
+            <a:schemeClr val="lt1"/>
+          </a:fontRef>
+        </p:style>
+        <p:txBody>
+          <a:bodyPr rtlCol="0" anchor="ctr"/>
+          <a:lstStyle/>
+          <a:p>
+            <a:pPr algn="ctr"/>
+          </a:p>
+        </p:txBody>
+      </p:sp>
+      <p:sp>
+        <p:nvSpPr>
+          <p:cNvPr id="6" name="TextBox 5"/>
+          <p:cNvSpPr txBox="1"/>
+          <p:nvPr/>
+        </p:nvSpPr>
+        <p:spPr>
+          <a:xfrm>
+            <a:off x="6355080" y="1783080"/>
+            <a:ext cx="4846320" cy="4114800"/>
+          </a:xfrm>
+          <a:prstGeom prst="rect">
+            <a:avLst/>
+          </a:prstGeom>
+          <a:noFill/>
+        </p:spPr>
+        <p:txBody>
+          <a:bodyPr wrap="square">
+            <a:spAutoFit/>
+          </a:bodyPr>
+          <a:lstStyle/>
+          <a:p>
+            <a:pPr algn="l">
+              <a:defRPr sz="1500" b="1">
+                <a:solidFill>
+                  <a:srgbClr val="1F4E79"/>
+                </a:solidFill>
+                <a:latin typeface="Times New Roman"/>
+              </a:defRPr>
+            </a:pPr>
+            <a:r>
+              <a:t>Financial Cost-Benefit Scenario Modeling</a:t>
+            </a:r>
+          </a:p>
+          <a:p>
+            <a:pPr algn="l">
+              <a:defRPr sz="1200" b="1">
+                <a:solidFill>
+                  <a:srgbClr val="202020"/>
+                </a:solidFill>
+                <a:latin typeface="Times New Roman"/>
+              </a:defRPr>
+            </a:pPr>
+            <a:r>
+              <a:t>• Asymmetric Cost Framework:</a:t>
+            </a:r>
+          </a:p>
+          <a:p>
+            <a:pPr algn="l">
+              <a:defRPr sz="1100" b="0">
+                <a:solidFill>
+                  <a:srgbClr val="202020"/>
+                </a:solidFill>
+                <a:latin typeface="Times New Roman"/>
+              </a:defRPr>
+            </a:pPr>
+            <a:r>
+              <a:t>  - Missed Fraud Cost (C_FN) = $2,500 (direct financial loss + chargeback penalty).</a:t>
+            </a:r>
+          </a:p>
+          <a:p>
+            <a:pPr algn="l">
+              <a:defRPr sz="1100" b="0">
+                <a:solidFill>
+                  <a:srgbClr val="202020"/>
+                </a:solidFill>
+                <a:latin typeface="Times New Roman"/>
+              </a:defRPr>
+            </a:pPr>
+            <a:r>
+              <a:t>  - False Alarm Investigation Cost (C_FP) = $35 (compliance analyst triage overhead).</a:t>
+            </a:r>
+          </a:p>
+          <a:p>
+            <a:pPr algn="l">
+              <a:defRPr sz="1100" b="0">
+                <a:solidFill>
+                  <a:srgbClr val="202020"/>
+                </a:solidFill>
+                <a:latin typeface="Times New Roman"/>
+              </a:defRPr>
+            </a:pPr>
+            <a:r>
+              <a:t>  - True Positive Triage Cost (C_TP) = $10 (verification workflow cost).</a:t>
+            </a:r>
+          </a:p>
+          <a:p>
+            <a:pPr algn="l">
+              <a:defRPr sz="600" b="0">
+                <a:solidFill>
+                  <a:srgbClr val="202020"/>
+                </a:solidFill>
+                <a:latin typeface="Times New Roman"/>
+              </a:defRPr>
+            </a:pPr>
+          </a:p>
+          <a:p>
+            <a:pPr algn="l">
+              <a:defRPr sz="1200" b="1">
+                <a:solidFill>
+                  <a:srgbClr val="202020"/>
+                </a:solidFill>
+                <a:latin typeface="Times New Roman"/>
+              </a:defRPr>
+            </a:pPr>
+            <a:r>
+              <a:t>• Loss Comparison Across Scenarios:</a:t>
+            </a:r>
+          </a:p>
+          <a:p>
+            <a:pPr algn="l">
+              <a:defRPr sz="1100" b="0">
+                <a:solidFill>
+                  <a:srgbClr val="202020"/>
+                </a:solidFill>
+                <a:latin typeface="Times New Roman"/>
+              </a:defRPr>
+            </a:pPr>
+            <a:r>
+              <a:t>  - Baseline Loss (Unmonitored System): $112,500 across 45 fraud incidents (45 * $2,500).</a:t>
+            </a:r>
+          </a:p>
+          <a:p>
+            <a:pPr algn="l">
+              <a:defRPr sz="1100" b="0">
+                <a:solidFill>
+                  <a:srgbClr val="202020"/>
+                </a:solidFill>
+                <a:latin typeface="Times New Roman"/>
+              </a:defRPr>
+            </a:pPr>
+            <a:r>
+              <a:t>  - Weighted-Fusion Operational Loss: $13,040 ($12,500 FN + $140 FP + $400 TP).</a:t>
+            </a:r>
+          </a:p>
+          <a:p>
+            <a:pPr algn="l">
+              <a:defRPr sz="600" b="0">
+                <a:solidFill>
+                  <a:srgbClr val="202020"/>
+                </a:solidFill>
+                <a:latin typeface="Times New Roman"/>
+              </a:defRPr>
+            </a:pPr>
+          </a:p>
+          <a:p>
+            <a:pPr algn="l">
+              <a:defRPr sz="1100" b="1">
+                <a:solidFill>
+                  <a:srgbClr val="059669"/>
+                </a:solidFill>
+                <a:latin typeface="Times New Roman"/>
+              </a:defRPr>
+            </a:pPr>
+            <a:r>
+              <a:t>• Simulated Financial Outcome: '88.4% simulated loss reduction under assumed costs' (+$99,460 simulated savings; scenario calculation, not measured bank savings).</a:t>
+            </a:r>
+          </a:p>
+        </p:txBody>
+      </p:sp>
+    </p:spTree>
+  </p:cSld>
+  <p:clrMapOvr>
+    <a:masterClrMapping/>
+  </p:clrMapOvr>
+</p:sld>
+</file>
+
+<file path=ppt/slides/slide17.xml><?xml version="1.0" encoding="utf-8"?>
+<p:sld xmlns:a="http://schemas.openxmlformats.org/drawingml/2006/main" xmlns:p="http://schemas.openxmlformats.org/presentationml/2006/main" xmlns:r="http://schemas.openxmlformats.org/officeDocument/2006/relationships">
+  <p:cSld>
+    <p:spTree>
+      <p:nvGrpSpPr>
+        <p:cNvPr id="1" name=""/>
+        <p:cNvGrpSpPr/>
+        <p:nvPr/>
+      </p:nvGrpSpPr>
+      <p:grpSpPr/>
+      <p:sp>
+        <p:nvSpPr>
+          <p:cNvPr id="2" name="Title 1"/>
+          <p:cNvSpPr>
+            <a:spLocks noGrp="1"/>
+          </p:cNvSpPr>
+          <p:nvPr>
+            <p:ph type="title"/>
+          </p:nvPr>
+        </p:nvSpPr>
+        <p:spPr/>
+        <p:txBody>
+          <a:bodyPr/>
+          <a:lstStyle/>
+          <a:p>
+            <a:pPr>
+              <a:defRPr sz="2400" b="1">
+                <a:solidFill>
+                  <a:srgbClr val="1F4E79"/>
+                </a:solidFill>
+                <a:latin typeface="Times New Roman"/>
+              </a:defRPr>
+            </a:pPr>
+            <a:r>
+              <a:t>Cross-Generator Distribution Shift &amp; Robustness</a:t>
+            </a:r>
+          </a:p>
+        </p:txBody>
+      </p:sp>
+      <p:graphicFrame>
+        <p:nvGraphicFramePr>
+          <p:cNvPr id="3" name="Table 2"/>
+          <p:cNvGraphicFramePr>
+            <a:graphicFrameLocks noGrp="1"/>
+          </p:cNvGraphicFramePr>
+          <p:nvPr/>
+        </p:nvGraphicFramePr>
+        <p:xfrm>
+          <a:off x="731520" y="1554480"/>
+          <a:ext cx="10698480" cy="2011680"/>
+        </p:xfrm>
+        <a:graphic>
+          <a:graphicData uri="http://schemas.openxmlformats.org/drawingml/2006/table">
+            <a:tbl>
+              <a:tblPr firstRow="1" bandRow="1">
+                <a:tableStyleId>{5C22544A-7EE6-4342-B048-85BDC9FD1C3A}</a:tableStyleId>
+              </a:tblPr>
+              <a:tblGrid>
+                <a:gridCol w="2286000"/>
+                <a:gridCol w="1645920"/>
+                <a:gridCol w="1645920"/>
+                <a:gridCol w="1645920"/>
+                <a:gridCol w="1645920"/>
+                <a:gridCol w="1828800"/>
+              </a:tblGrid>
+              <a:tr h="402336">
+                <a:tc>
+                  <a:txBody>
+                    <a:bodyPr/>
+                    <a:lstStyle/>
+                    <a:p>
+                      <a:pPr algn="ctr">
+                        <a:defRPr sz="1000" b="1">
+                          <a:solidFill>
+                            <a:srgbClr val="FFFFFF"/>
+                          </a:solidFill>
+                          <a:latin typeface="Times New Roman"/>
+                        </a:defRPr>
+                      </a:pPr>
+                      <a:r>
+                        <a:t>Model Architecture</a:t>
+                      </a:r>
+                    </a:p>
+                  </a:txBody>
+                  <a:tcPr>
+                    <a:solidFill>
+                      <a:srgbClr val="1F4E79"/>
+                    </a:solidFill>
+                  </a:tcPr>
+                </a:tc>
+                <a:tc>
+                  <a:txBody>
+                    <a:bodyPr/>
+                    <a:lstStyle/>
+                    <a:p>
+                      <a:pPr algn="ctr">
+                        <a:defRPr sz="1000" b="1">
+                          <a:solidFill>
+                            <a:srgbClr val="FFFFFF"/>
+                          </a:solidFill>
+                          <a:latin typeface="Times New Roman"/>
+                        </a:defRPr>
+                      </a:pPr>
+                      <a:r>
+                        <a:t>Test Recall</a:t>
+                      </a:r>
+                    </a:p>
+                  </a:txBody>
+                  <a:tcPr>
+                    <a:solidFill>
+                      <a:srgbClr val="1F4E79"/>
+                    </a:solidFill>
+                  </a:tcPr>
+                </a:tc>
+                <a:tc>
+                  <a:txBody>
+                    <a:bodyPr/>
+                    <a:lstStyle/>
+                    <a:p>
+                      <a:pPr algn="ctr">
+                        <a:defRPr sz="1000" b="1">
+                          <a:solidFill>
+                            <a:srgbClr val="FFFFFF"/>
+                          </a:solidFill>
+                          <a:latin typeface="Times New Roman"/>
+                        </a:defRPr>
+                      </a:pPr>
+                      <a:r>
+                        <a:t>True Positives (TP)</a:t>
+                      </a:r>
+                    </a:p>
+                  </a:txBody>
+                  <a:tcPr>
+                    <a:solidFill>
+                      <a:srgbClr val="1F4E79"/>
+                    </a:solidFill>
+                  </a:tcPr>
+                </a:tc>
+                <a:tc>
+                  <a:txBody>
+                    <a:bodyPr/>
+                    <a:lstStyle/>
+                    <a:p>
+                      <a:pPr algn="ctr">
+                        <a:defRPr sz="1000" b="1">
+                          <a:solidFill>
+                            <a:srgbClr val="FFFFFF"/>
+                          </a:solidFill>
+                          <a:latin typeface="Times New Roman"/>
+                        </a:defRPr>
+                      </a:pPr>
+                      <a:r>
+                        <a:t>False Positives (FP)</a:t>
+                      </a:r>
+                    </a:p>
+                  </a:txBody>
+                  <a:tcPr>
+                    <a:solidFill>
+                      <a:srgbClr val="1F4E79"/>
+                    </a:solidFill>
+                  </a:tcPr>
+                </a:tc>
+                <a:tc>
+                  <a:txBody>
+                    <a:bodyPr/>
+                    <a:lstStyle/>
+                    <a:p>
+                      <a:pPr algn="ctr">
+                        <a:defRPr sz="1000" b="1">
+                          <a:solidFill>
+                            <a:srgbClr val="FFFFFF"/>
+                          </a:solidFill>
+                          <a:latin typeface="Times New Roman"/>
+                        </a:defRPr>
+                      </a:pPr>
+                      <a:r>
+                        <a:t>False Negatives (FN)</a:t>
+                      </a:r>
+                    </a:p>
+                  </a:txBody>
+                  <a:tcPr>
+                    <a:solidFill>
+                      <a:srgbClr val="1F4E79"/>
+                    </a:solidFill>
+                  </a:tcPr>
+                </a:tc>
+                <a:tc>
+                  <a:txBody>
+                    <a:bodyPr/>
+                    <a:lstStyle/>
+                    <a:p>
+                      <a:pPr algn="ctr">
+                        <a:defRPr sz="1000" b="1">
+                          <a:solidFill>
+                            <a:srgbClr val="FFFFFF"/>
+                          </a:solidFill>
+                          <a:latin typeface="Times New Roman"/>
+                        </a:defRPr>
+                      </a:pPr>
+                      <a:r>
+                        <a:t>Operational Behavior</a:t>
+                      </a:r>
+                    </a:p>
+                  </a:txBody>
+                  <a:tcPr>
+                    <a:solidFill>
+                      <a:srgbClr val="1F4E79"/>
+                    </a:solidFill>
+                  </a:tcPr>
+                </a:tc>
+              </a:tr>
+              <a:tr h="402336">
                 <a:tc>
                   <a:txBody>
                     <a:bodyPr/>
@@ -4819,6 +8641,30 @@
                     <a:lstStyle/>
                     <a:p>
                       <a:pPr algn="ctr">
+                        <a:defRPr sz="950" b="1">
+                          <a:solidFill>
+                            <a:srgbClr val="C00000"/>
+                          </a:solidFill>
+                          <a:latin typeface="Times New Roman"/>
+                        </a:defRPr>
+                      </a:pPr>
+                      <a:r>
+                        <a:t>0.00% (0/15)</a:t>
+                      </a:r>
+                    </a:p>
+                  </a:txBody>
+                  <a:tcPr>
+                    <a:solidFill>
+                      <a:srgbClr val="FDEDEC"/>
+                    </a:solidFill>
+                  </a:tcPr>
+                </a:tc>
+                <a:tc>
+                  <a:txBody>
+                    <a:bodyPr/>
+                    <a:lstStyle/>
+                    <a:p>
+                      <a:pPr algn="ctr">
                         <a:defRPr sz="950" b="0">
                           <a:solidFill>
                             <a:srgbClr val="202020"/>
@@ -4827,7 +8673,31 @@
                         </a:defRPr>
                       </a:pPr>
                       <a:r>
-                        <a:t>99.60%</a:t>
+                        <a:t>0</a:t>
+                      </a:r>
+                    </a:p>
+                  </a:txBody>
+                  <a:tcPr>
+                    <a:solidFill>
+                      <a:srgbClr val="FFFFFF"/>
+                    </a:solidFill>
+                  </a:tcPr>
+                </a:tc>
+                <a:tc>
+                  <a:txBody>
+                    <a:bodyPr/>
+                    <a:lstStyle/>
+                    <a:p>
+                      <a:pPr algn="ctr">
+                        <a:defRPr sz="950" b="1">
+                          <a:solidFill>
+                            <a:srgbClr val="202020"/>
+                          </a:solidFill>
+                          <a:latin typeface="Times New Roman"/>
+                        </a:defRPr>
+                      </a:pPr>
+                      <a:r>
+                        <a:t>0</a:t>
                       </a:r>
                     </a:p>
                   </a:txBody>
@@ -4851,7 +8721,7 @@
                         </a:defRPr>
                       </a:pPr>
                       <a:r>
-                        <a:t>0.8235</a:t>
+                        <a:t>15</a:t>
                       </a:r>
                     </a:p>
                   </a:txBody>
@@ -4875,7 +8745,105 @@
                         </a:defRPr>
                       </a:pPr>
                       <a:r>
-                        <a:t>0.9333</a:t>
+                        <a:t>Total Recall Collapse</a:t>
+                      </a:r>
+                    </a:p>
+                  </a:txBody>
+                  <a:tcPr>
+                    <a:solidFill>
+                      <a:srgbClr val="FFFFFF"/>
+                    </a:solidFill>
+                  </a:tcPr>
+                </a:tc>
+              </a:tr>
+              <a:tr h="402336">
+                <a:tc>
+                  <a:txBody>
+                    <a:bodyPr/>
+                    <a:lstStyle/>
+                    <a:p>
+                      <a:pPr algn="l">
+                        <a:defRPr sz="950" b="0">
+                          <a:solidFill>
+                            <a:srgbClr val="202020"/>
+                          </a:solidFill>
+                          <a:latin typeface="Times New Roman"/>
+                        </a:defRPr>
+                      </a:pPr>
+                      <a:r>
+                        <a:t>XGBoost</a:t>
+                      </a:r>
+                    </a:p>
+                  </a:txBody>
+                  <a:tcPr>
+                    <a:solidFill>
+                      <a:srgbClr val="FFFFFF"/>
+                    </a:solidFill>
+                  </a:tcPr>
+                </a:tc>
+                <a:tc>
+                  <a:txBody>
+                    <a:bodyPr/>
+                    <a:lstStyle/>
+                    <a:p>
+                      <a:pPr algn="ctr">
+                        <a:defRPr sz="950" b="1">
+                          <a:solidFill>
+                            <a:srgbClr val="C00000"/>
+                          </a:solidFill>
+                          <a:latin typeface="Times New Roman"/>
+                        </a:defRPr>
+                      </a:pPr>
+                      <a:r>
+                        <a:t>0.00% (0/15)</a:t>
+                      </a:r>
+                    </a:p>
+                  </a:txBody>
+                  <a:tcPr>
+                    <a:solidFill>
+                      <a:srgbClr val="FDEDEC"/>
+                    </a:solidFill>
+                  </a:tcPr>
+                </a:tc>
+                <a:tc>
+                  <a:txBody>
+                    <a:bodyPr/>
+                    <a:lstStyle/>
+                    <a:p>
+                      <a:pPr algn="ctr">
+                        <a:defRPr sz="950" b="0">
+                          <a:solidFill>
+                            <a:srgbClr val="202020"/>
+                          </a:solidFill>
+                          <a:latin typeface="Times New Roman"/>
+                        </a:defRPr>
+                      </a:pPr>
+                      <a:r>
+                        <a:t>0</a:t>
+                      </a:r>
+                    </a:p>
+                  </a:txBody>
+                  <a:tcPr>
+                    <a:solidFill>
+                      <a:srgbClr val="FFFFFF"/>
+                    </a:solidFill>
+                  </a:tcPr>
+                </a:tc>
+                <a:tc>
+                  <a:txBody>
+                    <a:bodyPr/>
+                    <a:lstStyle/>
+                    <a:p>
+                      <a:pPr algn="ctr">
+                        <a:defRPr sz="950" b="1">
+                          <a:solidFill>
+                            <a:srgbClr val="202020"/>
+                          </a:solidFill>
+                          <a:latin typeface="Times New Roman"/>
+                        </a:defRPr>
+                      </a:pPr>
+                      <a:r>
+                        <a:t>0</a:t>
                       </a:r>
                     </a:p>
                   </a:txBody>
@@ -4899,7 +8867,7 @@
                         </a:defRPr>
                       </a:pPr>
                       <a:r>
-                        <a:t>0.8750</a:t>
+                        <a:t>15</a:t>
                       </a:r>
                     </a:p>
                   </a:txBody>
@@ -4923,103 +8891,7 @@
                         </a:defRPr>
                       </a:pPr>
                       <a:r>
-                        <a:t>0.9989</a:t>
-                      </a:r>
-                    </a:p>
-                  </a:txBody>
-                  <a:tcPr>
-                    <a:solidFill>
-                      <a:srgbClr val="FFFFFF"/>
-                    </a:solidFill>
-                  </a:tcPr>
-                </a:tc>
-                <a:tc>
-                  <a:txBody>
-                    <a:bodyPr/>
-                    <a:lstStyle/>
-                    <a:p>
-                      <a:pPr algn="ctr">
-                        <a:defRPr sz="950" b="0">
-                          <a:solidFill>
-                            <a:srgbClr val="202020"/>
-                          </a:solidFill>
-                          <a:latin typeface="Times New Roman"/>
-                        </a:defRPr>
-                      </a:pPr>
-                      <a:r>
-                        <a:t>0.9581</a:t>
-                      </a:r>
-                    </a:p>
-                  </a:txBody>
-                  <a:tcPr>
-                    <a:solidFill>
-                      <a:srgbClr val="FFFFFF"/>
-                    </a:solidFill>
-                  </a:tcPr>
-                </a:tc>
-                <a:tc>
-                  <a:txBody>
-                    <a:bodyPr/>
-                    <a:lstStyle/>
-                    <a:p>
-                      <a:pPr algn="ctr">
-                        <a:defRPr sz="950" b="0">
-                          <a:solidFill>
-                            <a:srgbClr val="202020"/>
-                          </a:solidFill>
-                          <a:latin typeface="Times New Roman"/>
-                        </a:defRPr>
-                      </a:pPr>
-                      <a:r>
-                        <a:t>42</a:t>
-                      </a:r>
-                    </a:p>
-                  </a:txBody>
-                  <a:tcPr>
-                    <a:solidFill>
-                      <a:srgbClr val="FFFFFF"/>
-                    </a:solidFill>
-                  </a:tcPr>
-                </a:tc>
-                <a:tc>
-                  <a:txBody>
-                    <a:bodyPr/>
-                    <a:lstStyle/>
-                    <a:p>
-                      <a:pPr algn="ctr">
-                        <a:defRPr sz="950" b="0">
-                          <a:solidFill>
-                            <a:srgbClr val="202020"/>
-                          </a:solidFill>
-                          <a:latin typeface="Times New Roman"/>
-                        </a:defRPr>
-                      </a:pPr>
-                      <a:r>
-                        <a:t>9</a:t>
-                      </a:r>
-                    </a:p>
-                  </a:txBody>
-                  <a:tcPr>
-                    <a:solidFill>
-                      <a:srgbClr val="FFFFFF"/>
-                    </a:solidFill>
-                  </a:tcPr>
-                </a:tc>
-                <a:tc>
-                  <a:txBody>
-                    <a:bodyPr/>
-                    <a:lstStyle/>
-                    <a:p>
-                      <a:pPr algn="ctr">
-                        <a:defRPr sz="950" b="0">
-                          <a:solidFill>
-                            <a:srgbClr val="202020"/>
-                          </a:solidFill>
-                          <a:latin typeface="Times New Roman"/>
-                        </a:defRPr>
-                      </a:pPr>
-                      <a:r>
-                        <a:t>3</a:t>
+                        <a:t>Total Recall Collapse</a:t>
                       </a:r>
                     </a:p>
                   </a:txBody>
@@ -5030,249 +8902,7 @@
                   </a:tcPr>
                 </a:tc>
               </a:tr>
-              <a:tr h="381000">
-                <a:tc>
-                  <a:txBody>
-                    <a:bodyPr/>
-                    <a:lstStyle/>
-                    <a:p>
-                      <a:pPr algn="l">
-                        <a:defRPr sz="950" b="0">
-                          <a:solidFill>
-                            <a:srgbClr val="202020"/>
-                          </a:solidFill>
-                          <a:latin typeface="Times New Roman"/>
-                        </a:defRPr>
-                      </a:pPr>
-                      <a:r>
-                        <a:t>XGBoost</a:t>
-                      </a:r>
-                    </a:p>
-                  </a:txBody>
-                  <a:tcPr>
-                    <a:solidFill>
-                      <a:srgbClr val="F4F7FA"/>
-                    </a:solidFill>
-                  </a:tcPr>
-                </a:tc>
-                <a:tc>
-                  <a:txBody>
-                    <a:bodyPr/>
-                    <a:lstStyle/>
-                    <a:p>
-                      <a:pPr algn="ctr">
-                        <a:defRPr sz="950" b="0">
-                          <a:solidFill>
-                            <a:srgbClr val="202020"/>
-                          </a:solidFill>
-                          <a:latin typeface="Times New Roman"/>
-                        </a:defRPr>
-                      </a:pPr>
-                      <a:r>
-                        <a:t>99.67%</a:t>
-                      </a:r>
-                    </a:p>
-                  </a:txBody>
-                  <a:tcPr>
-                    <a:solidFill>
-                      <a:srgbClr val="F4F7FA"/>
-                    </a:solidFill>
-                  </a:tcPr>
-                </a:tc>
-                <a:tc>
-                  <a:txBody>
-                    <a:bodyPr/>
-                    <a:lstStyle/>
-                    <a:p>
-                      <a:pPr algn="ctr">
-                        <a:defRPr sz="950" b="0">
-                          <a:solidFill>
-                            <a:srgbClr val="202020"/>
-                          </a:solidFill>
-                          <a:latin typeface="Times New Roman"/>
-                        </a:defRPr>
-                      </a:pPr>
-                      <a:r>
-                        <a:t>0.8889</a:t>
-                      </a:r>
-                    </a:p>
-                  </a:txBody>
-                  <a:tcPr>
-                    <a:solidFill>
-                      <a:srgbClr val="F4F7FA"/>
-                    </a:solidFill>
-                  </a:tcPr>
-                </a:tc>
-                <a:tc>
-                  <a:txBody>
-                    <a:bodyPr/>
-                    <a:lstStyle/>
-                    <a:p>
-                      <a:pPr algn="ctr">
-                        <a:defRPr sz="950" b="0">
-                          <a:solidFill>
-                            <a:srgbClr val="202020"/>
-                          </a:solidFill>
-                          <a:latin typeface="Times New Roman"/>
-                        </a:defRPr>
-                      </a:pPr>
-                      <a:r>
-                        <a:t>0.8889</a:t>
-                      </a:r>
-                    </a:p>
-                  </a:txBody>
-                  <a:tcPr>
-                    <a:solidFill>
-                      <a:srgbClr val="F4F7FA"/>
-                    </a:solidFill>
-                  </a:tcPr>
-                </a:tc>
-                <a:tc>
-                  <a:txBody>
-                    <a:bodyPr/>
-                    <a:lstStyle/>
-                    <a:p>
-                      <a:pPr algn="ctr">
-                        <a:defRPr sz="950" b="0">
-                          <a:solidFill>
-                            <a:srgbClr val="202020"/>
-                          </a:solidFill>
-                          <a:latin typeface="Times New Roman"/>
-                        </a:defRPr>
-                      </a:pPr>
-                      <a:r>
-                        <a:t>0.8889</a:t>
-                      </a:r>
-                    </a:p>
-                  </a:txBody>
-                  <a:tcPr>
-                    <a:solidFill>
-                      <a:srgbClr val="F4F7FA"/>
-                    </a:solidFill>
-                  </a:tcPr>
-                </a:tc>
-                <a:tc>
-                  <a:txBody>
-                    <a:bodyPr/>
-                    <a:lstStyle/>
-                    <a:p>
-                      <a:pPr algn="ctr">
-                        <a:defRPr sz="950" b="0">
-                          <a:solidFill>
-                            <a:srgbClr val="202020"/>
-                          </a:solidFill>
-                          <a:latin typeface="Times New Roman"/>
-                        </a:defRPr>
-                      </a:pPr>
-                      <a:r>
-                        <a:t>0.9968</a:t>
-                      </a:r>
-                    </a:p>
-                  </a:txBody>
-                  <a:tcPr>
-                    <a:solidFill>
-                      <a:srgbClr val="F4F7FA"/>
-                    </a:solidFill>
-                  </a:tcPr>
-                </a:tc>
-                <a:tc>
-                  <a:txBody>
-                    <a:bodyPr/>
-                    <a:lstStyle/>
-                    <a:p>
-                      <a:pPr algn="ctr">
-                        <a:defRPr sz="950" b="0">
-                          <a:solidFill>
-                            <a:srgbClr val="202020"/>
-                          </a:solidFill>
-                          <a:latin typeface="Times New Roman"/>
-                        </a:defRPr>
-                      </a:pPr>
-                      <a:r>
-                        <a:t>0.9418</a:t>
-                      </a:r>
-                    </a:p>
-                  </a:txBody>
-                  <a:tcPr>
-                    <a:solidFill>
-                      <a:srgbClr val="F4F7FA"/>
-                    </a:solidFill>
-                  </a:tcPr>
-                </a:tc>
-                <a:tc>
-                  <a:txBody>
-                    <a:bodyPr/>
-                    <a:lstStyle/>
-                    <a:p>
-                      <a:pPr algn="ctr">
-                        <a:defRPr sz="950" b="0">
-                          <a:solidFill>
-                            <a:srgbClr val="202020"/>
-                          </a:solidFill>
-                          <a:latin typeface="Times New Roman"/>
-                        </a:defRPr>
-                      </a:pPr>
-                      <a:r>
-                        <a:t>40</a:t>
-                      </a:r>
-                    </a:p>
-                  </a:txBody>
-                  <a:tcPr>
-                    <a:solidFill>
-                      <a:srgbClr val="F4F7FA"/>
-                    </a:solidFill>
-                  </a:tcPr>
-                </a:tc>
-                <a:tc>
-                  <a:txBody>
-                    <a:bodyPr/>
-                    <a:lstStyle/>
-                    <a:p>
-                      <a:pPr algn="ctr">
-                        <a:defRPr sz="950" b="0">
-                          <a:solidFill>
-                            <a:srgbClr val="202020"/>
-                          </a:solidFill>
-                          <a:latin typeface="Times New Roman"/>
-                        </a:defRPr>
-                      </a:pPr>
-                      <a:r>
-                        <a:t>5</a:t>
-                      </a:r>
-                    </a:p>
-                  </a:txBody>
-                  <a:tcPr>
-                    <a:solidFill>
-                      <a:srgbClr val="F4F7FA"/>
-                    </a:solidFill>
-                  </a:tcPr>
-                </a:tc>
-                <a:tc>
-                  <a:txBody>
-                    <a:bodyPr/>
-                    <a:lstStyle/>
-                    <a:p>
-                      <a:pPr algn="ctr">
-                        <a:defRPr sz="950" b="0">
-                          <a:solidFill>
-                            <a:srgbClr val="202020"/>
-                          </a:solidFill>
-                          <a:latin typeface="Times New Roman"/>
-                        </a:defRPr>
-                      </a:pPr>
-                      <a:r>
-                        <a:t>5</a:t>
-                      </a:r>
-                    </a:p>
-                  </a:txBody>
-                  <a:tcPr>
-                    <a:solidFill>
-                      <a:srgbClr val="F4F7FA"/>
-                    </a:solidFill>
-                  </a:tcPr>
-                </a:tc>
-              </a:tr>
-              <a:tr h="381000">
+              <a:tr h="402336">
                 <a:tc>
                   <a:txBody>
                     <a:bodyPr/>
@@ -5303,7 +8933,7 @@
                     <a:lstStyle/>
                     <a:p>
                       <a:pPr algn="ctr">
-                        <a:defRPr sz="950" b="0">
+                        <a:defRPr sz="950" b="1">
                           <a:solidFill>
                             <a:srgbClr val="202020"/>
                           </a:solidFill>
@@ -5311,7 +8941,7 @@
                         </a:defRPr>
                       </a:pPr>
                       <a:r>
-                        <a:t>99.83%</a:t>
+                        <a:t>100.0% (15/15)</a:t>
                       </a:r>
                     </a:p>
                   </a:txBody>
@@ -5335,7 +8965,7 @@
                         </a:defRPr>
                       </a:pPr>
                       <a:r>
-                        <a:t>1.0000</a:t>
+                        <a:t>15</a:t>
                       </a:r>
                     </a:p>
                   </a:txBody>
@@ -5351,117 +8981,21 @@
                     <a:lstStyle/>
                     <a:p>
                       <a:pPr algn="ctr">
-                        <a:defRPr sz="950" b="0">
+                        <a:defRPr sz="950" b="1">
                           <a:solidFill>
-                            <a:srgbClr val="202020"/>
+                            <a:srgbClr val="D97706"/>
                           </a:solidFill>
                           <a:latin typeface="Times New Roman"/>
                         </a:defRPr>
                       </a:pPr>
                       <a:r>
-                        <a:t>0.8889</a:t>
+                        <a:t>87</a:t>
                       </a:r>
                     </a:p>
                   </a:txBody>
                   <a:tcPr>
                     <a:solidFill>
-                      <a:srgbClr val="FFFFFF"/>
-                    </a:solidFill>
-                  </a:tcPr>
-                </a:tc>
-                <a:tc>
-                  <a:txBody>
-                    <a:bodyPr/>
-                    <a:lstStyle/>
-                    <a:p>
-                      <a:pPr algn="ctr">
-                        <a:defRPr sz="950" b="0">
-                          <a:solidFill>
-                            <a:srgbClr val="202020"/>
-                          </a:solidFill>
-                          <a:latin typeface="Times New Roman"/>
-                        </a:defRPr>
-                      </a:pPr>
-                      <a:r>
-                        <a:t>0.9412</a:t>
-                      </a:r>
-                    </a:p>
-                  </a:txBody>
-                  <a:tcPr>
-                    <a:solidFill>
-                      <a:srgbClr val="FFFFFF"/>
-                    </a:solidFill>
-                  </a:tcPr>
-                </a:tc>
-                <a:tc>
-                  <a:txBody>
-                    <a:bodyPr/>
-                    <a:lstStyle/>
-                    <a:p>
-                      <a:pPr algn="ctr">
-                        <a:defRPr sz="950" b="0">
-                          <a:solidFill>
-                            <a:srgbClr val="202020"/>
-                          </a:solidFill>
-                          <a:latin typeface="Times New Roman"/>
-                        </a:defRPr>
-                      </a:pPr>
-                      <a:r>
-                        <a:t>0.9863</a:t>
-                      </a:r>
-                    </a:p>
-                  </a:txBody>
-                  <a:tcPr>
-                    <a:solidFill>
-                      <a:srgbClr val="FFFFFF"/>
-                    </a:solidFill>
-                  </a:tcPr>
-                </a:tc>
-                <a:tc>
-                  <a:txBody>
-                    <a:bodyPr/>
-                    <a:lstStyle/>
-                    <a:p>
-                      <a:pPr algn="ctr">
-                        <a:defRPr sz="950" b="0">
-                          <a:solidFill>
-                            <a:srgbClr val="202020"/>
-                          </a:solidFill>
-                          <a:latin typeface="Times New Roman"/>
-                        </a:defRPr>
-                      </a:pPr>
-                      <a:r>
-                        <a:t>0.9307</a:t>
-                      </a:r>
-                    </a:p>
-                  </a:txBody>
-                  <a:tcPr>
-                    <a:solidFill>
-                      <a:srgbClr val="FFFFFF"/>
-                    </a:solidFill>
-                  </a:tcPr>
-                </a:tc>
-                <a:tc>
-                  <a:txBody>
-                    <a:bodyPr/>
-                    <a:lstStyle/>
-                    <a:p>
-                      <a:pPr algn="ctr">
-                        <a:defRPr sz="950" b="0">
-                          <a:solidFill>
-                            <a:srgbClr val="202020"/>
-                          </a:solidFill>
-                          <a:latin typeface="Times New Roman"/>
-                        </a:defRPr>
-                      </a:pPr>
-                      <a:r>
-                        <a:t>40</a:t>
-                      </a:r>
-                    </a:p>
-                  </a:txBody>
-                  <a:tcPr>
-                    <a:solidFill>
-                      <a:srgbClr val="FFFFFF"/>
+                      <a:srgbClr val="FEF9E7"/>
                     </a:solidFill>
                   </a:tcPr>
                 </a:tc>
@@ -5503,7 +9037,7 @@
                         </a:defRPr>
                       </a:pPr>
                       <a:r>
-                        <a:t>5</a:t>
+                        <a:t>100% Recall, Elevated FPs</a:t>
                       </a:r>
                     </a:p>
                   </a:txBody>
@@ -5514,7 +9048,7 @@
                   </a:tcPr>
                 </a:tc>
               </a:tr>
-              <a:tr h="381000">
+              <a:tr h="402336">
                 <a:tc>
                   <a:txBody>
                     <a:bodyPr/>
@@ -5535,7 +9069,31 @@
                   </a:txBody>
                   <a:tcPr>
                     <a:solidFill>
-                      <a:srgbClr val="F4F7FA"/>
+                      <a:srgbClr val="FFFFFF"/>
+                    </a:solidFill>
+                  </a:tcPr>
+                </a:tc>
+                <a:tc>
+                  <a:txBody>
+                    <a:bodyPr/>
+                    <a:lstStyle/>
+                    <a:p>
+                      <a:pPr algn="ctr">
+                        <a:defRPr sz="950" b="1">
+                          <a:solidFill>
+                            <a:srgbClr val="202020"/>
+                          </a:solidFill>
+                          <a:latin typeface="Times New Roman"/>
+                        </a:defRPr>
+                      </a:pPr>
+                      <a:r>
+                        <a:t>100.0% (15/15)</a:t>
+                      </a:r>
+                    </a:p>
+                  </a:txBody>
+                  <a:tcPr>
+                    <a:solidFill>
+                      <a:srgbClr val="FFFFFF"/>
                     </a:solidFill>
                   </a:tcPr>
                 </a:tc>
@@ -5553,13 +9111,37 @@
                         </a:defRPr>
                       </a:pPr>
                       <a:r>
-                        <a:t>99.83%</a:t>
+                        <a:t>15</a:t>
                       </a:r>
                     </a:p>
                   </a:txBody>
                   <a:tcPr>
                     <a:solidFill>
-                      <a:srgbClr val="F4F7FA"/>
+                      <a:srgbClr val="FFFFFF"/>
+                    </a:solidFill>
+                  </a:tcPr>
+                </a:tc>
+                <a:tc>
+                  <a:txBody>
+                    <a:bodyPr/>
+                    <a:lstStyle/>
+                    <a:p>
+                      <a:pPr algn="ctr">
+                        <a:defRPr sz="950" b="1">
+                          <a:solidFill>
+                            <a:srgbClr val="D97706"/>
+                          </a:solidFill>
+                          <a:latin typeface="Times New Roman"/>
+                        </a:defRPr>
+                      </a:pPr>
+                      <a:r>
+                        <a:t>336</a:t>
+                      </a:r>
+                    </a:p>
+                  </a:txBody>
+                  <a:tcPr>
+                    <a:solidFill>
+                      <a:srgbClr val="FEF9E7"/>
                     </a:solidFill>
                   </a:tcPr>
                 </a:tc>
@@ -5577,13 +9159,13 @@
                         </a:defRPr>
                       </a:pPr>
                       <a:r>
-                        <a:t>0.9762</a:t>
+                        <a:t>0</a:t>
                       </a:r>
                     </a:p>
                   </a:txBody>
                   <a:tcPr>
                     <a:solidFill>
-                      <a:srgbClr val="F4F7FA"/>
+                      <a:srgbClr val="FFFFFF"/>
                     </a:solidFill>
                   </a:tcPr>
                 </a:tc>
@@ -5601,399 +9183,13 @@
                         </a:defRPr>
                       </a:pPr>
                       <a:r>
-                        <a:t>0.9111</a:t>
+                        <a:t>100% Recall, Very High FPs</a:t>
                       </a:r>
                     </a:p>
                   </a:txBody>
                   <a:tcPr>
                     <a:solidFill>
-                      <a:srgbClr val="F4F7FA"/>
-                    </a:solidFill>
-                  </a:tcPr>
-                </a:tc>
-                <a:tc>
-                  <a:txBody>
-                    <a:bodyPr/>
-                    <a:lstStyle/>
-                    <a:p>
-                      <a:pPr algn="ctr">
-                        <a:defRPr sz="950" b="0">
-                          <a:solidFill>
-                            <a:srgbClr val="202020"/>
-                          </a:solidFill>
-                          <a:latin typeface="Times New Roman"/>
-                        </a:defRPr>
-                      </a:pPr>
-                      <a:r>
-                        <a:t>0.9425</a:t>
-                      </a:r>
-                    </a:p>
-                  </a:txBody>
-                  <a:tcPr>
-                    <a:solidFill>
-                      <a:srgbClr val="F4F7FA"/>
-                    </a:solidFill>
-                  </a:tcPr>
-                </a:tc>
-                <a:tc>
-                  <a:txBody>
-                    <a:bodyPr/>
-                    <a:lstStyle/>
-                    <a:p>
-                      <a:pPr algn="ctr">
-                        <a:defRPr sz="950" b="0">
-                          <a:solidFill>
-                            <a:srgbClr val="202020"/>
-                          </a:solidFill>
-                          <a:latin typeface="Times New Roman"/>
-                        </a:defRPr>
-                      </a:pPr>
-                      <a:r>
-                        <a:t>0.9909</a:t>
-                      </a:r>
-                    </a:p>
-                  </a:txBody>
-                  <a:tcPr>
-                    <a:solidFill>
-                      <a:srgbClr val="F4F7FA"/>
-                    </a:solidFill>
-                  </a:tcPr>
-                </a:tc>
-                <a:tc>
-                  <a:txBody>
-                    <a:bodyPr/>
-                    <a:lstStyle/>
-                    <a:p>
-                      <a:pPr algn="ctr">
-                        <a:defRPr sz="950" b="0">
-                          <a:solidFill>
-                            <a:srgbClr val="202020"/>
-                          </a:solidFill>
-                          <a:latin typeface="Times New Roman"/>
-                        </a:defRPr>
-                      </a:pPr>
-                      <a:r>
-                        <a:t>0.9586</a:t>
-                      </a:r>
-                    </a:p>
-                  </a:txBody>
-                  <a:tcPr>
-                    <a:solidFill>
-                      <a:srgbClr val="F4F7FA"/>
-                    </a:solidFill>
-                  </a:tcPr>
-                </a:tc>
-                <a:tc>
-                  <a:txBody>
-                    <a:bodyPr/>
-                    <a:lstStyle/>
-                    <a:p>
-                      <a:pPr algn="ctr">
-                        <a:defRPr sz="950" b="0">
-                          <a:solidFill>
-                            <a:srgbClr val="202020"/>
-                          </a:solidFill>
-                          <a:latin typeface="Times New Roman"/>
-                        </a:defRPr>
-                      </a:pPr>
-                      <a:r>
-                        <a:t>41</a:t>
-                      </a:r>
-                    </a:p>
-                  </a:txBody>
-                  <a:tcPr>
-                    <a:solidFill>
-                      <a:srgbClr val="F4F7FA"/>
-                    </a:solidFill>
-                  </a:tcPr>
-                </a:tc>
-                <a:tc>
-                  <a:txBody>
-                    <a:bodyPr/>
-                    <a:lstStyle/>
-                    <a:p>
-                      <a:pPr algn="ctr">
-                        <a:defRPr sz="950" b="0">
-                          <a:solidFill>
-                            <a:srgbClr val="202020"/>
-                          </a:solidFill>
-                          <a:latin typeface="Times New Roman"/>
-                        </a:defRPr>
-                      </a:pPr>
-                      <a:r>
-                        <a:t>1</a:t>
-                      </a:r>
-                    </a:p>
-                  </a:txBody>
-                  <a:tcPr>
-                    <a:solidFill>
-                      <a:srgbClr val="F4F7FA"/>
-                    </a:solidFill>
-                  </a:tcPr>
-                </a:tc>
-                <a:tc>
-                  <a:txBody>
-                    <a:bodyPr/>
-                    <a:lstStyle/>
-                    <a:p>
-                      <a:pPr algn="ctr">
-                        <a:defRPr sz="950" b="0">
-                          <a:solidFill>
-                            <a:srgbClr val="202020"/>
-                          </a:solidFill>
-                          <a:latin typeface="Times New Roman"/>
-                        </a:defRPr>
-                      </a:pPr>
-                      <a:r>
-                        <a:t>4</a:t>
-                      </a:r>
-                    </a:p>
-                  </a:txBody>
-                  <a:tcPr>
-                    <a:solidFill>
-                      <a:srgbClr val="F4F7FA"/>
-                    </a:solidFill>
-                  </a:tcPr>
-                </a:tc>
-              </a:tr>
-              <a:tr h="381000">
-                <a:tc>
-                  <a:txBody>
-                    <a:bodyPr/>
-                    <a:lstStyle/>
-                    <a:p>
-                      <a:pPr algn="l">
-                        <a:defRPr sz="950" b="1">
-                          <a:solidFill>
-                            <a:srgbClr val="059669"/>
-                          </a:solidFill>
-                          <a:latin typeface="Times New Roman"/>
-                        </a:defRPr>
-                      </a:pPr>
-                      <a:r>
-                        <a:t>Full Consensus Fusion</a:t>
-                      </a:r>
-                    </a:p>
-                  </a:txBody>
-                  <a:tcPr>
-                    <a:solidFill>
-                      <a:srgbClr val="E6F4EA"/>
-                    </a:solidFill>
-                  </a:tcPr>
-                </a:tc>
-                <a:tc>
-                  <a:txBody>
-                    <a:bodyPr/>
-                    <a:lstStyle/>
-                    <a:p>
-                      <a:pPr algn="ctr">
-                        <a:defRPr sz="950" b="1">
-                          <a:solidFill>
-                            <a:srgbClr val="202020"/>
-                          </a:solidFill>
-                          <a:latin typeface="Times New Roman"/>
-                        </a:defRPr>
-                      </a:pPr>
-                      <a:r>
-                        <a:t>99.70%</a:t>
-                      </a:r>
-                    </a:p>
-                  </a:txBody>
-                  <a:tcPr>
-                    <a:solidFill>
-                      <a:srgbClr val="E6F4EA"/>
-                    </a:solidFill>
-                  </a:tcPr>
-                </a:tc>
-                <a:tc>
-                  <a:txBody>
-                    <a:bodyPr/>
-                    <a:lstStyle/>
-                    <a:p>
-                      <a:pPr algn="ctr">
-                        <a:defRPr sz="950" b="1">
-                          <a:solidFill>
-                            <a:srgbClr val="202020"/>
-                          </a:solidFill>
-                          <a:latin typeface="Times New Roman"/>
-                        </a:defRPr>
-                      </a:pPr>
-                      <a:r>
-                        <a:t>0.9091</a:t>
-                      </a:r>
-                    </a:p>
-                  </a:txBody>
-                  <a:tcPr>
-                    <a:solidFill>
-                      <a:srgbClr val="E6F4EA"/>
-                    </a:solidFill>
-                  </a:tcPr>
-                </a:tc>
-                <a:tc>
-                  <a:txBody>
-                    <a:bodyPr/>
-                    <a:lstStyle/>
-                    <a:p>
-                      <a:pPr algn="ctr">
-                        <a:defRPr sz="950" b="1">
-                          <a:solidFill>
-                            <a:srgbClr val="202020"/>
-                          </a:solidFill>
-                          <a:latin typeface="Times New Roman"/>
-                        </a:defRPr>
-                      </a:pPr>
-                      <a:r>
-                        <a:t>0.8889</a:t>
-                      </a:r>
-                    </a:p>
-                  </a:txBody>
-                  <a:tcPr>
-                    <a:solidFill>
-                      <a:srgbClr val="E6F4EA"/>
-                    </a:solidFill>
-                  </a:tcPr>
-                </a:tc>
-                <a:tc>
-                  <a:txBody>
-                    <a:bodyPr/>
-                    <a:lstStyle/>
-                    <a:p>
-                      <a:pPr algn="ctr">
-                        <a:defRPr sz="950" b="1">
-                          <a:solidFill>
-                            <a:srgbClr val="202020"/>
-                          </a:solidFill>
-                          <a:latin typeface="Times New Roman"/>
-                        </a:defRPr>
-                      </a:pPr>
-                      <a:r>
-                        <a:t>0.8989</a:t>
-                      </a:r>
-                    </a:p>
-                  </a:txBody>
-                  <a:tcPr>
-                    <a:solidFill>
-                      <a:srgbClr val="E6F4EA"/>
-                    </a:solidFill>
-                  </a:tcPr>
-                </a:tc>
-                <a:tc>
-                  <a:txBody>
-                    <a:bodyPr/>
-                    <a:lstStyle/>
-                    <a:p>
-                      <a:pPr algn="ctr">
-                        <a:defRPr sz="950" b="1">
-                          <a:solidFill>
-                            <a:srgbClr val="202020"/>
-                          </a:solidFill>
-                          <a:latin typeface="Times New Roman"/>
-                        </a:defRPr>
-                      </a:pPr>
-                      <a:r>
-                        <a:t>0.9985</a:t>
-                      </a:r>
-                    </a:p>
-                  </a:txBody>
-                  <a:tcPr>
-                    <a:solidFill>
-                      <a:srgbClr val="E6F4EA"/>
-                    </a:solidFill>
-                  </a:tcPr>
-                </a:tc>
-                <a:tc>
-                  <a:txBody>
-                    <a:bodyPr/>
-                    <a:lstStyle/>
-                    <a:p>
-                      <a:pPr algn="ctr">
-                        <a:defRPr sz="950" b="1">
-                          <a:solidFill>
-                            <a:srgbClr val="202020"/>
-                          </a:solidFill>
-                          <a:latin typeface="Times New Roman"/>
-                        </a:defRPr>
-                      </a:pPr>
-                      <a:r>
-                        <a:t>0.9555</a:t>
-                      </a:r>
-                    </a:p>
-                  </a:txBody>
-                  <a:tcPr>
-                    <a:solidFill>
-                      <a:srgbClr val="E6F4EA"/>
-                    </a:solidFill>
-                  </a:tcPr>
-                </a:tc>
-                <a:tc>
-                  <a:txBody>
-                    <a:bodyPr/>
-                    <a:lstStyle/>
-                    <a:p>
-                      <a:pPr algn="ctr">
-                        <a:defRPr sz="950" b="1">
-                          <a:solidFill>
-                            <a:srgbClr val="202020"/>
-                          </a:solidFill>
-                          <a:latin typeface="Times New Roman"/>
-                        </a:defRPr>
-                      </a:pPr>
-                      <a:r>
-                        <a:t>40</a:t>
-                      </a:r>
-                    </a:p>
-                  </a:txBody>
-                  <a:tcPr>
-                    <a:solidFill>
-                      <a:srgbClr val="E6F4EA"/>
-                    </a:solidFill>
-                  </a:tcPr>
-                </a:tc>
-                <a:tc>
-                  <a:txBody>
-                    <a:bodyPr/>
-                    <a:lstStyle/>
-                    <a:p>
-                      <a:pPr algn="ctr">
-                        <a:defRPr sz="950" b="1">
-                          <a:solidFill>
-                            <a:srgbClr val="202020"/>
-                          </a:solidFill>
-                          <a:latin typeface="Times New Roman"/>
-                        </a:defRPr>
-                      </a:pPr>
-                      <a:r>
-                        <a:t>4</a:t>
-                      </a:r>
-                    </a:p>
-                  </a:txBody>
-                  <a:tcPr>
-                    <a:solidFill>
-                      <a:srgbClr val="E6F4EA"/>
-                    </a:solidFill>
-                  </a:tcPr>
-                </a:tc>
-                <a:tc>
-                  <a:txBody>
-                    <a:bodyPr/>
-                    <a:lstStyle/>
-                    <a:p>
-                      <a:pPr algn="ctr">
-                        <a:defRPr sz="950" b="1">
-                          <a:solidFill>
-                            <a:srgbClr val="202020"/>
-                          </a:solidFill>
-                          <a:latin typeface="Times New Roman"/>
-                        </a:defRPr>
-                      </a:pPr>
-                      <a:r>
-                        <a:t>5</a:t>
-                      </a:r>
-                    </a:p>
-                  </a:txBody>
-                  <a:tcPr>
-                    <a:solidFill>
-                      <a:srgbClr val="E6F4EA"/>
+                      <a:srgbClr val="FFFFFF"/>
                     </a:solidFill>
                   </a:tcPr>
                 </a:tc>
@@ -6004,14 +9200,14 @@
       </p:graphicFrame>
       <p:sp>
         <p:nvSpPr>
-          <p:cNvPr id="8" name="Rounded Rectangle 7"/>
+          <p:cNvPr id="4" name="Rounded Rectangle 3"/>
           <p:cNvSpPr/>
           <p:nvPr/>
         </p:nvSpPr>
         <p:spPr>
           <a:xfrm>
-            <a:off x="731520" y="4023360"/>
-            <a:ext cx="5120640" cy="2011680"/>
+            <a:off x="731520" y="3749039"/>
+            <a:ext cx="5212080" cy="2286000"/>
           </a:xfrm>
           <a:prstGeom prst="roundRect">
             <a:avLst/>
@@ -6049,14 +9245,14 @@
       </p:sp>
       <p:sp>
         <p:nvSpPr>
-          <p:cNvPr id="9" name="TextBox 8"/>
+          <p:cNvPr id="5" name="TextBox 4"/>
           <p:cNvSpPr txBox="1"/>
           <p:nvPr/>
         </p:nvSpPr>
         <p:spPr>
           <a:xfrm>
-            <a:off x="868680" y="4069080"/>
-            <a:ext cx="4846320" cy="1828800"/>
+            <a:off x="868680" y="3794760"/>
+            <a:ext cx="4937760" cy="2103120"/>
           </a:xfrm>
           <a:prstGeom prst="rect">
             <a:avLst/>
@@ -6078,7 +9274,7 @@
               </a:defRPr>
             </a:pPr>
             <a:r>
-              <a:t>Cross-Generator Distribution Shift (1,000 txns)</a:t>
+              <a:t>Critical Robustness Findings (1,000 txns, 15 frauds)</a:t>
             </a:r>
           </a:p>
           <a:p>
@@ -6091,7 +9287,7 @@
               </a:defRPr>
             </a:pPr>
             <a:r>
-              <a:t>• Tree Recall Collapse: Random Forest and XGBoost suffered total recall collapse (0/15 caught) due to orthogonal decision boundary shifts.</a:t>
+              <a:t>• Tree Recall Collapse: Tree ensembles (Random Forest, XGBoost) suffered complete recall failure (0/15 caught) when evaluated against an independently generated synthetic dataset due to orthogonal decision boundary shifts.</a:t>
             </a:r>
           </a:p>
           <a:p>
@@ -6104,34 +9300,34 @@
               </a:defRPr>
             </a:pPr>
             <a:r>
-              <a:t>• Neural Representation Robustness: Deep Neural Network and Autoencoder detected all 15 frauds (100% recall), albeit with elevated false alarms.</a:t>
+              <a:t>• Elevated False Positives in Deep Models: While deep models caught 100% of frauds (15/15), the Deep Neural Network produced 87 false positives and the Autoencoder produced 336 false positives.</a:t>
             </a:r>
           </a:p>
           <a:p>
             <a:pPr algn="l">
               <a:defRPr sz="1050" b="1">
                 <a:solidFill>
-                  <a:srgbClr val="059669"/>
-                </a:solidFill>
-                <a:latin typeface="Times New Roman"/>
-              </a:defRPr>
-            </a:pPr>
-            <a:r>
-              <a:t>• Key Finding: Offline synthetic benchmarks cannot replace live telemetry; automated models must remain advisory in human-in-the-loop review.</a:t>
-            </a:r>
-          </a:p>
-        </p:txBody>
-      </p:sp>
-      <p:sp>
-        <p:nvSpPr>
-          <p:cNvPr id="10" name="Rounded Rectangle 9"/>
+                  <a:srgbClr val="C00000"/>
+                </a:solidFill>
+                <a:latin typeface="Times New Roman"/>
+              </a:defRPr>
+            </a:pPr>
+            <a:r>
+              <a:t>• Honest Generalization Lesson: Reporting 100% recall alone without reporting false positives would be misleading; high false alarm rates create severe analyst fatigue.</a:t>
+            </a:r>
+          </a:p>
+        </p:txBody>
+      </p:sp>
+      <p:sp>
+        <p:nvSpPr>
+          <p:cNvPr id="6" name="Rounded Rectangle 5"/>
           <p:cNvSpPr/>
           <p:nvPr/>
         </p:nvSpPr>
         <p:spPr>
           <a:xfrm>
-            <a:off x="6217920" y="4023360"/>
-            <a:ext cx="5120640" cy="2011680"/>
+            <a:off x="6217920" y="3749039"/>
+            <a:ext cx="5212080" cy="2286000"/>
           </a:xfrm>
           <a:prstGeom prst="roundRect">
             <a:avLst/>
@@ -6169,14 +9365,14 @@
       </p:sp>
       <p:sp>
         <p:nvSpPr>
-          <p:cNvPr id="11" name="TextBox 10"/>
+          <p:cNvPr id="7" name="TextBox 6"/>
           <p:cNvSpPr txBox="1"/>
           <p:nvPr/>
         </p:nvSpPr>
         <p:spPr>
           <a:xfrm>
-            <a:off x="6355080" y="4069080"/>
-            <a:ext cx="4846320" cy="1828800"/>
+            <a:off x="6355080" y="3794760"/>
+            <a:ext cx="4937760" cy="2103120"/>
           </a:xfrm>
           <a:prstGeom prst="rect">
             <a:avLst/>
@@ -6198,7 +9394,7 @@
               </a:defRPr>
             </a:pPr>
             <a:r>
-              <a:t>Financial Cost-Benefit Loss Analysis</a:t>
+              <a:t>Academic Defense &amp; Real-World Implications</a:t>
             </a:r>
           </a:p>
           <a:p>
@@ -6211,7 +9407,7 @@
               </a:defRPr>
             </a:pPr>
             <a:r>
-              <a:t>• Asymmetric Cost Formulation: Missed Fraud Cost (C_FN) = $2,500; False Alarm Cost (C_FP) = $35; Triage Overhead (C_TP) = $10.</a:t>
+              <a:t>• Synthetic Data Limitation: Offline synthetic benchmarks do not guarantee real-world generalization; distributional covariance shifts easily evade static tree thresholds.</a:t>
             </a:r>
           </a:p>
           <a:p>
@@ -6224,7 +9420,7 @@
               </a:defRPr>
             </a:pPr>
             <a:r>
-              <a:t>• Baseline Loss (No Detection): $112,500 across 45 fraud incidents.</a:t>
+              <a:t>• Operational Requirement: Automated models must operate in an advisory human-in-the-loop triage capacity rather than an autonomous decision authority.</a:t>
             </a:r>
           </a:p>
           <a:p>
@@ -6237,7 +9433,7 @@
               </a:defRPr>
             </a:pPr>
             <a:r>
-              <a:t>• Full Consensus Operational Loss: $13,040 ($12,500 FN + $140 FP + $400 TP).</a:t>
+              <a:t>• Pipeline Recommendation: Continuous concept drift monitoring (ADWIN) and adaptive retraining are essential before deploying to live financial environments.</a:t>
             </a:r>
           </a:p>
           <a:p>
@@ -6250,17 +9446,12 @@
               </a:defRPr>
             </a:pPr>
             <a:r>
-              <a:t>• Net Operational Savings: +$99,460 (88.4% cost reduction over baseline).</a:t>
+              <a:t>• Saved Evidence: results/independent_benchmark_report.json.</a:t>
             </a:r>
           </a:p>
         </p:txBody>
       </p:sp>
     </p:spTree>
-    <p:extLst>
-      <p:ext uri="{BB962C8B-B14F-4D97-AF65-F5344CB8AC3E}">
-        <p14:creationId xmlns:p14="http://schemas.microsoft.com/office/powerpoint/2010/main" val="3666188800"/>
-      </p:ext>
-    </p:extLst>
   </p:cSld>
   <p:clrMapOvr>
     <a:masterClrMapping/>
@@ -6268,203 +9459,79 @@
 </p:sld>
 </file>
 
-<file path=ppt/slides/slide12.xml><?xml version="1.0" encoding="utf-8"?>
-<p:sld xmlns:a="http://schemas.openxmlformats.org/drawingml/2006/main" xmlns:r="http://schemas.openxmlformats.org/officeDocument/2006/relationships" xmlns:p="http://schemas.openxmlformats.org/presentationml/2006/main">
+<file path=ppt/slides/slide18.xml><?xml version="1.0" encoding="utf-8"?>
+<p:sld xmlns:a="http://schemas.openxmlformats.org/drawingml/2006/main" xmlns:p="http://schemas.openxmlformats.org/presentationml/2006/main" xmlns:r="http://schemas.openxmlformats.org/officeDocument/2006/relationships">
   <p:cSld>
     <p:spTree>
       <p:nvGrpSpPr>
-        <p:cNvPr id="1" name="">
-          <a:extLst>
-            <a:ext uri="{FF2B5EF4-FFF2-40B4-BE49-F238E27FC236}">
-              <a16:creationId xmlns:a16="http://schemas.microsoft.com/office/drawing/2014/main" xmlns="" id="{BCC49A39-F362-DB35-B5DF-7E322AB9CAE0}"/>
-            </a:ext>
-          </a:extLst>
-        </p:cNvPr>
+        <p:cNvPr id="1" name=""/>
         <p:cNvGrpSpPr/>
         <p:nvPr/>
       </p:nvGrpSpPr>
-      <p:grpSpPr>
-        <a:xfrm>
-          <a:off x="0" y="0"/>
-          <a:ext cx="0" cy="0"/>
-          <a:chOff x="0" y="0"/>
-          <a:chExt cx="0" cy="0"/>
-        </a:xfrm>
-      </p:grpSpPr>
-      <p:sp>
-        <p:nvSpPr>
-          <p:cNvPr id="4" name="object 2">
-            <a:extLst>
-              <a:ext uri="{FF2B5EF4-FFF2-40B4-BE49-F238E27FC236}">
-                <a16:creationId xmlns:a16="http://schemas.microsoft.com/office/drawing/2014/main" xmlns="" id="{3754A46F-4AC3-5AF1-0B78-C0B5112BD14C}"/>
-              </a:ext>
-            </a:extLst>
-          </p:cNvPr>
-          <p:cNvSpPr txBox="1">
+      <p:grpSpPr/>
+      <p:sp>
+        <p:nvSpPr>
+          <p:cNvPr id="2" name="Title 1"/>
+          <p:cNvSpPr>
             <a:spLocks noGrp="1"/>
           </p:cNvSpPr>
           <p:nvPr>
             <p:ph type="title"/>
           </p:nvPr>
         </p:nvSpPr>
+        <p:spPr/>
+        <p:txBody>
+          <a:bodyPr/>
+          <a:lstStyle/>
+          <a:p>
+            <a:pPr>
+              <a:defRPr sz="2400" b="1">
+                <a:solidFill>
+                  <a:srgbClr val="1F4E79"/>
+                </a:solidFill>
+                <a:latin typeface="Times New Roman"/>
+              </a:defRPr>
+            </a:pPr>
+            <a:r>
+              <a:t>Streamlit System Workflow &amp; User Interface Demonstration</a:t>
+            </a:r>
+          </a:p>
+        </p:txBody>
+      </p:sp>
+      <p:pic>
+        <p:nvPicPr>
+          <p:cNvPr id="3" name="Picture 2" descr="image.png"/>
+          <p:cNvPicPr>
+            <a:picLocks noChangeAspect="1"/>
+          </p:cNvPicPr>
+          <p:nvPr/>
+        </p:nvPicPr>
+        <p:blipFill>
+          <a:blip r:embed="rId2"/>
+          <a:stretch>
+            <a:fillRect/>
+          </a:stretch>
+        </p:blipFill>
         <p:spPr>
           <a:xfrm>
-            <a:off x="460248" y="681037"/>
-            <a:ext cx="10515600" cy="576696"/>
+            <a:off x="731520" y="1554480"/>
+            <a:ext cx="10698480" cy="3931920"/>
           </a:xfrm>
           <a:prstGeom prst="rect">
             <a:avLst/>
           </a:prstGeom>
         </p:spPr>
-        <p:txBody>
-          <a:bodyPr vert="horz" wrap="square" lIns="0" tIns="113919" rIns="0" bIns="0" rtlCol="0">
-            <a:spAutoFit/>
-          </a:bodyPr>
-          <a:lstStyle/>
-          <a:p>
-            <a:pPr marL="486409">
-              <a:lnSpc>
-                <a:spcPct val="100000"/>
-              </a:lnSpc>
-              <a:spcBef>
-                <a:spcPts val="130"/>
-              </a:spcBef>
-              <a:defRPr sz="2400" b="1">
-                <a:solidFill>
-                  <a:srgbClr val="1F4E79"/>
-                </a:solidFill>
-                <a:latin typeface="Times New Roman"/>
-              </a:defRPr>
-            </a:pPr>
-            <a:r>
-              <a:t>Conclusion &amp; Future Work</a:t>
-            </a:r>
-            <a:endParaRPr sz="3000" b="1" dirty="0">
-              <a:latin typeface="Times New Roman" panose="02020603050405020304" pitchFamily="18" charset="0"/>
-              <a:cs typeface="Times New Roman" panose="02020603050405020304" pitchFamily="18" charset="0"/>
-            </a:endParaRPr>
-          </a:p>
-        </p:txBody>
-      </p:sp>
-      <p:sp>
-        <p:nvSpPr>
-          <p:cNvPr id="2" name="Date Placeholder 1">
-            <a:extLst>
-              <a:ext uri="{FF2B5EF4-FFF2-40B4-BE49-F238E27FC236}">
-                <a16:creationId xmlns:a16="http://schemas.microsoft.com/office/drawing/2014/main" xmlns="" id="{851BAA61-633E-E24B-7DEE-4B2A2B1FA9A4}"/>
-              </a:ext>
-            </a:extLst>
-          </p:cNvPr>
-          <p:cNvSpPr>
-            <a:spLocks noGrp="1"/>
-          </p:cNvSpPr>
-          <p:nvPr>
-            <p:ph type="dt" sz="half" idx="10"/>
-          </p:nvPr>
-        </p:nvSpPr>
-        <p:spPr/>
-        <p:txBody>
-          <a:bodyPr/>
-          <a:lstStyle/>
-          <a:p>
-            <a:pPr>
-              <a:defRPr sz="1000">
-                <a:solidFill>
-                  <a:srgbClr val="555555"/>
-                </a:solidFill>
-                <a:latin typeface="Times New Roman"/>
-              </a:defRPr>
-            </a:pPr>
-            <a:r>
-              <a:t>28/10/26</a:t>
-            </a:r>
-            <a:endParaRPr lang="en-IN">
-              <a:latin typeface="Times New Roman" panose="02020603050405020304" pitchFamily="18" charset="0"/>
-              <a:cs typeface="Times New Roman" panose="02020603050405020304" pitchFamily="18" charset="0"/>
-            </a:endParaRPr>
-          </a:p>
-        </p:txBody>
-      </p:sp>
-      <p:sp>
-        <p:nvSpPr>
-          <p:cNvPr id="5" name="Footer Placeholder 4">
-            <a:extLst>
-              <a:ext uri="{FF2B5EF4-FFF2-40B4-BE49-F238E27FC236}">
-                <a16:creationId xmlns:a16="http://schemas.microsoft.com/office/drawing/2014/main" xmlns="" id="{AB93C553-2D0C-5A0A-39DC-21C43BD88BF0}"/>
-              </a:ext>
-            </a:extLst>
-          </p:cNvPr>
-          <p:cNvSpPr>
-            <a:spLocks noGrp="1"/>
-          </p:cNvSpPr>
-          <p:nvPr>
-            <p:ph type="ftr" sz="quarter" idx="11"/>
-          </p:nvPr>
-        </p:nvSpPr>
-        <p:spPr/>
-        <p:txBody>
-          <a:bodyPr/>
-          <a:lstStyle/>
-          <a:p>
-            <a:pPr>
-              <a:defRPr sz="1000">
-                <a:solidFill>
-                  <a:srgbClr val="555555"/>
-                </a:solidFill>
-                <a:latin typeface="Times New Roman"/>
-              </a:defRPr>
-            </a:pPr>
-            <a:r>
-              <a:t>VIT SCOPE  |  BCSE497J Project-I</a:t>
-            </a:r>
-          </a:p>
-        </p:txBody>
-      </p:sp>
-      <p:sp>
-        <p:nvSpPr>
-          <p:cNvPr id="6" name="Slide Number Placeholder 5">
-            <a:extLst>
-              <a:ext uri="{FF2B5EF4-FFF2-40B4-BE49-F238E27FC236}">
-                <a16:creationId xmlns:a16="http://schemas.microsoft.com/office/drawing/2014/main" xmlns="" id="{6BF7A7E9-45BE-62F4-D3A6-F19DC6ABEDE6}"/>
-              </a:ext>
-            </a:extLst>
-          </p:cNvPr>
-          <p:cNvSpPr>
-            <a:spLocks noGrp="1"/>
-          </p:cNvSpPr>
-          <p:nvPr>
-            <p:ph type="sldNum" sz="quarter" idx="12"/>
-          </p:nvPr>
-        </p:nvSpPr>
-        <p:spPr/>
-        <p:txBody>
-          <a:bodyPr/>
-          <a:lstStyle/>
-          <a:p>
-            <a:fld id="{65201FD4-9D8D-4491-815B-63C7BF4F0034}" type="slidenum">
-              <a:rPr lang="en-IN" smtClean="0">
-                <a:latin typeface="Times New Roman" panose="02020603050405020304" pitchFamily="18" charset="0"/>
-                <a:cs typeface="Times New Roman" panose="02020603050405020304" pitchFamily="18" charset="0"/>
-              </a:rPr>
-              <a:t>12</a:t>
-            </a:fld>
-            <a:endParaRPr lang="en-IN" dirty="0">
-              <a:latin typeface="Times New Roman" panose="02020603050405020304" pitchFamily="18" charset="0"/>
-              <a:cs typeface="Times New Roman" panose="02020603050405020304" pitchFamily="18" charset="0"/>
-            </a:endParaRPr>
-          </a:p>
-        </p:txBody>
-      </p:sp>
-      <p:sp>
-        <p:nvSpPr>
-          <p:cNvPr id="7" name="Rounded Rectangle 6"/>
+      </p:pic>
+      <p:sp>
+        <p:nvSpPr>
+          <p:cNvPr id="4" name="Rounded Rectangle 3"/>
           <p:cNvSpPr/>
           <p:nvPr/>
         </p:nvSpPr>
         <p:spPr>
           <a:xfrm>
-            <a:off x="731520" y="1645920"/>
-            <a:ext cx="5120640" cy="4389120"/>
+            <a:off x="731520" y="5577840"/>
+            <a:ext cx="10698480" cy="777240"/>
           </a:xfrm>
           <a:prstGeom prst="roundRect">
             <a:avLst/>
@@ -6502,14 +9569,14 @@
       </p:sp>
       <p:sp>
         <p:nvSpPr>
-          <p:cNvPr id="8" name="TextBox 7"/>
+          <p:cNvPr id="5" name="TextBox 4"/>
           <p:cNvSpPr txBox="1"/>
           <p:nvPr/>
         </p:nvSpPr>
         <p:spPr>
           <a:xfrm>
-            <a:off x="868680" y="1737360"/>
-            <a:ext cx="4846320" cy="4114800"/>
+            <a:off x="868680" y="5596128"/>
+            <a:ext cx="10424160" cy="685800"/>
           </a:xfrm>
           <a:prstGeom prst="rect">
             <a:avLst/>
@@ -6523,7 +9590,7 @@
           <a:lstStyle/>
           <a:p>
             <a:pPr algn="l">
-              <a:defRPr sz="1500" b="1">
+              <a:defRPr sz="1100" b="1">
                 <a:solidFill>
                   <a:srgbClr val="1F4E79"/>
                 </a:solidFill>
@@ -6531,86 +9598,226 @@
               </a:defRPr>
             </a:pPr>
             <a:r>
-              <a:t>Conclusions &amp; Core Achievements</a:t>
-            </a:r>
-          </a:p>
-          <a:p>
-            <a:pPr algn="l">
-              <a:defRPr sz="1150" b="0">
-                <a:solidFill>
-                  <a:srgbClr val="202020"/>
-                </a:solidFill>
-                <a:latin typeface="Times New Roman"/>
-              </a:defRPr>
-            </a:pPr>
-            <a:r>
-              <a:t>• Multi-Model Consensus Architecture: Successfully unified supervised tree ensembles with deep neural representation learning, achieving 0.9091 precision, 0.8889 recall, and 0.9555 PR-AUC on holdout data.</a:t>
-            </a:r>
-          </a:p>
-          <a:p>
-            <a:pPr algn="l">
-              <a:defRPr sz="1150" b="0">
-                <a:solidFill>
-                  <a:srgbClr val="202020"/>
-                </a:solidFill>
-                <a:latin typeface="Times New Roman"/>
-              </a:defRPr>
-            </a:pPr>
-            <a:r>
-              <a:t>• 55.6% False Positive Reduction: Reduced false alarms from 9 down to 4, substantially lightening human compliance review burdens while maintaining high fraud recall.</a:t>
-            </a:r>
-          </a:p>
-          <a:p>
-            <a:pPr algn="l">
-              <a:defRPr sz="1150" b="0">
-                <a:solidFill>
-                  <a:srgbClr val="202020"/>
-                </a:solidFill>
-                <a:latin typeface="Times New Roman"/>
-              </a:defRPr>
-            </a:pPr>
-            <a:r>
-              <a:t>• Regulatory Explainability: Embedded TreeSHAP feature attributions and quantitative balance discrepancy forensics satisfying statutory GDPR Art. 22 compliance.</a:t>
-            </a:r>
-          </a:p>
-          <a:p>
-            <a:pPr algn="l">
-              <a:defRPr sz="1150" b="0">
-                <a:solidFill>
-                  <a:srgbClr val="202020"/>
-                </a:solidFill>
-                <a:latin typeface="Times New Roman"/>
-              </a:defRPr>
-            </a:pPr>
-            <a:r>
-              <a:t>• Fault-Tolerant Streaming: Deployed transactional SQLite outbox (pending_alerts) and synchronous broker ACK guaranteeing at-least-once alert delivery on worker crash.</a:t>
-            </a:r>
-          </a:p>
-          <a:p>
-            <a:pPr algn="l">
-              <a:defRPr sz="1150" b="1">
-                <a:solidFill>
-                  <a:srgbClr val="059669"/>
-                </a:solidFill>
-                <a:latin typeface="Times New Roman"/>
-              </a:defRPr>
-            </a:pPr>
-            <a:r>
-              <a:t>• 104 Passing Automated Tests: 100% verification across all unit, integration, and security regression checks.</a:t>
-            </a:r>
-          </a:p>
-        </p:txBody>
-      </p:sp>
-      <p:sp>
-        <p:nvSpPr>
-          <p:cNvPr id="9" name="Rounded Rectangle 8"/>
+              <a:t>End-to-End Analyst Workflow Implemented in Streamlit Workspace:</a:t>
+            </a:r>
+          </a:p>
+          <a:p>
+            <a:pPr algn="l">
+              <a:defRPr sz="1000" b="0">
+                <a:solidFill>
+                  <a:srgbClr val="202020"/>
+                </a:solidFill>
+                <a:latin typeface="Times New Roman"/>
+              </a:defRPr>
+            </a:pPr>
+            <a:r>
+              <a:t>(1) Batch CSV upload &amp; schema validation  -&gt;  (2) Four-model evaluation under any-model review rule (LOW/MED/HIGH/CRITICAL)  -&gt;  (3) Flagged transaction inspection with local TreeSHAP waterfall attributions  -&gt;  (4) Audit persistence in thread-safe SQLite workspace store.</a:t>
+            </a:r>
+          </a:p>
+        </p:txBody>
+      </p:sp>
+    </p:spTree>
+  </p:cSld>
+  <p:clrMapOvr>
+    <a:masterClrMapping/>
+  </p:clrMapOvr>
+</p:sld>
+</file>
+
+<file path=ppt/slides/slide2.xml><?xml version="1.0" encoding="utf-8"?>
+<p:sld xmlns:a="http://schemas.openxmlformats.org/drawingml/2006/main" xmlns:r="http://schemas.openxmlformats.org/officeDocument/2006/relationships" xmlns:p="http://schemas.openxmlformats.org/presentationml/2006/main">
+  <p:cSld>
+    <p:spTree>
+      <p:nvGrpSpPr>
+        <p:cNvPr id="1" name=""/>
+        <p:cNvGrpSpPr/>
+        <p:nvPr/>
+      </p:nvGrpSpPr>
+      <p:grpSpPr>
+        <a:xfrm>
+          <a:off x="0" y="0"/>
+          <a:ext cx="0" cy="0"/>
+          <a:chOff x="0" y="0"/>
+          <a:chExt cx="0" cy="0"/>
+        </a:xfrm>
+      </p:grpSpPr>
+      <p:sp>
+        <p:nvSpPr>
+          <p:cNvPr id="2" name="Title 1">
+            <a:extLst>
+              <a:ext uri="{FF2B5EF4-FFF2-40B4-BE49-F238E27FC236}">
+                <a16:creationId xmlns:a16="http://schemas.microsoft.com/office/drawing/2014/main" xmlns="" id="{A6ACBE13-A9D6-9564-DA47-597E38E09F70}"/>
+              </a:ext>
+            </a:extLst>
+          </p:cNvPr>
+          <p:cNvSpPr>
+            <a:spLocks noGrp="1"/>
+          </p:cNvSpPr>
+          <p:nvPr>
+            <p:ph type="title"/>
+          </p:nvPr>
+        </p:nvSpPr>
+        <p:spPr/>
+        <p:txBody>
+          <a:bodyPr>
+            <a:normAutofit/>
+          </a:bodyPr>
+          <a:lstStyle/>
+          <a:p>
+            <a:pPr>
+              <a:defRPr sz="2400" b="1">
+                <a:solidFill>
+                  <a:srgbClr val="1F4E79"/>
+                </a:solidFill>
+                <a:latin typeface="Times New Roman"/>
+              </a:defRPr>
+            </a:pPr>
+            <a:r>
+              <a:t>Approval Mail From Guide</a:t>
+            </a:r>
+          </a:p>
+        </p:txBody>
+      </p:sp>
+      <p:sp>
+        <p:nvSpPr>
+          <p:cNvPr id="4" name="Date Placeholder 3">
+            <a:extLst>
+              <a:ext uri="{FF2B5EF4-FFF2-40B4-BE49-F238E27FC236}">
+                <a16:creationId xmlns:a16="http://schemas.microsoft.com/office/drawing/2014/main" xmlns="" id="{C7827C50-3ED3-2DB6-C227-6784C6CA9E30}"/>
+              </a:ext>
+            </a:extLst>
+          </p:cNvPr>
+          <p:cNvSpPr>
+            <a:spLocks noGrp="1"/>
+          </p:cNvSpPr>
+          <p:nvPr>
+            <p:ph type="dt" sz="half" idx="10"/>
+          </p:nvPr>
+        </p:nvSpPr>
+        <p:spPr/>
+        <p:txBody>
+          <a:bodyPr/>
+          <a:lstStyle/>
+          <a:p>
+            <a:pPr>
+              <a:defRPr sz="1000">
+                <a:solidFill>
+                  <a:srgbClr val="555555"/>
+                </a:solidFill>
+                <a:latin typeface="Times New Roman"/>
+              </a:defRPr>
+            </a:pPr>
+            <a:r>
+              <a:t>28/10/26</a:t>
+            </a:r>
+            <a:endParaRPr lang="en-IN" dirty="0"/>
+          </a:p>
+        </p:txBody>
+      </p:sp>
+      <p:sp>
+        <p:nvSpPr>
+          <p:cNvPr id="5" name="Footer Placeholder 4">
+            <a:extLst>
+              <a:ext uri="{FF2B5EF4-FFF2-40B4-BE49-F238E27FC236}">
+                <a16:creationId xmlns:a16="http://schemas.microsoft.com/office/drawing/2014/main" xmlns="" id="{56664170-792F-28F8-1C31-5F7A8D69F97E}"/>
+              </a:ext>
+            </a:extLst>
+          </p:cNvPr>
+          <p:cNvSpPr>
+            <a:spLocks noGrp="1"/>
+          </p:cNvSpPr>
+          <p:nvPr>
+            <p:ph type="ftr" sz="quarter" idx="11"/>
+          </p:nvPr>
+        </p:nvSpPr>
+        <p:spPr/>
+        <p:txBody>
+          <a:bodyPr/>
+          <a:lstStyle/>
+          <a:p>
+            <a:pPr>
+              <a:defRPr sz="1000">
+                <a:solidFill>
+                  <a:srgbClr val="555555"/>
+                </a:solidFill>
+                <a:latin typeface="Times New Roman"/>
+              </a:defRPr>
+            </a:pPr>
+            <a:r>
+              <a:t>VIT SCOPE  |  BCSE497J Project-I</a:t>
+            </a:r>
+          </a:p>
+        </p:txBody>
+      </p:sp>
+      <p:sp>
+        <p:nvSpPr>
+          <p:cNvPr id="6" name="Slide Number Placeholder 5">
+            <a:extLst>
+              <a:ext uri="{FF2B5EF4-FFF2-40B4-BE49-F238E27FC236}">
+                <a16:creationId xmlns:a16="http://schemas.microsoft.com/office/drawing/2014/main" xmlns="" id="{EE16528B-72DB-0275-6A94-33ABB5CD7075}"/>
+              </a:ext>
+            </a:extLst>
+          </p:cNvPr>
+          <p:cNvSpPr>
+            <a:spLocks noGrp="1"/>
+          </p:cNvSpPr>
+          <p:nvPr>
+            <p:ph type="sldNum" sz="quarter" idx="12"/>
+          </p:nvPr>
+        </p:nvSpPr>
+        <p:spPr/>
+        <p:txBody>
+          <a:bodyPr/>
+          <a:lstStyle/>
+          <a:p>
+            <a:fld id="{65201FD4-9D8D-4491-815B-63C7BF4F0034}" type="slidenum">
+              <a:rPr lang="en-IN" smtClean="0"/>
+              <a:t>2</a:t>
+            </a:fld>
+            <a:endParaRPr lang="en-IN"/>
+          </a:p>
+        </p:txBody>
+      </p:sp>
+      <p:pic>
+        <p:nvPicPr>
+          <p:cNvPr id="7" name="Picture 6" descr="Screen Shot 2026-10-05 at 11.12.42 AM.png"/>
+          <p:cNvPicPr>
+            <a:picLocks noChangeAspect="1"/>
+          </p:cNvPicPr>
+          <p:nvPr/>
+        </p:nvPicPr>
+        <p:blipFill>
+          <a:blip r:embed="rId2">
+            <a:extLst>
+              <a:ext uri="{28A0092B-C50C-407E-A947-70E740481C1C}">
+                <a14:useLocalDpi xmlns:a14="http://schemas.microsoft.com/office/drawing/2010/main" val="0"/>
+              </a:ext>
+            </a:extLst>
+          </a:blip>
+          <a:stretch>
+            <a:fillRect/>
+          </a:stretch>
+        </p:blipFill>
+        <p:spPr>
+          <a:xfrm>
+            <a:off x="5303520" y="1645920"/>
+            <a:ext cx="6126480" cy="4389120"/>
+          </a:xfrm>
+          <a:prstGeom prst="rect">
+            <a:avLst/>
+          </a:prstGeom>
+        </p:spPr>
+      </p:pic>
+      <p:sp>
+        <p:nvSpPr>
+          <p:cNvPr id="8" name="Rounded Rectangle 7"/>
           <p:cNvSpPr/>
           <p:nvPr/>
         </p:nvSpPr>
         <p:spPr>
           <a:xfrm>
-            <a:off x="6217920" y="1645920"/>
-            <a:ext cx="5120640" cy="4389120"/>
+            <a:off x="731520" y="1645920"/>
+            <a:ext cx="4389120" cy="4389120"/>
           </a:xfrm>
           <a:prstGeom prst="roundRect">
             <a:avLst/>
@@ -6648,14 +9855,14 @@
       </p:sp>
       <p:sp>
         <p:nvSpPr>
-          <p:cNvPr id="10" name="TextBox 9"/>
+          <p:cNvPr id="9" name="TextBox 8"/>
           <p:cNvSpPr txBox="1"/>
           <p:nvPr/>
         </p:nvSpPr>
         <p:spPr>
           <a:xfrm>
-            <a:off x="6355080" y="1737360"/>
-            <a:ext cx="4846320" cy="4114800"/>
+            <a:off x="868680" y="1783080"/>
+            <a:ext cx="4114800" cy="4023360"/>
           </a:xfrm>
           <a:prstGeom prst="rect">
             <a:avLst/>
@@ -6669,7 +9876,7 @@
           <a:lstStyle/>
           <a:p>
             <a:pPr algn="l">
-              <a:defRPr sz="1500" b="1">
+              <a:defRPr sz="1600" b="1">
                 <a:solidFill>
                   <a:srgbClr val="1F4E79"/>
                 </a:solidFill>
@@ -6677,7 +9884,7 @@
               </a:defRPr>
             </a:pPr>
             <a:r>
-              <a:t>Limitations &amp; Future Roadmap</a:t>
+              <a:t>Faculty Supervisor Verification</a:t>
             </a:r>
           </a:p>
           <a:p>
@@ -6690,38 +9897,64 @@
               </a:defRPr>
             </a:pPr>
             <a:r>
-              <a:t>• Current Limitations:</a:t>
-            </a:r>
-          </a:p>
-          <a:p>
-            <a:pPr algn="l">
-              <a:defRPr sz="1100" b="0">
-                <a:solidFill>
-                  <a:srgbClr val="202020"/>
-                </a:solidFill>
-                <a:latin typeface="Times New Roman"/>
-              </a:defRPr>
-            </a:pPr>
-            <a:r>
-              <a:t>  - Sensitivity of static tree decision thresholds to cross-generator distribution shift.</a:t>
-            </a:r>
-          </a:p>
-          <a:p>
-            <a:pPr algn="l">
-              <a:defRPr sz="1100" b="0">
-                <a:solidFill>
-                  <a:srgbClr val="202020"/>
-                </a:solidFill>
-                <a:latin typeface="Times New Roman"/>
-              </a:defRPr>
-            </a:pPr>
-            <a:r>
-              <a:t>  - Post-transaction retrospective scope: ledger balance features depend on completed transactions; pre-authorization workflows require real-time velocity features.</a:t>
-            </a:r>
-          </a:p>
-          <a:p>
-            <a:pPr algn="l">
-              <a:defRPr sz="600" b="0">
+              <a:t>Project Guide:</a:t>
+            </a:r>
+          </a:p>
+          <a:p>
+            <a:pPr algn="l">
+              <a:defRPr sz="1400" b="1">
+                <a:solidFill>
+                  <a:srgbClr val="059669"/>
+                </a:solidFill>
+                <a:latin typeface="Times New Roman"/>
+              </a:defRPr>
+            </a:pPr>
+            <a:r>
+              <a:t>Dr. Erapaneni Gayatri</a:t>
+            </a:r>
+          </a:p>
+          <a:p>
+            <a:pPr algn="l">
+              <a:defRPr sz="1200" b="0">
+                <a:solidFill>
+                  <a:srgbClr val="202020"/>
+                </a:solidFill>
+                <a:latin typeface="Times New Roman"/>
+              </a:defRPr>
+            </a:pPr>
+            <a:r>
+              <a:t>Assistant Professor Sr. Grade 1</a:t>
+            </a:r>
+          </a:p>
+          <a:p>
+            <a:pPr algn="l">
+              <a:defRPr sz="1150" b="0">
+                <a:solidFill>
+                  <a:srgbClr val="555555"/>
+                </a:solidFill>
+                <a:latin typeface="Times New Roman"/>
+              </a:defRPr>
+            </a:pPr>
+            <a:r>
+              <a:t>School of Computer Science and Engineering (SCOPE)</a:t>
+            </a:r>
+          </a:p>
+          <a:p>
+            <a:pPr algn="l">
+              <a:defRPr sz="1150" b="0">
+                <a:solidFill>
+                  <a:srgbClr val="555555"/>
+                </a:solidFill>
+                <a:latin typeface="Times New Roman"/>
+              </a:defRPr>
+            </a:pPr>
+            <a:r>
+              <a:t>Vellore Institute of Technology, Vellore</a:t>
+            </a:r>
+          </a:p>
+          <a:p>
+            <a:pPr algn="l">
+              <a:defRPr sz="1000" b="0">
                 <a:solidFill>
                   <a:srgbClr val="202020"/>
                 </a:solidFill>
@@ -6733,1192 +9966,13 @@
             <a:pPr algn="l">
               <a:defRPr sz="1300" b="1">
                 <a:solidFill>
-                  <a:srgbClr val="202020"/>
-                </a:solidFill>
-                <a:latin typeface="Times New Roman"/>
-              </a:defRPr>
-            </a:pPr>
-            <a:r>
-              <a:t>• Future Research Roadmap:</a:t>
-            </a:r>
-          </a:p>
-          <a:p>
-            <a:pPr algn="l">
-              <a:defRPr sz="1100" b="0">
-                <a:solidFill>
-                  <a:srgbClr val="202020"/>
-                </a:solidFill>
-                <a:latin typeface="Times New Roman"/>
-              </a:defRPr>
-            </a:pPr>
-            <a:r>
-              <a:t>  - Graph Neural Networks (GNNs): Incorporate Relational Graph Convolutional Networks (R-GCNs) to detect money mule rings, collusion graphs, and synthetic identity networks.</a:t>
-            </a:r>
-          </a:p>
-          <a:p>
-            <a:pPr algn="l">
-              <a:defRPr sz="1100" b="0">
-                <a:solidFill>
-                  <a:srgbClr val="202020"/>
-                </a:solidFill>
-                <a:latin typeface="Times New Roman"/>
-              </a:defRPr>
-            </a:pPr>
-            <a:r>
-              <a:t>  - Adaptive Continual Retraining: Integrate online concept drift detectors (ADWIN, DDM) to trigger automated pipeline recalibration.</a:t>
-            </a:r>
-          </a:p>
-          <a:p>
-            <a:pPr algn="l">
-              <a:defRPr sz="1100" b="0">
-                <a:solidFill>
-                  <a:srgbClr val="202020"/>
-                </a:solidFill>
-                <a:latin typeface="Times New Roman"/>
-              </a:defRPr>
-            </a:pPr>
-            <a:r>
-              <a:t>  - Hardware Acceleration: Quantize deep models using ONNX Runtime and TensorRT to achieve sub-5 ms edge inference.</a:t>
-            </a:r>
-          </a:p>
-        </p:txBody>
-      </p:sp>
-    </p:spTree>
-    <p:extLst>
-      <p:ext uri="{BB962C8B-B14F-4D97-AF65-F5344CB8AC3E}">
-        <p14:creationId xmlns:p14="http://schemas.microsoft.com/office/powerpoint/2010/main" val="1317498737"/>
-      </p:ext>
-    </p:extLst>
-  </p:cSld>
-  <p:clrMapOvr>
-    <a:masterClrMapping/>
-  </p:clrMapOvr>
-</p:sld>
-</file>
-
-<file path=ppt/slides/slide13.xml><?xml version="1.0" encoding="utf-8"?>
-<p:sld xmlns:a="http://schemas.openxmlformats.org/drawingml/2006/main" xmlns:r="http://schemas.openxmlformats.org/officeDocument/2006/relationships" xmlns:p="http://schemas.openxmlformats.org/presentationml/2006/main">
-  <p:cSld>
-    <p:spTree>
-      <p:nvGrpSpPr>
-        <p:cNvPr id="1" name=""/>
-        <p:cNvGrpSpPr/>
-        <p:nvPr/>
-      </p:nvGrpSpPr>
-      <p:grpSpPr>
-        <a:xfrm>
-          <a:off x="0" y="0"/>
-          <a:ext cx="0" cy="0"/>
-          <a:chOff x="0" y="0"/>
-          <a:chExt cx="0" cy="0"/>
-        </a:xfrm>
-      </p:grpSpPr>
-      <p:sp>
-        <p:nvSpPr>
-          <p:cNvPr id="2" name="Title 1">
-            <a:extLst>
-              <a:ext uri="{FF2B5EF4-FFF2-40B4-BE49-F238E27FC236}">
-                <a16:creationId xmlns:a16="http://schemas.microsoft.com/office/drawing/2014/main" xmlns="" id="{751EE89F-6F96-DF9C-768A-8B2A7BEAD23D}"/>
-              </a:ext>
-            </a:extLst>
-          </p:cNvPr>
-          <p:cNvSpPr>
-            <a:spLocks noGrp="1"/>
-          </p:cNvSpPr>
-          <p:nvPr>
-            <p:ph type="title"/>
-          </p:nvPr>
-        </p:nvSpPr>
-        <p:spPr/>
-        <p:txBody>
-          <a:bodyPr/>
-          <a:lstStyle/>
-          <a:p>
-            <a:pPr>
-              <a:defRPr sz="2400" b="1">
-                <a:solidFill>
                   <a:srgbClr val="1F4E79"/>
                 </a:solidFill>
                 <a:latin typeface="Times New Roman"/>
               </a:defRPr>
             </a:pPr>
             <a:r>
-              <a:t>Outcomes Achieved</a:t>
-            </a:r>
-          </a:p>
-        </p:txBody>
-      </p:sp>
-      <p:sp>
-        <p:nvSpPr>
-          <p:cNvPr id="4" name="Date Placeholder 3">
-            <a:extLst>
-              <a:ext uri="{FF2B5EF4-FFF2-40B4-BE49-F238E27FC236}">
-                <a16:creationId xmlns:a16="http://schemas.microsoft.com/office/drawing/2014/main" xmlns="" id="{7F86E621-0A63-DDD2-60A0-511D9D7C817E}"/>
-              </a:ext>
-            </a:extLst>
-          </p:cNvPr>
-          <p:cNvSpPr>
-            <a:spLocks noGrp="1"/>
-          </p:cNvSpPr>
-          <p:nvPr>
-            <p:ph type="dt" sz="half" idx="10"/>
-          </p:nvPr>
-        </p:nvSpPr>
-        <p:spPr/>
-        <p:txBody>
-          <a:bodyPr/>
-          <a:lstStyle/>
-          <a:p>
-            <a:pPr>
-              <a:defRPr sz="1000">
-                <a:solidFill>
-                  <a:srgbClr val="555555"/>
-                </a:solidFill>
-                <a:latin typeface="Times New Roman"/>
-              </a:defRPr>
-            </a:pPr>
-            <a:r>
-              <a:t>28/10/26</a:t>
-            </a:r>
-            <a:endParaRPr lang="en-IN"/>
-          </a:p>
-        </p:txBody>
-      </p:sp>
-      <p:sp>
-        <p:nvSpPr>
-          <p:cNvPr id="5" name="Footer Placeholder 4">
-            <a:extLst>
-              <a:ext uri="{FF2B5EF4-FFF2-40B4-BE49-F238E27FC236}">
-                <a16:creationId xmlns:a16="http://schemas.microsoft.com/office/drawing/2014/main" xmlns="" id="{74966F66-9685-CC43-3B74-035A03CAF328}"/>
-              </a:ext>
-            </a:extLst>
-          </p:cNvPr>
-          <p:cNvSpPr>
-            <a:spLocks noGrp="1"/>
-          </p:cNvSpPr>
-          <p:nvPr>
-            <p:ph type="ftr" sz="quarter" idx="11"/>
-          </p:nvPr>
-        </p:nvSpPr>
-        <p:spPr/>
-        <p:txBody>
-          <a:bodyPr/>
-          <a:lstStyle/>
-          <a:p>
-            <a:pPr>
-              <a:defRPr sz="1000">
-                <a:solidFill>
-                  <a:srgbClr val="555555"/>
-                </a:solidFill>
-                <a:latin typeface="Times New Roman"/>
-              </a:defRPr>
-            </a:pPr>
-            <a:r>
-              <a:t>VIT SCOPE  |  BCSE497J Project-I</a:t>
-            </a:r>
-          </a:p>
-        </p:txBody>
-      </p:sp>
-      <p:sp>
-        <p:nvSpPr>
-          <p:cNvPr id="6" name="Slide Number Placeholder 5">
-            <a:extLst>
-              <a:ext uri="{FF2B5EF4-FFF2-40B4-BE49-F238E27FC236}">
-                <a16:creationId xmlns:a16="http://schemas.microsoft.com/office/drawing/2014/main" xmlns="" id="{32234F7B-54B7-5C34-9356-A94BE39E2151}"/>
-              </a:ext>
-            </a:extLst>
-          </p:cNvPr>
-          <p:cNvSpPr>
-            <a:spLocks noGrp="1"/>
-          </p:cNvSpPr>
-          <p:nvPr>
-            <p:ph type="sldNum" sz="quarter" idx="12"/>
-          </p:nvPr>
-        </p:nvSpPr>
-        <p:spPr/>
-        <p:txBody>
-          <a:bodyPr/>
-          <a:lstStyle/>
-          <a:p>
-            <a:fld id="{65201FD4-9D8D-4491-815B-63C7BF4F0034}" type="slidenum">
-              <a:rPr lang="en-IN" smtClean="0"/>
-              <a:t>13</a:t>
-            </a:fld>
-            <a:endParaRPr lang="en-IN"/>
-          </a:p>
-        </p:txBody>
-      </p:sp>
-      <p:sp>
-        <p:nvSpPr>
-          <p:cNvPr id="7" name="Rounded Rectangle 6"/>
-          <p:cNvSpPr/>
-          <p:nvPr/>
-        </p:nvSpPr>
-        <p:spPr>
-          <a:xfrm>
-            <a:off x="731520" y="1645920"/>
-            <a:ext cx="10698480" cy="4389120"/>
-          </a:xfrm>
-          <a:prstGeom prst="roundRect">
-            <a:avLst/>
-          </a:prstGeom>
-          <a:solidFill>
-            <a:srgbClr val="F4F7FA"/>
-          </a:solidFill>
-          <a:ln w="12700">
-            <a:solidFill>
-              <a:srgbClr val="CBD5E0"/>
-            </a:solidFill>
-          </a:ln>
-        </p:spPr>
-        <p:style>
-          <a:lnRef idx="1">
-            <a:schemeClr val="accent1"/>
-          </a:lnRef>
-          <a:fillRef idx="3">
-            <a:schemeClr val="accent1"/>
-          </a:fillRef>
-          <a:effectRef idx="2">
-            <a:schemeClr val="accent1"/>
-          </a:effectRef>
-          <a:fontRef idx="minor">
-            <a:schemeClr val="lt1"/>
-          </a:fontRef>
-        </p:style>
-        <p:txBody>
-          <a:bodyPr rtlCol="0" anchor="ctr"/>
-          <a:lstStyle/>
-          <a:p>
-            <a:pPr algn="ctr"/>
-          </a:p>
-        </p:txBody>
-      </p:sp>
-      <p:sp>
-        <p:nvSpPr>
-          <p:cNvPr id="8" name="TextBox 7"/>
-          <p:cNvSpPr txBox="1"/>
-          <p:nvPr/>
-        </p:nvSpPr>
-        <p:spPr>
-          <a:xfrm>
-            <a:off x="914400" y="1737360"/>
-            <a:ext cx="10332720" cy="4114800"/>
-          </a:xfrm>
-          <a:prstGeom prst="rect">
-            <a:avLst/>
-          </a:prstGeom>
-          <a:noFill/>
-        </p:spPr>
-        <p:txBody>
-          <a:bodyPr wrap="square">
-            <a:spAutoFit/>
-          </a:bodyPr>
-          <a:lstStyle/>
-          <a:p>
-            <a:pPr algn="l">
-              <a:defRPr sz="1600" b="1">
-                <a:solidFill>
-                  <a:srgbClr val="1F4E79"/>
-                </a:solidFill>
-                <a:latin typeface="Times New Roman"/>
-              </a:defRPr>
-            </a:pPr>
-            <a:r>
-              <a:t>Tangible Project Outcomes &amp; Verified Deliverables</a:t>
-            </a:r>
-          </a:p>
-          <a:p>
-            <a:pPr algn="l">
-              <a:defRPr sz="600" b="0">
-                <a:solidFill>
-                  <a:srgbClr val="202020"/>
-                </a:solidFill>
-                <a:latin typeface="Times New Roman"/>
-              </a:defRPr>
-            </a:pPr>
-          </a:p>
-          <a:p>
-            <a:pPr algn="l">
-              <a:defRPr sz="1400" b="1">
-                <a:solidFill>
-                  <a:srgbClr val="059669"/>
-                </a:solidFill>
-                <a:latin typeface="Times New Roman"/>
-              </a:defRPr>
-            </a:pPr>
-            <a:r>
-              <a:t>1. Enterprise-Hardened Software Product &amp; Cloud Microservice:</a:t>
-            </a:r>
-          </a:p>
-          <a:p>
-            <a:pPr algn="l">
-              <a:defRPr sz="1200" b="0">
-                <a:solidFill>
-                  <a:srgbClr val="202020"/>
-                </a:solidFill>
-                <a:latin typeface="Times New Roman"/>
-              </a:defRPr>
-            </a:pPr>
-            <a:r>
-              <a:t>• Containerized FastAPI microservice with interactive multi-tenant Streamlit analyst workspace and Apache Kafka streaming engine.</a:t>
-            </a:r>
-          </a:p>
-          <a:p>
-            <a:pPr algn="l">
-              <a:defRPr sz="1200" b="0">
-                <a:solidFill>
-                  <a:srgbClr val="202020"/>
-                </a:solidFill>
-                <a:latin typeface="Times New Roman"/>
-              </a:defRPr>
-            </a:pPr>
-            <a:r>
-              <a:t>• Multi-container Docker Compose architecture (api, kafka, zookeeper, redis, prometheus) with strict deployment secret enforcement.</a:t>
-            </a:r>
-          </a:p>
-          <a:p>
-            <a:pPr algn="l">
-              <a:defRPr sz="1200" b="0">
-                <a:solidFill>
-                  <a:srgbClr val="202020"/>
-                </a:solidFill>
-                <a:latin typeface="Times New Roman"/>
-              </a:defRPr>
-            </a:pPr>
-            <a:r>
-              <a:t>• Verified against an exhaustive 104-test automated unit, integration, and security regression suite (100% PASS rate).</a:t>
-            </a:r>
-          </a:p>
-          <a:p>
-            <a:pPr algn="l">
-              <a:defRPr sz="800" b="0">
-                <a:solidFill>
-                  <a:srgbClr val="202020"/>
-                </a:solidFill>
-                <a:latin typeface="Times New Roman"/>
-              </a:defRPr>
-            </a:pPr>
-          </a:p>
-          <a:p>
-            <a:pPr algn="l">
-              <a:defRPr sz="1400" b="1">
-                <a:solidFill>
-                  <a:srgbClr val="059669"/>
-                </a:solidFill>
-                <a:latin typeface="Times New Roman"/>
-              </a:defRPr>
-            </a:pPr>
-            <a:r>
-              <a:t>2. Open-Source Codebase &amp; Reproducible Artifacts:</a:t>
-            </a:r>
-          </a:p>
-          <a:p>
-            <a:pPr algn="l">
-              <a:defRPr sz="1200" b="0">
-                <a:solidFill>
-                  <a:srgbClr val="202020"/>
-                </a:solidFill>
-                <a:latin typeface="Times New Roman"/>
-              </a:defRPr>
-            </a:pPr>
-            <a:r>
-              <a:t>• Public GitHub Repository: https://github.com/animeshlabh57-rgb/AI-Based-Financial-Fraud-Detection-System</a:t>
-            </a:r>
-          </a:p>
-          <a:p>
-            <a:pPr algn="l">
-              <a:defRPr sz="1200" b="0">
-                <a:solidFill>
-                  <a:srgbClr val="202020"/>
-                </a:solidFill>
-                <a:latin typeface="Times New Roman"/>
-              </a:defRPr>
-            </a:pPr>
-            <a:r>
-              <a:t>• Full modular Python source code, trained model weights, evaluation benchmark scripts, and Docker orchestrations.</a:t>
-            </a:r>
-          </a:p>
-          <a:p>
-            <a:pPr algn="l">
-              <a:defRPr sz="800" b="0">
-                <a:solidFill>
-                  <a:srgbClr val="202020"/>
-                </a:solidFill>
-                <a:latin typeface="Times New Roman"/>
-              </a:defRPr>
-            </a:pPr>
-          </a:p>
-          <a:p>
-            <a:pPr algn="l">
-              <a:defRPr sz="1400" b="1">
-                <a:solidFill>
-                  <a:srgbClr val="059669"/>
-                </a:solidFill>
-                <a:latin typeface="Times New Roman"/>
-              </a:defRPr>
-            </a:pPr>
-            <a:r>
-              <a:t>3. Academic Research Deliverables &amp; Technical Documentation:</a:t>
-            </a:r>
-          </a:p>
-          <a:p>
-            <a:pPr algn="l">
-              <a:defRPr sz="1200" b="0">
-                <a:solidFill>
-                  <a:srgbClr val="202020"/>
-                </a:solidFill>
-                <a:latin typeface="Times New Roman"/>
-              </a:defRPr>
-            </a:pPr>
-            <a:r>
-              <a:t>• Comprehensive 41-page B.Tech Project-I Academic Project Report (BCSE497J) prepared according to VIT IEEE formatting standards.</a:t>
-            </a:r>
-          </a:p>
-          <a:p>
-            <a:pPr algn="l">
-              <a:defRPr sz="1200" b="0">
-                <a:solidFill>
-                  <a:srgbClr val="202020"/>
-                </a:solidFill>
-                <a:latin typeface="Times New Roman"/>
-              </a:defRPr>
-            </a:pPr>
-            <a:r>
-              <a:t>• Target: Submission to a Scopus-indexed conference / journal in Financial Machine Learning &amp; Security.</a:t>
-            </a:r>
-          </a:p>
-        </p:txBody>
-      </p:sp>
-    </p:spTree>
-    <p:extLst>
-      <p:ext uri="{BB962C8B-B14F-4D97-AF65-F5344CB8AC3E}">
-        <p14:creationId xmlns:p14="http://schemas.microsoft.com/office/powerpoint/2010/main" val="4071570719"/>
-      </p:ext>
-    </p:extLst>
-  </p:cSld>
-  <p:clrMapOvr>
-    <a:masterClrMapping/>
-  </p:clrMapOvr>
-</p:sld>
-</file>
-
-<file path=ppt/slides/slide14.xml><?xml version="1.0" encoding="utf-8"?>
-<p:sld xmlns:a="http://schemas.openxmlformats.org/drawingml/2006/main" xmlns:r="http://schemas.openxmlformats.org/officeDocument/2006/relationships" xmlns:p="http://schemas.openxmlformats.org/presentationml/2006/main">
-  <p:cSld>
-    <p:spTree>
-      <p:nvGrpSpPr>
-        <p:cNvPr id="1" name="">
-          <a:extLst>
-            <a:ext uri="{FF2B5EF4-FFF2-40B4-BE49-F238E27FC236}">
-              <a16:creationId xmlns:a16="http://schemas.microsoft.com/office/drawing/2014/main" xmlns="" id="{2F70E1A0-FA4A-8258-6E10-9F00EDC0BC8B}"/>
-            </a:ext>
-          </a:extLst>
-        </p:cNvPr>
-        <p:cNvGrpSpPr/>
-        <p:nvPr/>
-      </p:nvGrpSpPr>
-      <p:grpSpPr>
-        <a:xfrm>
-          <a:off x="0" y="0"/>
-          <a:ext cx="0" cy="0"/>
-          <a:chOff x="0" y="0"/>
-          <a:chExt cx="0" cy="0"/>
-        </a:xfrm>
-      </p:grpSpPr>
-      <p:sp>
-        <p:nvSpPr>
-          <p:cNvPr id="4" name="object 2">
-            <a:extLst>
-              <a:ext uri="{FF2B5EF4-FFF2-40B4-BE49-F238E27FC236}">
-                <a16:creationId xmlns:a16="http://schemas.microsoft.com/office/drawing/2014/main" xmlns="" id="{7CFC0C65-61CC-E657-43F7-99C8E5362448}"/>
-              </a:ext>
-            </a:extLst>
-          </p:cNvPr>
-          <p:cNvSpPr txBox="1">
-            <a:spLocks noGrp="1"/>
-          </p:cNvSpPr>
-          <p:nvPr>
-            <p:ph type="title"/>
-          </p:nvPr>
-        </p:nvSpPr>
-        <p:spPr>
-          <a:xfrm>
-            <a:off x="460248" y="681037"/>
-            <a:ext cx="10515600" cy="576696"/>
-          </a:xfrm>
-          <a:prstGeom prst="rect">
-            <a:avLst/>
-          </a:prstGeom>
-        </p:spPr>
-        <p:txBody>
-          <a:bodyPr vert="horz" wrap="square" lIns="0" tIns="113919" rIns="0" bIns="0" rtlCol="0">
-            <a:spAutoFit/>
-          </a:bodyPr>
-          <a:lstStyle/>
-          <a:p>
-            <a:pPr marL="486409">
-              <a:lnSpc>
-                <a:spcPct val="100000"/>
-              </a:lnSpc>
-              <a:spcBef>
-                <a:spcPts val="130"/>
-              </a:spcBef>
-              <a:defRPr sz="2400" b="1">
-                <a:solidFill>
-                  <a:srgbClr val="1F4E79"/>
-                </a:solidFill>
-                <a:latin typeface="Times New Roman"/>
-              </a:defRPr>
-            </a:pPr>
-            <a:r>
-              <a:t>References</a:t>
-            </a:r>
-            <a:endParaRPr sz="3000" b="1" dirty="0">
-              <a:latin typeface="Times New Roman" panose="02020603050405020304" pitchFamily="18" charset="0"/>
-              <a:cs typeface="Times New Roman" panose="02020603050405020304" pitchFamily="18" charset="0"/>
-            </a:endParaRPr>
-          </a:p>
-        </p:txBody>
-      </p:sp>
-      <p:sp>
-        <p:nvSpPr>
-          <p:cNvPr id="5" name="Date Placeholder 4">
-            <a:extLst>
-              <a:ext uri="{FF2B5EF4-FFF2-40B4-BE49-F238E27FC236}">
-                <a16:creationId xmlns:a16="http://schemas.microsoft.com/office/drawing/2014/main" xmlns="" id="{B732D3DB-7149-E1E5-D5F9-4FC93A788894}"/>
-              </a:ext>
-            </a:extLst>
-          </p:cNvPr>
-          <p:cNvSpPr>
-            <a:spLocks noGrp="1"/>
-          </p:cNvSpPr>
-          <p:nvPr>
-            <p:ph type="dt" sz="half" idx="10"/>
-          </p:nvPr>
-        </p:nvSpPr>
-        <p:spPr/>
-        <p:txBody>
-          <a:bodyPr/>
-          <a:lstStyle/>
-          <a:p>
-            <a:pPr>
-              <a:defRPr sz="1000">
-                <a:solidFill>
-                  <a:srgbClr val="555555"/>
-                </a:solidFill>
-                <a:latin typeface="Times New Roman"/>
-              </a:defRPr>
-            </a:pPr>
-            <a:r>
-              <a:t>28/10/26</a:t>
-            </a:r>
-            <a:endParaRPr lang="en-IN"/>
-          </a:p>
-        </p:txBody>
-      </p:sp>
-      <p:sp>
-        <p:nvSpPr>
-          <p:cNvPr id="6" name="Footer Placeholder 5">
-            <a:extLst>
-              <a:ext uri="{FF2B5EF4-FFF2-40B4-BE49-F238E27FC236}">
-                <a16:creationId xmlns:a16="http://schemas.microsoft.com/office/drawing/2014/main" xmlns="" id="{CEBCABB1-7C63-52E3-2815-3651AE7E9F7B}"/>
-              </a:ext>
-            </a:extLst>
-          </p:cNvPr>
-          <p:cNvSpPr>
-            <a:spLocks noGrp="1"/>
-          </p:cNvSpPr>
-          <p:nvPr>
-            <p:ph type="ftr" sz="quarter" idx="11"/>
-          </p:nvPr>
-        </p:nvSpPr>
-        <p:spPr/>
-        <p:txBody>
-          <a:bodyPr/>
-          <a:lstStyle/>
-          <a:p>
-            <a:pPr>
-              <a:defRPr sz="1000">
-                <a:solidFill>
-                  <a:srgbClr val="555555"/>
-                </a:solidFill>
-                <a:latin typeface="Times New Roman"/>
-              </a:defRPr>
-            </a:pPr>
-            <a:r>
-              <a:t>VIT SCOPE  |  BCSE497J Project-I</a:t>
-            </a:r>
-          </a:p>
-        </p:txBody>
-      </p:sp>
-      <p:sp>
-        <p:nvSpPr>
-          <p:cNvPr id="7" name="Slide Number Placeholder 6">
-            <a:extLst>
-              <a:ext uri="{FF2B5EF4-FFF2-40B4-BE49-F238E27FC236}">
-                <a16:creationId xmlns:a16="http://schemas.microsoft.com/office/drawing/2014/main" xmlns="" id="{E431EAEC-BCE3-2979-69C6-273309B9FFA7}"/>
-              </a:ext>
-            </a:extLst>
-          </p:cNvPr>
-          <p:cNvSpPr>
-            <a:spLocks noGrp="1"/>
-          </p:cNvSpPr>
-          <p:nvPr>
-            <p:ph type="sldNum" sz="quarter" idx="12"/>
-          </p:nvPr>
-        </p:nvSpPr>
-        <p:spPr/>
-        <p:txBody>
-          <a:bodyPr/>
-          <a:lstStyle/>
-          <a:p>
-            <a:fld id="{65201FD4-9D8D-4491-815B-63C7BF4F0034}" type="slidenum">
-              <a:rPr lang="en-IN" smtClean="0"/>
-              <a:t>14</a:t>
-            </a:fld>
-            <a:endParaRPr lang="en-IN"/>
-          </a:p>
-        </p:txBody>
-      </p:sp>
-      <p:sp>
-        <p:nvSpPr>
-          <p:cNvPr id="8" name="Rounded Rectangle 7"/>
-          <p:cNvSpPr/>
-          <p:nvPr/>
-        </p:nvSpPr>
-        <p:spPr>
-          <a:xfrm>
-            <a:off x="731520" y="1645920"/>
-            <a:ext cx="10698480" cy="4389120"/>
-          </a:xfrm>
-          <a:prstGeom prst="roundRect">
-            <a:avLst/>
-          </a:prstGeom>
-          <a:solidFill>
-            <a:srgbClr val="F4F7FA"/>
-          </a:solidFill>
-          <a:ln w="12700">
-            <a:solidFill>
-              <a:srgbClr val="CBD5E0"/>
-            </a:solidFill>
-          </a:ln>
-        </p:spPr>
-        <p:style>
-          <a:lnRef idx="1">
-            <a:schemeClr val="accent1"/>
-          </a:lnRef>
-          <a:fillRef idx="3">
-            <a:schemeClr val="accent1"/>
-          </a:fillRef>
-          <a:effectRef idx="2">
-            <a:schemeClr val="accent1"/>
-          </a:effectRef>
-          <a:fontRef idx="minor">
-            <a:schemeClr val="lt1"/>
-          </a:fontRef>
-        </p:style>
-        <p:txBody>
-          <a:bodyPr rtlCol="0" anchor="ctr"/>
-          <a:lstStyle/>
-          <a:p>
-            <a:pPr algn="ctr"/>
-          </a:p>
-        </p:txBody>
-      </p:sp>
-      <p:sp>
-        <p:nvSpPr>
-          <p:cNvPr id="9" name="TextBox 8"/>
-          <p:cNvSpPr txBox="1"/>
-          <p:nvPr/>
-        </p:nvSpPr>
-        <p:spPr>
-          <a:xfrm>
-            <a:off x="914400" y="1737360"/>
-            <a:ext cx="10332720" cy="4114800"/>
-          </a:xfrm>
-          <a:prstGeom prst="rect">
-            <a:avLst/>
-          </a:prstGeom>
-          <a:noFill/>
-        </p:spPr>
-        <p:txBody>
-          <a:bodyPr wrap="square">
-            <a:spAutoFit/>
-          </a:bodyPr>
-          <a:lstStyle/>
-          <a:p>
-            <a:pPr algn="l">
-              <a:defRPr sz="1050" b="0">
-                <a:solidFill>
-                  <a:srgbClr val="202020"/>
-                </a:solidFill>
-                <a:latin typeface="Times New Roman"/>
-              </a:defRPr>
-            </a:pPr>
-            <a:r>
-              <a:t>[1] A. Dal Pozzolo, G. Boracchi, O. Caelen, et al., 'Credit card fraud detection: A realistic modeling and a novel learning strategy,' IEEE Trans. Neural Netw. Learn. Syst., vol. 29, no. 8, pp. 3784–3797, Aug. 2018.</a:t>
-            </a:r>
-          </a:p>
-          <a:p>
-            <a:pPr algn="l">
-              <a:defRPr sz="300" b="0">
-                <a:solidFill>
-                  <a:srgbClr val="202020"/>
-                </a:solidFill>
-                <a:latin typeface="Times New Roman"/>
-              </a:defRPr>
-            </a:pPr>
-          </a:p>
-          <a:p>
-            <a:pPr algn="l">
-              <a:defRPr sz="1050" b="0">
-                <a:solidFill>
-                  <a:srgbClr val="202020"/>
-                </a:solidFill>
-                <a:latin typeface="Times New Roman"/>
-              </a:defRPr>
-            </a:pPr>
-            <a:r>
-              <a:t>[2] A. Dal Pozzolo, O. Caelen, R. A. Johnson, and G. Bontempi, 'Calibrating probability with undersampling for unbalanced classification,' in Proc. IEEE SSCI, 2015, pp. 159–166.</a:t>
-            </a:r>
-          </a:p>
-          <a:p>
-            <a:pPr algn="l">
-              <a:defRPr sz="300" b="0">
-                <a:solidFill>
-                  <a:srgbClr val="202020"/>
-                </a:solidFill>
-                <a:latin typeface="Times New Roman"/>
-              </a:defRPr>
-            </a:pPr>
-          </a:p>
-          <a:p>
-            <a:pPr algn="l">
-              <a:defRPr sz="1050" b="0">
-                <a:solidFill>
-                  <a:srgbClr val="202020"/>
-                </a:solidFill>
-                <a:latin typeface="Times New Roman"/>
-              </a:defRPr>
-            </a:pPr>
-            <a:r>
-              <a:t>[3] N. V. Chawla, K. W. Bowyer, L. O. Hall, and W. P. Kegelmeyer, 'SMOTE: Synthetic minority over-sampling technique,' J. Artif. Intell. Res., vol. 16, pp. 321–357, 2002.</a:t>
-            </a:r>
-          </a:p>
-          <a:p>
-            <a:pPr algn="l">
-              <a:defRPr sz="300" b="0">
-                <a:solidFill>
-                  <a:srgbClr val="202020"/>
-                </a:solidFill>
-                <a:latin typeface="Times New Roman"/>
-              </a:defRPr>
-            </a:pPr>
-          </a:p>
-          <a:p>
-            <a:pPr algn="l">
-              <a:defRPr sz="1050" b="0">
-                <a:solidFill>
-                  <a:srgbClr val="202020"/>
-                </a:solidFill>
-                <a:latin typeface="Times New Roman"/>
-              </a:defRPr>
-            </a:pPr>
-            <a:r>
-              <a:t>[4] A. Pumsirirat and L. Yan, 'Credit card fraud detection using deep learning based on auto-encoder and restricted Boltzmann machine,' Int. J. Adv. Comput. Sci. Appl., vol. 9, no. 1, pp. 18–25, 2018.</a:t>
-            </a:r>
-          </a:p>
-          <a:p>
-            <a:pPr algn="l">
-              <a:defRPr sz="300" b="0">
-                <a:solidFill>
-                  <a:srgbClr val="202020"/>
-                </a:solidFill>
-                <a:latin typeface="Times New Roman"/>
-              </a:defRPr>
-            </a:pPr>
-          </a:p>
-          <a:p>
-            <a:pPr algn="l">
-              <a:defRPr sz="1050" b="0">
-                <a:solidFill>
-                  <a:srgbClr val="202020"/>
-                </a:solidFill>
-                <a:latin typeface="Times New Roman"/>
-              </a:defRPr>
-            </a:pPr>
-            <a:r>
-              <a:t>[5] L. Breiman, 'Random forests,' Mach. Learn., vol. 45, no. 1, pp. 5–32, 2001.</a:t>
-            </a:r>
-          </a:p>
-          <a:p>
-            <a:pPr algn="l">
-              <a:defRPr sz="300" b="0">
-                <a:solidFill>
-                  <a:srgbClr val="202020"/>
-                </a:solidFill>
-                <a:latin typeface="Times New Roman"/>
-              </a:defRPr>
-            </a:pPr>
-          </a:p>
-          <a:p>
-            <a:pPr algn="l">
-              <a:defRPr sz="1050" b="0">
-                <a:solidFill>
-                  <a:srgbClr val="202020"/>
-                </a:solidFill>
-                <a:latin typeface="Times New Roman"/>
-              </a:defRPr>
-            </a:pPr>
-            <a:r>
-              <a:t>[6] T. Chen and C. Guestrin, 'XGBoost: A scalable tree boosting system,' in Proc. 22nd ACM SIGKDD, 2016, pp. 785–794.</a:t>
-            </a:r>
-          </a:p>
-          <a:p>
-            <a:pPr algn="l">
-              <a:defRPr sz="300" b="0">
-                <a:solidFill>
-                  <a:srgbClr val="202020"/>
-                </a:solidFill>
-                <a:latin typeface="Times New Roman"/>
-              </a:defRPr>
-            </a:pPr>
-          </a:p>
-          <a:p>
-            <a:pPr algn="l">
-              <a:defRPr sz="1050" b="0">
-                <a:solidFill>
-                  <a:srgbClr val="202020"/>
-                </a:solidFill>
-                <a:latin typeface="Times New Roman"/>
-              </a:defRPr>
-            </a:pPr>
-            <a:r>
-              <a:t>[7] S. M. Lundberg et al., 'From local explanations to global understanding with explainable AI for trees,' Nature Mach. Intell., vol. 2, no. 1, pp. 56–67, 2020.</a:t>
-            </a:r>
-          </a:p>
-          <a:p>
-            <a:pPr algn="l">
-              <a:defRPr sz="300" b="0">
-                <a:solidFill>
-                  <a:srgbClr val="202020"/>
-                </a:solidFill>
-                <a:latin typeface="Times New Roman"/>
-              </a:defRPr>
-            </a:pPr>
-          </a:p>
-          <a:p>
-            <a:pPr algn="l">
-              <a:defRPr sz="1050" b="0">
-                <a:solidFill>
-                  <a:srgbClr val="202020"/>
-                </a:solidFill>
-                <a:latin typeface="Times New Roman"/>
-              </a:defRPr>
-            </a:pPr>
-            <a:r>
-              <a:t>[8] T. Saito and M. Rehmsmeier, 'The precision-recall plot is more informative than the ROC plot when evaluating binary classifiers on imbalanced datasets,' PLOS ONE, vol. 10, no. 3, e0118432, 2015.</a:t>
-            </a:r>
-          </a:p>
-          <a:p>
-            <a:pPr algn="l">
-              <a:defRPr sz="300" b="0">
-                <a:solidFill>
-                  <a:srgbClr val="202020"/>
-                </a:solidFill>
-                <a:latin typeface="Times New Roman"/>
-              </a:defRPr>
-            </a:pPr>
-          </a:p>
-        </p:txBody>
-      </p:sp>
-    </p:spTree>
-    <p:extLst>
-      <p:ext uri="{BB962C8B-B14F-4D97-AF65-F5344CB8AC3E}">
-        <p14:creationId xmlns:p14="http://schemas.microsoft.com/office/powerpoint/2010/main" val="3510526248"/>
-      </p:ext>
-    </p:extLst>
-  </p:cSld>
-  <p:clrMapOvr>
-    <a:masterClrMapping/>
-  </p:clrMapOvr>
-</p:sld>
-</file>
-
-<file path=ppt/slides/slide2.xml><?xml version="1.0" encoding="utf-8"?>
-<p:sld xmlns:a="http://schemas.openxmlformats.org/drawingml/2006/main" xmlns:r="http://schemas.openxmlformats.org/officeDocument/2006/relationships" xmlns:p="http://schemas.openxmlformats.org/presentationml/2006/main">
-  <p:cSld>
-    <p:spTree>
-      <p:nvGrpSpPr>
-        <p:cNvPr id="1" name=""/>
-        <p:cNvGrpSpPr/>
-        <p:nvPr/>
-      </p:nvGrpSpPr>
-      <p:grpSpPr>
-        <a:xfrm>
-          <a:off x="0" y="0"/>
-          <a:ext cx="0" cy="0"/>
-          <a:chOff x="0" y="0"/>
-          <a:chExt cx="0" cy="0"/>
-        </a:xfrm>
-      </p:grpSpPr>
-      <p:sp>
-        <p:nvSpPr>
-          <p:cNvPr id="2" name="Title 1">
-            <a:extLst>
-              <a:ext uri="{FF2B5EF4-FFF2-40B4-BE49-F238E27FC236}">
-                <a16:creationId xmlns:a16="http://schemas.microsoft.com/office/drawing/2014/main" xmlns="" id="{A6ACBE13-A9D6-9564-DA47-597E38E09F70}"/>
-              </a:ext>
-            </a:extLst>
-          </p:cNvPr>
-          <p:cNvSpPr>
-            <a:spLocks noGrp="1"/>
-          </p:cNvSpPr>
-          <p:nvPr>
-            <p:ph type="title"/>
-          </p:nvPr>
-        </p:nvSpPr>
-        <p:spPr/>
-        <p:txBody>
-          <a:bodyPr>
-            <a:normAutofit/>
-          </a:bodyPr>
-          <a:lstStyle/>
-          <a:p>
-            <a:pPr>
-              <a:defRPr sz="2400" b="1">
-                <a:solidFill>
-                  <a:srgbClr val="1F4E79"/>
-                </a:solidFill>
-                <a:latin typeface="Times New Roman"/>
-              </a:defRPr>
-            </a:pPr>
-            <a:r>
-              <a:t>Approval Mail From Guide</a:t>
-            </a:r>
-          </a:p>
-        </p:txBody>
-      </p:sp>
-      <p:sp>
-        <p:nvSpPr>
-          <p:cNvPr id="4" name="Date Placeholder 3">
-            <a:extLst>
-              <a:ext uri="{FF2B5EF4-FFF2-40B4-BE49-F238E27FC236}">
-                <a16:creationId xmlns:a16="http://schemas.microsoft.com/office/drawing/2014/main" xmlns="" id="{C7827C50-3ED3-2DB6-C227-6784C6CA9E30}"/>
-              </a:ext>
-            </a:extLst>
-          </p:cNvPr>
-          <p:cNvSpPr>
-            <a:spLocks noGrp="1"/>
-          </p:cNvSpPr>
-          <p:nvPr>
-            <p:ph type="dt" sz="half" idx="10"/>
-          </p:nvPr>
-        </p:nvSpPr>
-        <p:spPr/>
-        <p:txBody>
-          <a:bodyPr/>
-          <a:lstStyle/>
-          <a:p>
-            <a:pPr>
-              <a:defRPr sz="1000">
-                <a:solidFill>
-                  <a:srgbClr val="555555"/>
-                </a:solidFill>
-                <a:latin typeface="Times New Roman"/>
-              </a:defRPr>
-            </a:pPr>
-            <a:r>
-              <a:t>28/10/26</a:t>
-            </a:r>
-            <a:endParaRPr lang="en-IN" dirty="0"/>
-          </a:p>
-        </p:txBody>
-      </p:sp>
-      <p:sp>
-        <p:nvSpPr>
-          <p:cNvPr id="5" name="Footer Placeholder 4">
-            <a:extLst>
-              <a:ext uri="{FF2B5EF4-FFF2-40B4-BE49-F238E27FC236}">
-                <a16:creationId xmlns:a16="http://schemas.microsoft.com/office/drawing/2014/main" xmlns="" id="{56664170-792F-28F8-1C31-5F7A8D69F97E}"/>
-              </a:ext>
-            </a:extLst>
-          </p:cNvPr>
-          <p:cNvSpPr>
-            <a:spLocks noGrp="1"/>
-          </p:cNvSpPr>
-          <p:nvPr>
-            <p:ph type="ftr" sz="quarter" idx="11"/>
-          </p:nvPr>
-        </p:nvSpPr>
-        <p:spPr/>
-        <p:txBody>
-          <a:bodyPr/>
-          <a:lstStyle/>
-          <a:p>
-            <a:pPr>
-              <a:defRPr sz="1000">
-                <a:solidFill>
-                  <a:srgbClr val="555555"/>
-                </a:solidFill>
-                <a:latin typeface="Times New Roman"/>
-              </a:defRPr>
-            </a:pPr>
-            <a:r>
-              <a:t>VIT SCOPE  |  BCSE497J Project-I</a:t>
-            </a:r>
-          </a:p>
-        </p:txBody>
-      </p:sp>
-      <p:sp>
-        <p:nvSpPr>
-          <p:cNvPr id="6" name="Slide Number Placeholder 5">
-            <a:extLst>
-              <a:ext uri="{FF2B5EF4-FFF2-40B4-BE49-F238E27FC236}">
-                <a16:creationId xmlns:a16="http://schemas.microsoft.com/office/drawing/2014/main" xmlns="" id="{EE16528B-72DB-0275-6A94-33ABB5CD7075}"/>
-              </a:ext>
-            </a:extLst>
-          </p:cNvPr>
-          <p:cNvSpPr>
-            <a:spLocks noGrp="1"/>
-          </p:cNvSpPr>
-          <p:nvPr>
-            <p:ph type="sldNum" sz="quarter" idx="12"/>
-          </p:nvPr>
-        </p:nvSpPr>
-        <p:spPr/>
-        <p:txBody>
-          <a:bodyPr/>
-          <a:lstStyle/>
-          <a:p>
-            <a:fld id="{65201FD4-9D8D-4491-815B-63C7BF4F0034}" type="slidenum">
-              <a:rPr lang="en-IN" smtClean="0"/>
-              <a:t>2</a:t>
-            </a:fld>
-            <a:endParaRPr lang="en-IN"/>
-          </a:p>
-        </p:txBody>
-      </p:sp>
-      <p:pic>
-        <p:nvPicPr>
-          <p:cNvPr id="7" name="Picture 6" descr="Screen Shot 2026-10-05 at 11.12.42 AM.png"/>
-          <p:cNvPicPr>
-            <a:picLocks noChangeAspect="1"/>
-          </p:cNvPicPr>
-          <p:nvPr/>
-        </p:nvPicPr>
-        <p:blipFill>
-          <a:blip r:embed="rId2">
-            <a:extLst>
-              <a:ext uri="{28A0092B-C50C-407E-A947-70E740481C1C}">
-                <a14:useLocalDpi xmlns:a14="http://schemas.microsoft.com/office/drawing/2010/main" val="0"/>
-              </a:ext>
-            </a:extLst>
-          </a:blip>
-          <a:stretch>
-            <a:fillRect/>
-          </a:stretch>
-        </p:blipFill>
-        <p:spPr>
-          <a:xfrm>
-            <a:off x="7132320" y="1645920"/>
-            <a:ext cx="4297680" cy="4389120"/>
-          </a:xfrm>
-          <a:prstGeom prst="rect">
-            <a:avLst/>
-          </a:prstGeom>
-        </p:spPr>
-      </p:pic>
-      <p:sp>
-        <p:nvSpPr>
-          <p:cNvPr id="8" name="Rounded Rectangle 7"/>
-          <p:cNvSpPr/>
-          <p:nvPr/>
-        </p:nvSpPr>
-        <p:spPr>
-          <a:xfrm>
-            <a:off x="731520" y="1645920"/>
-            <a:ext cx="6217920" cy="4389120"/>
-          </a:xfrm>
-          <a:prstGeom prst="roundRect">
-            <a:avLst/>
-          </a:prstGeom>
-          <a:solidFill>
-            <a:srgbClr val="F4F7FA"/>
-          </a:solidFill>
-          <a:ln w="12700">
-            <a:solidFill>
-              <a:srgbClr val="CBD5E0"/>
-            </a:solidFill>
-          </a:ln>
-        </p:spPr>
-        <p:style>
-          <a:lnRef idx="1">
-            <a:schemeClr val="accent1"/>
-          </a:lnRef>
-          <a:fillRef idx="3">
-            <a:schemeClr val="accent1"/>
-          </a:fillRef>
-          <a:effectRef idx="2">
-            <a:schemeClr val="accent1"/>
-          </a:effectRef>
-          <a:fontRef idx="minor">
-            <a:schemeClr val="lt1"/>
-          </a:fontRef>
-        </p:style>
-        <p:txBody>
-          <a:bodyPr rtlCol="0" anchor="ctr"/>
-          <a:lstStyle/>
-          <a:p>
-            <a:pPr algn="ctr"/>
-          </a:p>
-        </p:txBody>
-      </p:sp>
-      <p:sp>
-        <p:nvSpPr>
-          <p:cNvPr id="9" name="TextBox 8"/>
-          <p:cNvSpPr txBox="1"/>
-          <p:nvPr/>
-        </p:nvSpPr>
-        <p:spPr>
-          <a:xfrm>
-            <a:off x="868680" y="1737360"/>
-            <a:ext cx="5943600" cy="4114800"/>
-          </a:xfrm>
-          <a:prstGeom prst="rect">
-            <a:avLst/>
-          </a:prstGeom>
-          <a:noFill/>
-        </p:spPr>
-        <p:txBody>
-          <a:bodyPr wrap="square">
-            <a:spAutoFit/>
-          </a:bodyPr>
-          <a:lstStyle/>
-          <a:p>
-            <a:pPr algn="l">
-              <a:defRPr sz="1500" b="1">
-                <a:solidFill>
-                  <a:srgbClr val="059669"/>
-                </a:solidFill>
-                <a:latin typeface="Times New Roman"/>
-              </a:defRPr>
-            </a:pPr>
-            <a:r>
-              <a:t>Project Guide Review &amp; Verification: APPROVED</a:t>
-            </a:r>
-          </a:p>
-          <a:p>
-            <a:pPr algn="l">
-              <a:defRPr sz="1250" b="1">
-                <a:solidFill>
-                  <a:srgbClr val="1F4E79"/>
-                </a:solidFill>
-                <a:latin typeface="Times New Roman"/>
-              </a:defRPr>
-            </a:pPr>
-            <a:r>
-              <a:t>Supervisor: Dr. Erapaneni Gayatri, Assistant Professor Sr. Grade 1, SCOPE</a:t>
+              <a:t>Review 3 Scope &amp; Approval Confirmation:</a:t>
             </a:r>
           </a:p>
           <a:p>
@@ -7931,108 +9985,33 @@
               </a:defRPr>
             </a:pPr>
             <a:r>
-              <a:t>All Review 3 audit aspects and committee requirements have been addressed:</a:t>
-            </a:r>
-          </a:p>
-          <a:p>
-            <a:pPr algn="l">
-              <a:defRPr sz="400" b="0">
-                <a:solidFill>
-                  <a:srgbClr val="202020"/>
-                </a:solidFill>
-                <a:latin typeface="Times New Roman"/>
-              </a:defRPr>
-            </a:pPr>
-          </a:p>
-          <a:p>
-            <a:pPr algn="l">
-              <a:defRPr sz="1100" b="0">
-                <a:solidFill>
-                  <a:srgbClr val="202020"/>
-                </a:solidFill>
-                <a:latin typeface="Times New Roman"/>
-              </a:defRPr>
-            </a:pPr>
-            <a:r>
-              <a:t>  [x] Literature Survey &amp; Research Gaps: 16 peer-reviewed works evaluated; 3 concrete gaps formulated.</a:t>
-            </a:r>
-          </a:p>
-          <a:p>
-            <a:pPr algn="l">
-              <a:defRPr sz="1100" b="0">
-                <a:solidFill>
-                  <a:srgbClr val="202020"/>
-                </a:solidFill>
-                <a:latin typeface="Times New Roman"/>
-              </a:defRPr>
-            </a:pPr>
-            <a:r>
-              <a:t>  [x] Leakage-Free Preprocessing: Stratified holdout with training-only parameter estimation and balance forensics.</a:t>
-            </a:r>
-          </a:p>
-          <a:p>
-            <a:pPr algn="l">
-              <a:defRPr sz="1100" b="0">
-                <a:solidFill>
-                  <a:srgbClr val="202020"/>
-                </a:solidFill>
-                <a:latin typeface="Times New Roman"/>
-              </a:defRPr>
-            </a:pPr>
-            <a:r>
-              <a:t>  [x] Multi-Model Consensus: Fuses Random Forest, XGBoost, Deep MLP, Autoencoder; cuts false alarms by 55.6%.</a:t>
-            </a:r>
-          </a:p>
-          <a:p>
-            <a:pPr algn="l">
-              <a:defRPr sz="1100" b="0">
-                <a:solidFill>
-                  <a:srgbClr val="202020"/>
-                </a:solidFill>
-                <a:latin typeface="Times New Roman"/>
-              </a:defRPr>
-            </a:pPr>
-            <a:r>
-              <a:t>  [x] Explainability &amp; Regulatory Compliance: TreeSHAP local attributions &amp; ledger balance forensics (GDPR Art. 22).</a:t>
-            </a:r>
-          </a:p>
-          <a:p>
-            <a:pPr algn="l">
-              <a:defRPr sz="1100" b="0">
-                <a:solidFill>
-                  <a:srgbClr val="202020"/>
-                </a:solidFill>
-                <a:latin typeface="Times New Roman"/>
-              </a:defRPr>
-            </a:pPr>
-            <a:r>
-              <a:t>  [x] Real-Time Streaming &amp; Fault Tolerance: Apache Kafka pipeline with transactional outbox and synchronous broker ACK.</a:t>
-            </a:r>
-          </a:p>
-          <a:p>
-            <a:pPr algn="l">
-              <a:defRPr sz="1100" b="0">
-                <a:solidFill>
-                  <a:srgbClr val="202020"/>
-                </a:solidFill>
-                <a:latin typeface="Times New Roman"/>
-              </a:defRPr>
-            </a:pPr>
-            <a:r>
-              <a:t>  [x] Comprehensive Automated Regression Testing: 104 automated tests achieving 100% PASS rate across all suites.</a:t>
-            </a:r>
-          </a:p>
-          <a:p>
-            <a:pPr algn="l">
-              <a:defRPr sz="1100" b="0">
-                <a:solidFill>
-                  <a:srgbClr val="202020"/>
-                </a:solidFill>
-                <a:latin typeface="Times New Roman"/>
-              </a:defRPr>
-            </a:pPr>
-            <a:r>
-              <a:t>  [x] Complete Academic Deliverables: 41-page IEEE-compliant project report and working software repository finalized.</a:t>
+              <a:t>• The official supervisor approval email for BCSE497J Project-I Review 3 is attached on the right.</a:t>
+            </a:r>
+          </a:p>
+          <a:p>
+            <a:pPr algn="l">
+              <a:defRPr sz="1150" b="0">
+                <a:solidFill>
+                  <a:srgbClr val="202020"/>
+                </a:solidFill>
+                <a:latin typeface="Times New Roman"/>
+              </a:defRPr>
+            </a:pPr>
+            <a:r>
+              <a:t>• Verified academic deliverables include the Review 3 presentation deck, comprehensive 41-page project report, and working prototype codebase.</a:t>
+            </a:r>
+          </a:p>
+          <a:p>
+            <a:pPr algn="l">
+              <a:defRPr sz="1150" b="0">
+                <a:solidFill>
+                  <a:srgbClr val="202020"/>
+                </a:solidFill>
+                <a:latin typeface="Times New Roman"/>
+              </a:defRPr>
+            </a:pPr>
+            <a:r>
+              <a:t>• Detailed project outcomes and automated test verification are documented on Slide 13.</a:t>
             </a:r>
           </a:p>
         </p:txBody>
@@ -8282,8 +10261,8 @@
         </p:nvSpPr>
         <p:spPr>
           <a:xfrm>
-            <a:off x="868680" y="1755648"/>
-            <a:ext cx="3108960" cy="4078224"/>
+            <a:off x="868680" y="1783080"/>
+            <a:ext cx="3108960" cy="4023360"/>
           </a:xfrm>
           <a:prstGeom prst="rect">
             <a:avLst/>
@@ -8305,7 +10284,7 @@
               </a:defRPr>
             </a:pPr>
             <a:r>
-              <a:t>Core Research Aim</a:t>
+              <a:t>1. Multi-Model Comparative Benchmarking</a:t>
             </a:r>
           </a:p>
           <a:p>
@@ -8318,7 +10297,33 @@
               </a:defRPr>
             </a:pPr>
             <a:r>
-              <a:t>Formulate, engineer, and empirically benchmark FraudGuard AI—an explainable, multi-model fraud detection framework combining decision tree ensembles (Random Forest, XGBoost) and deep representation models (Deep Neural Network, Deep Autoencoder).</a:t>
+              <a:t>Formulate, train, and empirically benchmark four diverse fraud detection architectures:</a:t>
+            </a:r>
+          </a:p>
+          <a:p>
+            <a:pPr algn="l">
+              <a:defRPr sz="1150" b="0">
+                <a:solidFill>
+                  <a:srgbClr val="202020"/>
+                </a:solidFill>
+                <a:latin typeface="Times New Roman"/>
+              </a:defRPr>
+            </a:pPr>
+            <a:r>
+              <a:t>  • Supervised tree ensembles: Random Forest and XGBoost.</a:t>
+            </a:r>
+          </a:p>
+          <a:p>
+            <a:pPr algn="l">
+              <a:defRPr sz="1150" b="0">
+                <a:solidFill>
+                  <a:srgbClr val="202020"/>
+                </a:solidFill>
+                <a:latin typeface="Times New Roman"/>
+              </a:defRPr>
+            </a:pPr>
+            <a:r>
+              <a:t>  • Deep neural representations: Deep Neural Network (MLP) and Deep Bottleneck Autoencoder.</a:t>
             </a:r>
           </a:p>
           <a:p>
@@ -8341,7 +10346,7 @@
               </a:defRPr>
             </a:pPr>
             <a:r>
-              <a:t>Address severe real-world class imbalance (&lt;0.2% fraud) without methodological data leakage, using training-restricted oversampling (SMOTE-NC) and RobustScaler quantile normalization.</a:t>
+              <a:t>Compare individual discrimination performance across Precision, Recall, F1-Score, PR-AUC, and ROC-AUC on identical holdout partitions.</a:t>
             </a:r>
           </a:p>
         </p:txBody>
@@ -8399,8 +10404,8 @@
         </p:nvSpPr>
         <p:spPr>
           <a:xfrm>
-            <a:off x="4526280" y="1755648"/>
-            <a:ext cx="3108960" cy="4078224"/>
+            <a:off x="4526280" y="1783080"/>
+            <a:ext cx="3108960" cy="4023360"/>
           </a:xfrm>
           <a:prstGeom prst="rect">
             <a:avLst/>
@@ -8422,7 +10427,7 @@
               </a:defRPr>
             </a:pPr>
             <a:r>
-              <a:t>Operational &amp; Cost Goals</a:t>
+              <a:t>2. Leakage-Free Imbalance Handling</a:t>
             </a:r>
           </a:p>
           <a:p>
@@ -8435,7 +10440,20 @@
               </a:defRPr>
             </a:pPr>
             <a:r>
-              <a:t>Slash operational false alarms by over 55% relative to individual classifiers through an integer affirmative vote consensus rule with validation-tuned decision thresholds.</a:t>
+              <a:t>Address extreme class imbalance on the benchmark dataset:</a:t>
+            </a:r>
+          </a:p>
+          <a:p>
+            <a:pPr algn="l">
+              <a:defRPr sz="1200" b="1">
+                <a:solidFill>
+                  <a:srgbClr val="059669"/>
+                </a:solidFill>
+                <a:latin typeface="Times New Roman"/>
+              </a:defRPr>
+            </a:pPr>
+            <a:r>
+              <a:t>  • Actual Benchmark Prevalence: 225/15,000 = 1.5% fraud rate across 15,000 synthetic records.</a:t>
             </a:r>
           </a:p>
           <a:p>
@@ -8458,7 +10476,7 @@
               </a:defRPr>
             </a:pPr>
             <a:r>
-              <a:t>Quantify economic protection via asymmetric financial cost modeling ($2,500 missed fraud cost vs. $35 false alarm cost), achieving +$99,460 net financial savings (88.4% ROI over unmonitored baseline).</a:t>
+              <a:t>Prevent methodological data leakage by restricting SMOTE-NC oversampling and RobustScaler interquartile scaling strictly to training partitions, ensuring validation and testing holdouts remain uncorrupted.</a:t>
             </a:r>
           </a:p>
         </p:txBody>
@@ -8516,8 +10534,8 @@
         </p:nvSpPr>
         <p:spPr>
           <a:xfrm>
-            <a:off x="8183879" y="1755648"/>
-            <a:ext cx="3108960" cy="4078224"/>
+            <a:off x="8183879" y="1783080"/>
+            <a:ext cx="3108960" cy="4023360"/>
           </a:xfrm>
           <a:prstGeom prst="rect">
             <a:avLst/>
@@ -8539,7 +10557,7 @@
               </a:defRPr>
             </a:pPr>
             <a:r>
-              <a:t>Compliance &amp; Microservice</a:t>
+              <a:t>3. Explainable Predictions &amp; Analyst Review</a:t>
             </a:r>
           </a:p>
           <a:p>
@@ -8552,7 +10570,33 @@
               </a:defRPr>
             </a:pPr>
             <a:r>
-              <a:t>Deliver actionable compliance explanations complying with statutory regulatory frameworks (GDPR Art. 22) through TreeSHAP attributions and quantitative balance discrepancy forensics.</a:t>
+              <a:t>Embed explainable AI capabilities to assist human fraud analysts during investigation:</a:t>
+            </a:r>
+          </a:p>
+          <a:p>
+            <a:pPr algn="l">
+              <a:defRPr sz="1150" b="0">
+                <a:solidFill>
+                  <a:srgbClr val="202020"/>
+                </a:solidFill>
+                <a:latin typeface="Times New Roman"/>
+              </a:defRPr>
+            </a:pPr>
+            <a:r>
+              <a:t>  • Local TreeSHAP waterfall feature attributions identifying exact risk drivers.</a:t>
+            </a:r>
+          </a:p>
+          <a:p>
+            <a:pPr algn="l">
+              <a:defRPr sz="1150" b="0">
+                <a:solidFill>
+                  <a:srgbClr val="202020"/>
+                </a:solidFill>
+                <a:latin typeface="Times New Roman"/>
+              </a:defRPr>
+            </a:pPr>
+            <a:r>
+              <a:t>  • Quantitative balance discrepancy forensics (deltaOrig, deltaDest).</a:t>
             </a:r>
           </a:p>
           <a:p>
@@ -8575,7 +10619,7 @@
               </a:defRPr>
             </a:pPr>
             <a:r>
-              <a:t>Deploy a containerized FastAPI microservice, interactive Streamlit workspace, and an event-driven Apache Kafka real-time streaming pipeline with transactional outbox crash recovery.</a:t>
+              <a:t>Support human-in-the-loop review through an interactive dashboard with multi-model comparison and persistent audit history.</a:t>
             </a:r>
           </a:p>
         </p:txBody>
@@ -8854,7 +10898,7 @@
               </a:defRPr>
             </a:pPr>
             <a:r>
-              <a:t>Problem Context &amp; Methodology</a:t>
+              <a:t>Problem Context, Dataset &amp; Methodology</a:t>
             </a:r>
           </a:p>
           <a:p>
@@ -8867,7 +10911,7 @@
               </a:defRPr>
             </a:pPr>
             <a:r>
-              <a:t>• Industrial Challenge: Rapid digitization of commerce has triggered massive surges in electronic payment fraud. Heuristic rule systems suffer from rigidity and false alarm fatigue, while black-box deep models create serious legal liability under GDPR Art. 22.</a:t>
+              <a:t>• Industrial Challenge: Digital payment expansion requires resilient fraud detection. Traditional rule engines suffer from rigidity and false alarm fatigue, while black-box models lack interpretability for human analysts.</a:t>
             </a:r>
           </a:p>
           <a:p>
@@ -8880,7 +10924,7 @@
               </a:defRPr>
             </a:pPr>
             <a:r>
-              <a:t>• Multi-Model Consensus Architecture: FraudGuard AI unifies 4 diverse paradigms: Random Forest, XGBoost, Deep Multi-Layer Perceptrons, and a Deep Bottleneck Autoencoder. Operates an affirmative vote rule with validation-tuned operating thresholds.</a:t>
+              <a:t>• Benchmark Dataset: Evaluated on 15,000 locally generated synthetic transactions containing 225 fraud cases (1.50% fraud prevalence) across 9 mobile transaction fields.</a:t>
             </a:r>
           </a:p>
           <a:p>
@@ -8893,7 +10937,20 @@
               </a:defRPr>
             </a:pPr>
             <a:r>
-              <a:t>• Leakage-Free Data Engineering: Strict stratified holdout preserves pristine test distributions. Combines training-restricted SMOTE-NC with domain-specific balance forensics (origin/destination discrepancies, depletion ratios).</a:t>
+              <a:t>• Leakage-Free Preprocessing: Stratified 60/20/20 train/validation/test split. Quantile RobustScaler fitting and SMOTE-NC minority synthesis are restricted strictly to training partitions; domain balance forensics (deltaOrig, deltaDest, R_deplete) are computed per transaction.</a:t>
+            </a:r>
+          </a:p>
+          <a:p>
+            <a:pPr algn="l">
+              <a:defRPr sz="1150" b="0">
+                <a:solidFill>
+                  <a:srgbClr val="202020"/>
+                </a:solidFill>
+                <a:latin typeface="Times New Roman"/>
+              </a:defRPr>
+            </a:pPr>
+            <a:r>
+              <a:t>• Multi-Model Architecture: Benchmarks 4 diverse paradigms: Random Forest, XGBoost, Deep Neural Network (MLP), and Deep Bottleneck Autoencoder.</a:t>
             </a:r>
           </a:p>
         </p:txBody>
@@ -8974,7 +11031,7 @@
               </a:defRPr>
             </a:pPr>
             <a:r>
-              <a:t>Empirical Findings &amp; Production Deployment</a:t>
+              <a:t>Implemented Prototype, Workflow &amp; Experiments</a:t>
             </a:r>
           </a:p>
           <a:p>
@@ -8987,7 +11044,7 @@
               </a:defRPr>
             </a:pPr>
             <a:r>
-              <a:t>• Primary Benchmark Evaluation (3,000 Holdout txns): Full Consensus achieves Precision: 0.9091, Recall: 0.8889, F1: 0.8989, ROC-AUC: 0.9985, and PR-AUC: 0.9555. Slashes false alarms from 9 (RF) to 4 (55.6% reduction).</a:t>
+              <a:t>• Implemented Academic Prototype: Containerized FastAPI REST service, interactive Streamlit workspace, and event-driven Apache Kafka streaming consumer with transactional SQLite outbox recovery.</a:t>
             </a:r>
           </a:p>
           <a:p>
@@ -9000,7 +11057,7 @@
               </a:defRPr>
             </a:pPr>
             <a:r>
-              <a:t>• Distribution Shift Stress Test (1,000 txns, 15 frauds): Tree models suffered total recall collapse (0/15 caught) while neural representations detected 100% of frauds (15/15 caught), proving offline synthetic benchmarks cannot replace live telemetry.</a:t>
+              <a:t>• Primary Holdout Evaluation (3,000 txns, 45 frauds): Individual models achieve strong holdout discrimination: Random Forest (Recall: 0.9333, TP: 42), DNN (Precision: 1.0000, FP: 0), Autoencoder (F1: 0.9425, FP: 1), and XGBoost baseline (F1: 0.8889).</a:t>
             </a:r>
           </a:p>
           <a:p>
@@ -9013,7 +11070,20 @@
               </a:defRPr>
             </a:pPr>
             <a:r>
-              <a:t>• Production Engineering &amp; Testing: Containerized FastAPI gateway, Streamlit portal, and Kafka streaming engine with outbox crash recovery, verified across 104 automated regression tests (100% PASS) with sub-100 ms inference latency.</a:t>
+              <a:t>• Dashboard Workflow: Evaluates transactions against individual thresholds; an any-model review rule flags transactions if any detector triggers, supported by TreeSHAP local attributions and SQLite audit persistence.</a:t>
+            </a:r>
+          </a:p>
+          <a:p>
+            <a:pPr algn="l">
+              <a:defRPr sz="1150" b="1">
+                <a:solidFill>
+                  <a:srgbClr val="059669"/>
+                </a:solidFill>
+                <a:latin typeface="Times New Roman"/>
+              </a:defRPr>
+            </a:pPr>
+            <a:r>
+              <a:t>• Offline Weighted-Fusion Experiment: In a separate offline experiment, a validation-tuned weighted ensemble reduced false positives from 9 to 4 compared with Random Forest, while true positives moved from 42 to 40.</a:t>
             </a:r>
           </a:p>
         </p:txBody>
@@ -9523,7 +11593,7 @@
                         </a:defRPr>
                       </a:pPr>
                       <a:r>
-                        <a:t>No deep architectures; no local explainability.</a:t>
+                        <a:t>No neural representation learning; lacks feature-level local explainability.</a:t>
                       </a:r>
                     </a:p>
                   </a:txBody>
@@ -9669,7 +11739,7 @@
                         </a:defRPr>
                       </a:pPr>
                       <a:r>
-                        <a:t>Raw uncalibrated reconstruction distance metrics.</a:t>
+                        <a:t>Focuses on uncalibrated reconstruction distance; lacks comparative supervised baseline.</a:t>
                       </a:r>
                     </a:p>
                   </a:txBody>
@@ -9719,7 +11789,7 @@
                         </a:defRPr>
                       </a:pPr>
                       <a:r>
-                        <a:t>Supervised Tree + Anomaly</a:t>
+                        <a:t>Supervised Tree Models</a:t>
                       </a:r>
                     </a:p>
                   </a:txBody>
@@ -9743,7 +11813,7 @@
                         </a:defRPr>
                       </a:pPr>
                       <a:r>
-                        <a:t>SMOTE on whole dataset</a:t>
+                        <a:t>Resampling Techniques</a:t>
                       </a:r>
                     </a:p>
                   </a:txBody>
@@ -9767,7 +11837,7 @@
                         </a:defRPr>
                       </a:pPr>
                       <a:r>
-                        <a:t>None</a:t>
+                        <a:t>Feature Importance</a:t>
                       </a:r>
                     </a:p>
                   </a:txBody>
@@ -9791,7 +11861,7 @@
                         </a:defRPr>
                       </a:pPr>
                       <a:r>
-                        <a:t>Experimental script</a:t>
+                        <a:t>Experimental Scripts</a:t>
                       </a:r>
                     </a:p>
                   </a:txBody>
@@ -9815,7 +11885,7 @@
                         </a:defRPr>
                       </a:pPr>
                       <a:r>
-                        <a:t>Severe data leakage risk; lacks web service.</a:t>
+                        <a:t>Evaluated on static datasets; lacks real-time ingestion and end-to-end web deployment.</a:t>
                       </a:r>
                     </a:p>
                   </a:txBody>
@@ -9961,7 +12031,7 @@
                         </a:defRPr>
                       </a:pPr>
                       <a:r>
-                        <a:t>Supervised-only; lacks streaming ingestion and security.</a:t>
+                        <a:t>Supervised-only; lacks unsupervised anomaly detection and fault-tolerant streaming architecture.</a:t>
                       </a:r>
                     </a:p>
                   </a:txBody>
@@ -10011,7 +12081,7 @@
                         </a:defRPr>
                       </a:pPr>
                       <a:r>
-                        <a:t>RF, XGBoost, Deep MLP, Autoencoder</a:t>
+                        <a:t>RF, XGBoost, DNN, Autoencoder</a:t>
                       </a:r>
                     </a:p>
                   </a:txBody>
@@ -10083,7 +12153,7 @@
                         </a:defRPr>
                       </a:pPr>
                       <a:r>
-                        <a:t>FastAPI + Streamlit + Kafka</a:t>
+                        <a:t>Implemented Prototype</a:t>
                       </a:r>
                     </a:p>
                   </a:txBody>
@@ -10107,7 +12177,7 @@
                         </a:defRPr>
                       </a:pPr>
                       <a:r>
-                        <a:t>Consensus voting, outbox recovery, 104/104 tests pass.</a:t>
+                        <a:t>Four-model comparison, threshold calibration, Kafka streaming with outbox recovery, 104 passing tests.</a:t>
                       </a:r>
                     </a:p>
                   </a:txBody>
@@ -10389,7 +12459,7 @@
               </a:defRPr>
             </a:pPr>
             <a:r>
-              <a:t>Gap 1: Uncalibrated Score Fusion in Hybrid Detection Ensembles</a:t>
+              <a:t>Gap 1: Anomaly Score Normalization and Threshold Selection in Autoencoders</a:t>
             </a:r>
           </a:p>
           <a:p>
@@ -10402,7 +12472,7 @@
               </a:defRPr>
             </a:pPr>
             <a:r>
-              <a:t>• Existing Limitation: Prior hybrid frameworks add unstandardized reconstruction errors (raw MSE ranging from 0.01 to 50.0) directly to classifier probabilities in [0, 1] using arbitrary heuristics.</a:t>
+              <a:t>• Existing Limitation: Prior hybrid detection frameworks frequently use raw, unstandardized reconstruction errors (MSE) directly alongside classifier probabilities using ad-hoc heuristics without systematic validation.</a:t>
             </a:r>
           </a:p>
           <a:p>
@@ -10415,7 +12485,7 @@
               </a:defRPr>
             </a:pPr>
             <a:r>
-              <a:t>• FraudGuard AI Solution: Formulates validation-tuned threshold calibration (tau*) that maps continuous autoencoder reconstruction error into probability space before composite consensus fusion.</a:t>
+              <a:t>• FraudGuard AI Solution: Normalizes reconstruction error into an anomaly score and selects its threshold on validation data (tau*) to maximize F1, establishing a disciplined operational boundary before multi-model comparison.</a:t>
             </a:r>
           </a:p>
         </p:txBody>
@@ -10496,7 +12566,7 @@
               </a:defRPr>
             </a:pPr>
             <a:r>
-              <a:t>Gap 2: Methodological Data Leakage &amp; Evaluation Optimism</a:t>
+              <a:t>Gap 2: Methodological Data Leakage in Preprocessing Pipelines</a:t>
             </a:r>
           </a:p>
           <a:p>
@@ -10509,7 +12579,7 @@
               </a:defRPr>
             </a:pPr>
             <a:r>
-              <a:t>• Existing Limitation: Widespread published practice applies SMOTE oversampling, standardization, or feature selection across the full dataset prior to splitting, leaking test information into training phases.</a:t>
+              <a:t>• Existing Limitation: Preprocessing transformations (scaling, imputation, oversampling) are frequently fit across entire datasets prior to train/test partitioning, leading to overly optimistic benchmark metrics.</a:t>
             </a:r>
           </a:p>
           <a:p>
@@ -10522,7 +12592,7 @@
               </a:defRPr>
             </a:pPr>
             <a:r>
-              <a:t>• FraudGuard AI Solution: Enforces strict parameter freezing strictly on training partitions; holdout test partitions remain untouched and reflect true real-world operational distributions.</a:t>
+              <a:t>• FraudGuard AI Solution: Enforces strict parameter freezing on the 60% training partition only; the 20% validation and 20% test partitions remain untouched to reflect true unseen distributions.</a:t>
             </a:r>
           </a:p>
         </p:txBody>
@@ -10603,7 +12673,7 @@
               </a:defRPr>
             </a:pPr>
             <a:r>
-              <a:t>Gap 3: Absence of Production Hardening &amp; Streaming Fault Tolerance</a:t>
+              <a:t>Gap 3: Absence of Streaming Fault Tolerance in Academic Prototypes</a:t>
             </a:r>
           </a:p>
           <a:p>
@@ -10616,7 +12686,7 @@
               </a:defRPr>
             </a:pPr>
             <a:r>
-              <a:t>• Existing Limitation: Academic fraud benchmarks predominantly remain as static offline Jupyter notebooks without cryptographic authentication, role-based isolation, or streaming crash resilience.</a:t>
+              <a:t>• Existing Limitation: Academic fraud detection prototypes typically operate as offline scripts without crash resilience, risking dropped transactions during stream interruptions.</a:t>
             </a:r>
           </a:p>
           <a:p>
@@ -10629,7 +12699,7 @@
               </a:defRPr>
             </a:pPr>
             <a:r>
-              <a:t>• FraudGuard AI Solution: Deploys an event-driven Apache Kafka pipeline with transactional SQLite outbox (pending_alerts), synchronous broker ACK, and manual offset commits guaranteeing zero message loss.</a:t>
+              <a:t>• FraudGuard AI Solution: Implements an Apache Kafka consumer with transactional SQLite outbox persistence (pending_alerts), manual offset commits, and synchronous broker acknowledgements to enable retry and replay upon worker crashes.</a:t>
             </a:r>
           </a:p>
         </p:txBody>
@@ -10856,8 +12926,8 @@
         </p:blipFill>
         <p:spPr>
           <a:xfrm>
-            <a:off x="8046720" y="4663440"/>
-            <a:ext cx="1371600" cy="1188720"/>
+            <a:off x="8046720" y="4480560"/>
+            <a:ext cx="1371600" cy="1280160"/>
           </a:xfrm>
           <a:prstGeom prst="rect">
             <a:avLst/>
@@ -10886,8 +12956,8 @@
         </p:blipFill>
         <p:spPr>
           <a:xfrm>
-            <a:off x="9692640" y="4663440"/>
-            <a:ext cx="1371600" cy="1188720"/>
+            <a:off x="9692640" y="4480560"/>
+            <a:ext cx="1371600" cy="1280160"/>
           </a:xfrm>
           <a:prstGeom prst="rect">
             <a:avLst/>
@@ -10970,7 +13040,7 @@
               </a:defRPr>
             </a:pPr>
             <a:r>
-              <a:t>Technical &amp; Research Objectives</a:t>
+              <a:t>Measurable Technical Objectives</a:t>
             </a:r>
           </a:p>
           <a:p>
@@ -10983,7 +13053,7 @@
               </a:defRPr>
             </a:pPr>
             <a:r>
-              <a:t>1. Implement a leakage-free feature engineering and scaling pipeline, generating domain-specific balance forensics (deltaOrig, deltaDest, R_deplete) and restricting SMOTE-NC to training partitions.</a:t>
+              <a:t>1. Implement a leakage-free feature engineering pipeline, generating domain balance forensics (deltaOrig, deltaDest) and restricting SMOTE-NC strictly to training partitions.</a:t>
             </a:r>
           </a:p>
           <a:p>
@@ -10996,7 +13066,7 @@
               </a:defRPr>
             </a:pPr>
             <a:r>
-              <a:t>2. Design and optimize four diverse model architectures: Random Forest, XGBoost, Deep Neural Network (MLP), and Deep Bottleneck Autoencoder.</a:t>
+              <a:t>2. Train, optimize, and benchmark four diverse model architectures: Random Forest, XGBoost, Deep Neural Network (MLP), and Deep Bottleneck Autoencoder.</a:t>
             </a:r>
           </a:p>
           <a:p>
@@ -11009,7 +13079,7 @@
               </a:defRPr>
             </a:pPr>
             <a:r>
-              <a:t>3. Formulate a multi-model consensus voting and scoring engine evaluating four distinct models against validation-tuned thresholds (V(x) in {0..4} and R(x)), routing decisions to operational risk tiers.</a:t>
+              <a:t>3. Implement an interactive analyst dashboard supporting batch CSV ingestion, four-model comparison, and an any-model review rule with four operational risk tiers (LOW, MEDIUM, HIGH, CRITICAL).</a:t>
             </a:r>
           </a:p>
           <a:p>
@@ -11022,7 +13092,7 @@
               </a:defRPr>
             </a:pPr>
             <a:r>
-              <a:t>4. Integrate explainable AI capabilities, embedding TreeSHAP attributions and domain-specific balance forensics within an automated audit workflow.</a:t>
+              <a:t>4. Integrate explainable AI capabilities, embedding local TreeSHAP attributions and domain-specific balance forensics within an automated audit workflow.</a:t>
             </a:r>
           </a:p>
           <a:p>
@@ -11035,7 +13105,7 @@
               </a:defRPr>
             </a:pPr>
             <a:r>
-              <a:t>5. Develop and containerize a secure, authenticated RESTful API (FastAPI) and interactive dashboard (Streamlit) featuring salted PBKDF2/bcrypt hashing, lockout throttling, RBAC, and SQLite audit storage.</a:t>
+              <a:t>5. Construct a containerized FastAPI RESTful microservice and SQLite workspace store featuring salted PBKDF2-HMAC-SHA256 password hashing, API-key authentication, and thread-safe WAL mode.</a:t>
             </a:r>
           </a:p>
           <a:p>
@@ -11048,7 +13118,7 @@
               </a:defRPr>
             </a:pPr>
             <a:r>
-              <a:t>6. Construct an event-driven Apache Kafka real-time streaming pipeline capable of processing live transaction feeds with sub-150 ms end-to-end latency.</a:t>
+              <a:t>6. Construct an event-driven Apache Kafka real-time streaming pipeline featuring transactional outbox persistence, manual offset commits, and synchronous broker acknowledgements for crash recovery.</a:t>
             </a:r>
           </a:p>
           <a:p>
@@ -11061,7 +13131,7 @@
               </a:defRPr>
             </a:pPr>
             <a:r>
-              <a:t>7. Validate system robustness through a 104-test automated regression suite and comprehensive latency/concurrency benchmarking.</a:t>
+              <a:t>7. Validate system robustness through a 104-test automated regression suite achieving a 100% pass rate across all functional, security, and streaming modules.</a:t>
             </a:r>
           </a:p>
         </p:txBody>
@@ -11142,7 +13212,7 @@
               </a:defRPr>
             </a:pPr>
             <a:r>
-              <a:t>Identified SDGs &amp; Outcomes</a:t>
+              <a:t>Identified SDGs (Potential Relevance)</a:t>
             </a:r>
           </a:p>
           <a:p>
@@ -11155,7 +13225,7 @@
               </a:defRPr>
             </a:pPr>
             <a:r>
-              <a:t>• SDG 8 (Decent Work &amp; Economic Growth): Target 8.10 – Strengthen financial capacity and protect transaction integrity against fraud loss.</a:t>
+              <a:t>• SDG 8 (Decent Work &amp; Economic Growth): Target 8.10 – Potential relevance to strengthening digital payment resilience and protecting financial transaction integrity against fraud.</a:t>
             </a:r>
           </a:p>
           <a:p>
@@ -11168,7 +13238,7 @@
               </a:defRPr>
             </a:pPr>
             <a:r>
-              <a:t>• SDG 9 (Industry, Innovation &amp; Infrastructure): Target 9.5 – Upgrade technological capabilities and build resilient automated financial infrastructure.</a:t>
+              <a:t>• SDG 9 (Industry, Innovation &amp; Infrastructure): Target 9.5 – Potential relevance to upgrading technological capabilities and fostering robust, explainable automated infrastructure.</a:t>
             </a:r>
           </a:p>
           <a:p>
@@ -11181,82 +13251,7 @@
               </a:defRPr>
             </a:pPr>
             <a:r>
-              <a:t>• SDG 16 (Peace, Justice &amp; Strong Institutions): Target 16.5 – Substantially reduce corruption, illicit financial flows, and financial crime.</a:t>
-            </a:r>
-          </a:p>
-          <a:p>
-            <a:pPr algn="l">
-              <a:defRPr sz="600" b="0">
-                <a:solidFill>
-                  <a:srgbClr val="202020"/>
-                </a:solidFill>
-                <a:latin typeface="Times New Roman"/>
-              </a:defRPr>
-            </a:pPr>
-          </a:p>
-          <a:p>
-            <a:pPr algn="l">
-              <a:defRPr sz="1300" b="1">
-                <a:solidFill>
-                  <a:srgbClr val="059669"/>
-                </a:solidFill>
-                <a:latin typeface="Times New Roman"/>
-              </a:defRPr>
-            </a:pPr>
-            <a:r>
-              <a:t>Expected Project Outcomes:</a:t>
-            </a:r>
-          </a:p>
-          <a:p>
-            <a:pPr algn="l">
-              <a:defRPr sz="1100" b="0">
-                <a:solidFill>
-                  <a:srgbClr val="202020"/>
-                </a:solidFill>
-                <a:latin typeface="Times New Roman"/>
-              </a:defRPr>
-            </a:pPr>
-            <a:r>
-              <a:t>• Full-Stack Production Software Product</a:t>
-            </a:r>
-          </a:p>
-          <a:p>
-            <a:pPr algn="l">
-              <a:defRPr sz="1100" b="0">
-                <a:solidFill>
-                  <a:srgbClr val="202020"/>
-                </a:solidFill>
-                <a:latin typeface="Times New Roman"/>
-              </a:defRPr>
-            </a:pPr>
-            <a:r>
-              <a:t>• Open-Source GitHub Repository</a:t>
-            </a:r>
-          </a:p>
-          <a:p>
-            <a:pPr algn="l">
-              <a:defRPr sz="1100" b="0">
-                <a:solidFill>
-                  <a:srgbClr val="202020"/>
-                </a:solidFill>
-                <a:latin typeface="Times New Roman"/>
-              </a:defRPr>
-            </a:pPr>
-            <a:r>
-              <a:t>• Comprehensive 41-page Academic Report</a:t>
-            </a:r>
-          </a:p>
-          <a:p>
-            <a:pPr algn="l">
-              <a:defRPr sz="1100" b="0">
-                <a:solidFill>
-                  <a:srgbClr val="202020"/>
-                </a:solidFill>
-                <a:latin typeface="Times New Roman"/>
-              </a:defRPr>
-            </a:pPr>
-            <a:r>
-              <a:t>• Target: Scopus Indexed Conference / Journal</a:t>
+              <a:t>• SDG 16 (Peace, Justice &amp; Strong Institutions): Target 16.5 – Potential relevance to supporting compliance auditing and mitigating illicit financial flows and financial malpractices.</a:t>
             </a:r>
           </a:p>
         </p:txBody>
@@ -11343,7 +13338,7 @@
               </a:defRPr>
             </a:pPr>
             <a:r>
-              <a:t>System Architecture &amp; Consensus Pipeline</a:t>
+              <a:t>System Architecture &amp; Execution Paths</a:t>
             </a:r>
             <a:endParaRPr sz="3000" b="1" dirty="0">
               <a:latin typeface="Times New Roman" panose="02020603050405020304" pitchFamily="18" charset="0"/>
@@ -11478,7 +13473,7 @@
         <p:spPr>
           <a:xfrm>
             <a:off x="731520" y="1554480"/>
-            <a:ext cx="6858000" cy="4389120"/>
+            <a:ext cx="6583680" cy="4389120"/>
           </a:xfrm>
           <a:prstGeom prst="rect">
             <a:avLst/>
@@ -11493,8 +13488,8 @@
         </p:nvSpPr>
         <p:spPr>
           <a:xfrm>
-            <a:off x="7772400" y="1554480"/>
-            <a:ext cx="3657600" cy="4389120"/>
+            <a:off x="7498079" y="1554480"/>
+            <a:ext cx="3931920" cy="4389120"/>
           </a:xfrm>
           <a:prstGeom prst="roundRect">
             <a:avLst/>
@@ -11538,8 +13533,8 @@
         </p:nvSpPr>
         <p:spPr>
           <a:xfrm>
-            <a:off x="7909560" y="1645920"/>
-            <a:ext cx="3383280" cy="4114800"/>
+            <a:off x="7635240" y="1645920"/>
+            <a:ext cx="3657600" cy="4114800"/>
           </a:xfrm>
           <a:prstGeom prst="rect">
             <a:avLst/>
@@ -11561,7 +13556,20 @@
               </a:defRPr>
             </a:pPr>
             <a:r>
-              <a:t>Modular 4-Tier Architecture</a:t>
+              <a:t>Three Distinct Execution Paths</a:t>
+            </a:r>
+          </a:p>
+          <a:p>
+            <a:pPr algn="l">
+              <a:defRPr sz="1250" b="1">
+                <a:solidFill>
+                  <a:srgbClr val="2E75B6"/>
+                </a:solidFill>
+                <a:latin typeface="Times New Roman"/>
+              </a:defRPr>
+            </a:pPr>
+            <a:r>
+              <a:t>1. Offline Training Pipeline:</a:t>
             </a:r>
           </a:p>
           <a:p>
@@ -11574,7 +13582,7 @@
               </a:defRPr>
             </a:pPr>
             <a:r>
-              <a:t>• Tier 1: Ingestion &amp; Preprocessing: Schema validation, RobustScaler IQR bounds, median imputation, and ledger balance discrepancy engineering.</a:t>
+              <a:t>• Stratified 60/20/20 train/validation/test partitioning.</a:t>
             </a:r>
           </a:p>
           <a:p>
@@ -11587,7 +13595,7 @@
               </a:defRPr>
             </a:pPr>
             <a:r>
-              <a:t>• Tier 2: Multi-Model Scoring Engine: Concurrent execution of Random Forest, XGBoost, Deep MLP, and Deep Autoencoder with validation-tuned threshold evaluation.</a:t>
+              <a:t>• Training-only parameter estimation (RobustScaler &amp; SMOTE-NC).</a:t>
             </a:r>
           </a:p>
           <a:p>
@@ -11600,7 +13608,30 @@
               </a:defRPr>
             </a:pPr>
             <a:r>
-              <a:t>• Tier 3: Explainability &amp; Auditing: TreeSHAP local attributions and automated ledger balance tampering checks complying with GDPR Art. 22.</a:t>
+              <a:t>• Independent model training and validation threshold tuning (tau*).</a:t>
+            </a:r>
+          </a:p>
+          <a:p>
+            <a:pPr algn="l">
+              <a:defRPr sz="400" b="0">
+                <a:solidFill>
+                  <a:srgbClr val="202020"/>
+                </a:solidFill>
+                <a:latin typeface="Times New Roman"/>
+              </a:defRPr>
+            </a:pPr>
+          </a:p>
+          <a:p>
+            <a:pPr algn="l">
+              <a:defRPr sz="1250" b="1">
+                <a:solidFill>
+                  <a:srgbClr val="2E75B6"/>
+                </a:solidFill>
+                <a:latin typeface="Times New Roman"/>
+              </a:defRPr>
+            </a:pPr>
+            <a:r>
+              <a:t>2. Dashboard Inference &amp; Review:</a:t>
             </a:r>
           </a:p>
           <a:p>
@@ -11613,7 +13644,95 @@
               </a:defRPr>
             </a:pPr>
             <a:r>
-              <a:t>• Tier 4: Service Delivery &amp; Streaming: Containerized FastAPI REST gateway, multi-tenant Streamlit portal, Apache Kafka pub/sub, SQLite persistent store.</a:t>
+              <a:t>• Streamlit analyst workspace loads trained models.</a:t>
+            </a:r>
+          </a:p>
+          <a:p>
+            <a:pPr algn="l">
+              <a:defRPr sz="1100" b="0">
+                <a:solidFill>
+                  <a:srgbClr val="202020"/>
+                </a:solidFill>
+                <a:latin typeface="Times New Roman"/>
+              </a:defRPr>
+            </a:pPr>
+            <a:r>
+              <a:t>• Evaluates transactions against thresholds via any-model review rule.</a:t>
+            </a:r>
+          </a:p>
+          <a:p>
+            <a:pPr algn="l">
+              <a:defRPr sz="1100" b="0">
+                <a:solidFill>
+                  <a:srgbClr val="202020"/>
+                </a:solidFill>
+                <a:latin typeface="Times New Roman"/>
+              </a:defRPr>
+            </a:pPr>
+            <a:r>
+              <a:t>• Displays local TreeSHAP waterfall feature attributions.</a:t>
+            </a:r>
+          </a:p>
+          <a:p>
+            <a:pPr algn="l">
+              <a:defRPr sz="1100" b="0">
+                <a:solidFill>
+                  <a:srgbClr val="202020"/>
+                </a:solidFill>
+                <a:latin typeface="Times New Roman"/>
+              </a:defRPr>
+            </a:pPr>
+            <a:r>
+              <a:t>• SQLite workspace persistence store (WAL mode) saves user accounts, uploaded datasets, and review dispositions.</a:t>
+            </a:r>
+          </a:p>
+          <a:p>
+            <a:pPr algn="l">
+              <a:defRPr sz="400" b="0">
+                <a:solidFill>
+                  <a:srgbClr val="202020"/>
+                </a:solidFill>
+                <a:latin typeface="Times New Roman"/>
+              </a:defRPr>
+            </a:pPr>
+          </a:p>
+          <a:p>
+            <a:pPr algn="l">
+              <a:defRPr sz="1250" b="1">
+                <a:solidFill>
+                  <a:srgbClr val="2E75B6"/>
+                </a:solidFill>
+                <a:latin typeface="Times New Roman"/>
+              </a:defRPr>
+            </a:pPr>
+            <a:r>
+              <a:t>3. API &amp; Real-Time Streaming:</a:t>
+            </a:r>
+          </a:p>
+          <a:p>
+            <a:pPr algn="l">
+              <a:defRPr sz="1100" b="0">
+                <a:solidFill>
+                  <a:srgbClr val="202020"/>
+                </a:solidFill>
+                <a:latin typeface="Times New Roman"/>
+              </a:defRPr>
+            </a:pPr>
+            <a:r>
+              <a:t>• FastAPI REST gateway returns primary model prediction with comparison breakdown and vote fraction.</a:t>
+            </a:r>
+          </a:p>
+          <a:p>
+            <a:pPr algn="l">
+              <a:defRPr sz="1100" b="0">
+                <a:solidFill>
+                  <a:srgbClr val="202020"/>
+                </a:solidFill>
+                <a:latin typeface="Times New Roman"/>
+              </a:defRPr>
+            </a:pPr>
+            <a:r>
+              <a:t>• Apache Kafka consumer with transactional SQLite outbox and manual offset commits for crash recovery.</a:t>
             </a:r>
           </a:p>
         </p:txBody>
@@ -11894,7 +14013,7 @@
               </a:defRPr>
             </a:pPr>
             <a:r>
-              <a:t>Core Functional Requirements (FR)</a:t>
+              <a:t>Implemented Functional Requirements</a:t>
             </a:r>
           </a:p>
           <a:p>
@@ -11907,7 +14026,7 @@
               </a:defRPr>
             </a:pPr>
             <a:r>
-              <a:t>• FR-1: Real-Time Ingestion: Ingest transactions via synchronous REST API JSON payloads or real-time event-driven Apache Kafka topic streams (financial.transactions).</a:t>
+              <a:t>• FR-1: Real-Time JSON Ingestion &amp; Streaming: Ingest transaction payloads via synchronous FastAPI REST endpoints (/predict) or event-driven Apache Kafka topics (financial.transactions).</a:t>
             </a:r>
           </a:p>
           <a:p>
@@ -11920,7 +14039,7 @@
               </a:defRPr>
             </a:pPr>
             <a:r>
-              <a:t>• FR-2: Consensus Risk Scoring: Concurrently evaluate records across 4 diverse ML/DL models; compute affirmative vote count V(x) in {0..4} and composite risk score R(x).</a:t>
+              <a:t>• FR-2: Four-Model Scoring &amp; Risk Bands: Concurrently evaluate records across 4 models; triage individual predictions into four operational score bands: LOW, MEDIUM, HIGH, and CRITICAL.</a:t>
             </a:r>
           </a:p>
           <a:p>
@@ -11933,7 +14052,7 @@
               </a:defRPr>
             </a:pPr>
             <a:r>
-              <a:t>• FR-3: Operational Risk Tiering: Triage transactions into 3 actionable tiers: Low Risk (No Flag), Medium Risk (Flag for Review), and High Risk (Immediate Alert).</a:t>
+              <a:t>• FR-3: Any-Model Review Rule: Flag transactions for human review whenever any individual model score meets or exceeds its calibrated threshold tau*.</a:t>
             </a:r>
           </a:p>
           <a:p>
@@ -11946,7 +14065,7 @@
               </a:defRPr>
             </a:pPr>
             <a:r>
-              <a:t>• FR-4: Explainable Forensics: Generate local TreeSHAP waterfall charts and exact balance delta indicators (deltaOrig, deltaDest) for every scored transaction.</a:t>
+              <a:t>• FR-4: Explainable Decision Auditing: Generate local TreeSHAP feature attribution charts and quantitative balance discrepancy indicators (deltaOrig, deltaDest) for flagged records.</a:t>
             </a:r>
           </a:p>
           <a:p>
@@ -11959,7 +14078,7 @@
               </a:defRPr>
             </a:pPr>
             <a:r>
-              <a:t>• FR-5: Batch Processing &amp; Export: Ingest and score multi-thousand row CSV datasets with persistent history and downloadable filtered CSV reports.</a:t>
+              <a:t>• FR-5: Batch Processing &amp; Export: Ingest and score multi-thousand row CSV datasets with persistent history, review status tracking, and filtered CSV export.</a:t>
             </a:r>
           </a:p>
         </p:txBody>
@@ -12040,7 +14159,7 @@
               </a:defRPr>
             </a:pPr>
             <a:r>
-              <a:t>Security &amp; Reliability Specifications (NFR)</a:t>
+              <a:t>Security, Reliability &amp; Quality Controls</a:t>
             </a:r>
           </a:p>
           <a:p>
@@ -12053,7 +14172,7 @@
               </a:defRPr>
             </a:pPr>
             <a:r>
-              <a:t>• NFR-1: Cryptographic Authentication: Salted PBKDF2-HMAC-SHA256 (600,000 iterations) and bcrypt hashing; account lockout after 5 consecutive failed logins (15-min lock).</a:t>
+              <a:t>• NFR-1: Local Cryptographic Hashing: Salted PBKDF2-HMAC-SHA256 (600,000 iterations) for secure local user credential storage in SQLite.</a:t>
             </a:r>
           </a:p>
           <a:p>
@@ -12079,7 +14198,7 @@
               </a:defRPr>
             </a:pPr>
             <a:r>
-              <a:t>• NFR-3: Transactional Outbox &amp; Crash Recovery: Persistent SQLite pending_alerts table ensuring at-least-once alert delivery on worker crash and offset replay.</a:t>
+              <a:t>• NFR-3: Transactional Outbox &amp; Crash Recovery: Persistent SQLite pending_alerts table with manual Kafka offset commits enabling message replay and retry upon consumer crash.</a:t>
             </a:r>
           </a:p>
           <a:p>
@@ -12092,7 +14211,7 @@
               </a:defRPr>
             </a:pPr>
             <a:r>
-              <a:t>• NFR-4: Sub-100 ms Scoring Latency: Direct model tensor invocation achieves 44.16 ms mean scoring latency with 25.5 requests/sec single-worker throughput.</a:t>
+              <a:t>• NFR-4: Thread-Safe Persistence: SQLite WAL mode supporting concurrent analyst read/write sessions without database locking.</a:t>
             </a:r>
           </a:p>
           <a:p>
@@ -12105,7 +14224,7 @@
               </a:defRPr>
             </a:pPr>
             <a:r>
-              <a:t>• NFR-5: High Concurrency: SQLite WAL mode supporting concurrent analyst write sessions without thread locking or database corruption.</a:t>
+              <a:t>• NFR-5: Responsive Interaction: Direct model tensor invocation delivering responsive sub-second interactive scoring across dashboard workflows and streaming feeds.</a:t>
             </a:r>
           </a:p>
         </p:txBody>
